--- a/pptx canvas/Lecture2.pptx
+++ b/pptx canvas/Lecture2.pptx
@@ -5,13 +5,13 @@
     <p:sldMasterId id="2147483648" r:id="rId1"/>
   </p:sldMasterIdLst>
   <p:notesMasterIdLst>
-    <p:notesMasterId r:id="rId25"/>
+    <p:notesMasterId r:id="rId27"/>
   </p:notesMasterIdLst>
   <p:sldIdLst>
     <p:sldId id="256" r:id="rId2"/>
-    <p:sldId id="270" r:id="rId3"/>
-    <p:sldId id="295" r:id="rId4"/>
-    <p:sldId id="296" r:id="rId5"/>
+    <p:sldId id="296" r:id="rId3"/>
+    <p:sldId id="270" r:id="rId4"/>
+    <p:sldId id="295" r:id="rId5"/>
     <p:sldId id="271" r:id="rId6"/>
     <p:sldId id="297" r:id="rId7"/>
     <p:sldId id="298" r:id="rId8"/>
@@ -20,17 +20,19 @@
     <p:sldId id="299" r:id="rId11"/>
     <p:sldId id="277" r:id="rId12"/>
     <p:sldId id="273" r:id="rId13"/>
-    <p:sldId id="300" r:id="rId14"/>
-    <p:sldId id="274" r:id="rId15"/>
-    <p:sldId id="286" r:id="rId16"/>
-    <p:sldId id="287" r:id="rId17"/>
-    <p:sldId id="288" r:id="rId18"/>
-    <p:sldId id="289" r:id="rId19"/>
-    <p:sldId id="293" r:id="rId20"/>
-    <p:sldId id="284" r:id="rId21"/>
-    <p:sldId id="282" r:id="rId22"/>
-    <p:sldId id="283" r:id="rId23"/>
-    <p:sldId id="294" r:id="rId24"/>
+    <p:sldId id="302" r:id="rId14"/>
+    <p:sldId id="300" r:id="rId15"/>
+    <p:sldId id="274" r:id="rId16"/>
+    <p:sldId id="286" r:id="rId17"/>
+    <p:sldId id="287" r:id="rId18"/>
+    <p:sldId id="305" r:id="rId19"/>
+    <p:sldId id="288" r:id="rId20"/>
+    <p:sldId id="289" r:id="rId21"/>
+    <p:sldId id="293" r:id="rId22"/>
+    <p:sldId id="282" r:id="rId23"/>
+    <p:sldId id="283" r:id="rId24"/>
+    <p:sldId id="284" r:id="rId25"/>
+    <p:sldId id="301" r:id="rId26"/>
   </p:sldIdLst>
   <p:sldSz cx="12192000" cy="6858000"/>
   <p:notesSz cx="6858000" cy="9144000"/>
@@ -1914,7 +1916,7 @@
           </a:pPr>
           <a:r>
             <a:rPr lang="en-GB" sz="2000" dirty="0"/>
-            <a:t>Athlete Tracking (Physical &amp; Spatial)</a:t>
+            <a:t>Athlete Tracking</a:t>
           </a:r>
           <a:endParaRPr lang="en-US" sz="2000" dirty="0"/>
         </a:p>
@@ -2801,9 +2803,9 @@
   </dgm:ptLst>
   <dgm:cxnLst>
     <dgm:cxn modelId="{790FDC00-E3FF-4B63-887A-8ACFB0540A48}" type="presOf" srcId="{136F4BFD-0582-4579-82A5-A95C73D55870}" destId="{CAE12482-5CF7-471D-81B3-93E1D402E333}" srcOrd="0" destOrd="0" presId="urn:microsoft.com/office/officeart/2018/2/layout/IconLabelDescriptionList"/>
+    <dgm:cxn modelId="{1ADAC26C-C21D-4F5E-80D2-8F2BD6A07754}" type="presOf" srcId="{3902D11C-F772-4D98-AD43-68757266B871}" destId="{DF164D61-735C-4C87-8347-8B99FE586313}" srcOrd="0" destOrd="0" presId="urn:microsoft.com/office/officeart/2018/2/layout/IconLabelDescriptionList"/>
     <dgm:cxn modelId="{A4A1FA4D-CC62-41D9-B89B-8C82D955DCA7}" type="presOf" srcId="{BF707721-8F8B-47D7-804D-3109819BE9E5}" destId="{8E6B3E7A-9238-4392-BD23-80F64B24C815}" srcOrd="0" destOrd="0" presId="urn:microsoft.com/office/officeart/2018/2/layout/IconLabelDescriptionList"/>
     <dgm:cxn modelId="{EB4A6A4F-8117-4111-8788-25BAA3A3086B}" type="presOf" srcId="{60FFA69C-7C61-4DA1-AD1E-3AA5351D8F7B}" destId="{146C8532-5FED-4962-B4DE-1032849C3828}" srcOrd="0" destOrd="0" presId="urn:microsoft.com/office/officeart/2018/2/layout/IconLabelDescriptionList"/>
-    <dgm:cxn modelId="{1ADAC26C-C21D-4F5E-80D2-8F2BD6A07754}" type="presOf" srcId="{3902D11C-F772-4D98-AD43-68757266B871}" destId="{DF164D61-735C-4C87-8347-8B99FE586313}" srcOrd="0" destOrd="0" presId="urn:microsoft.com/office/officeart/2018/2/layout/IconLabelDescriptionList"/>
     <dgm:cxn modelId="{29660571-F26F-45B6-8E2C-167DA4BE26D0}" srcId="{136F4BFD-0582-4579-82A5-A95C73D55870}" destId="{3902D11C-F772-4D98-AD43-68757266B871}" srcOrd="0" destOrd="0" parTransId="{604A71A0-6B61-4D71-83AF-2F99DB02191E}" sibTransId="{90F04341-BC2E-414C-B73C-082CA4A032F2}"/>
     <dgm:cxn modelId="{3E5FE871-02BD-482D-BC2F-0212E6353F34}" type="presOf" srcId="{D02B5C5A-D5CF-4981-88F1-9872057F386D}" destId="{336AF011-C230-4B81-BC26-BF1B3B4EA562}" srcOrd="0" destOrd="0" presId="urn:microsoft.com/office/officeart/2018/2/layout/IconLabelDescriptionList"/>
     <dgm:cxn modelId="{B7533276-D027-4A08-AAC4-F4BA9C626469}" srcId="{83BC92FE-39A7-43AA-B371-06FC86F327F9}" destId="{BF707721-8F8B-47D7-804D-3109819BE9E5}" srcOrd="0" destOrd="0" parTransId="{0FC4F028-2679-4C1A-B02A-BBF2B9F63150}" sibTransId="{AD3A7166-8836-435B-B8AE-8C254DF1AADE}"/>
@@ -3107,7 +3109,7 @@
           </a:pPr>
           <a:r>
             <a:rPr lang="en-GB" sz="2000" kern="1200" dirty="0"/>
-            <a:t>Athlete Tracking (Physical &amp; Spatial)</a:t>
+            <a:t>Athlete Tracking</a:t>
           </a:r>
           <a:endParaRPr lang="en-US" sz="2000" kern="1200" dirty="0"/>
         </a:p>
@@ -6559,7 +6561,7 @@
           <a:p>
             <a:fld id="{4995A223-E7C9-A243-9A70-FE01E1A1DD65}" type="datetimeFigureOut">
               <a:rPr lang="en-US" smtClean="0"/>
-              <a:t>8/23/26</a:t>
+              <a:t>9/1/2026</a:t>
             </a:fld>
             <a:endParaRPr lang="en-US"/>
           </a:p>
@@ -6986,6 +6988,226 @@
           <a:bodyPr/>
           <a:lstStyle/>
           <a:p>
+            <a:r>
+              <a:rPr lang="en-US" dirty="0"/>
+              <a:t>STUDENTS SHOULD BE ABLE TO IDENTIFY WHICH DOMAIN THEIR QUESTION IS IN</a:t>
+            </a:r>
+          </a:p>
+          <a:p>
+            <a:pPr marL="171450" indent="-171450">
+              <a:buFontTx/>
+              <a:buChar char="-"/>
+            </a:pPr>
+            <a:r>
+              <a:rPr lang="en-US" dirty="0"/>
+              <a:t>Is it about signing talent?</a:t>
+            </a:r>
+          </a:p>
+          <a:p>
+            <a:pPr marL="171450" indent="-171450">
+              <a:buFontTx/>
+              <a:buChar char="-"/>
+            </a:pPr>
+            <a:r>
+              <a:rPr lang="en-US" dirty="0"/>
+              <a:t>Is it about athlete’s training?</a:t>
+            </a:r>
+          </a:p>
+          <a:p>
+            <a:pPr marL="171450" indent="-171450">
+              <a:buFontTx/>
+              <a:buChar char="-"/>
+            </a:pPr>
+            <a:r>
+              <a:rPr lang="en-US" dirty="0"/>
+              <a:t>Is it about how we play the game?</a:t>
+            </a:r>
+          </a:p>
+          <a:p>
+            <a:pPr marL="171450" indent="-171450">
+              <a:buFontTx/>
+              <a:buChar char="-"/>
+            </a:pPr>
+            <a:endParaRPr lang="en-US" dirty="0"/>
+          </a:p>
+        </p:txBody>
+      </p:sp>
+      <p:sp>
+        <p:nvSpPr>
+          <p:cNvPr id="4" name="Slide Number Placeholder 3"/>
+          <p:cNvSpPr>
+            <a:spLocks noGrp="1"/>
+          </p:cNvSpPr>
+          <p:nvPr>
+            <p:ph type="sldNum" sz="quarter" idx="5"/>
+          </p:nvPr>
+        </p:nvSpPr>
+        <p:spPr/>
+        <p:txBody>
+          <a:bodyPr/>
+          <a:lstStyle/>
+          <a:p>
+            <a:fld id="{117D17FD-8842-8E4F-8C3E-EC8B634B2D5A}" type="slidenum">
+              <a:rPr lang="en-US" smtClean="0"/>
+              <a:t>4</a:t>
+            </a:fld>
+            <a:endParaRPr lang="en-US"/>
+          </a:p>
+        </p:txBody>
+      </p:sp>
+    </p:spTree>
+    <p:extLst>
+      <p:ext uri="{BB962C8B-B14F-4D97-AF65-F5344CB8AC3E}">
+        <p14:creationId xmlns:p14="http://schemas.microsoft.com/office/powerpoint/2010/main" val="1153706077"/>
+      </p:ext>
+    </p:extLst>
+  </p:cSld>
+  <p:clrMapOvr>
+    <a:masterClrMapping/>
+  </p:clrMapOvr>
+</p:notes>
+</file>
+
+<file path=ppt/notesSlides/notesSlide3.xml><?xml version="1.0" encoding="utf-8"?>
+<p:notes xmlns:a="http://schemas.openxmlformats.org/drawingml/2006/main" xmlns:r="http://schemas.openxmlformats.org/officeDocument/2006/relationships" xmlns:p="http://schemas.openxmlformats.org/presentationml/2006/main">
+  <p:cSld>
+    <p:spTree>
+      <p:nvGrpSpPr>
+        <p:cNvPr id="1" name=""/>
+        <p:cNvGrpSpPr/>
+        <p:nvPr/>
+      </p:nvGrpSpPr>
+      <p:grpSpPr>
+        <a:xfrm>
+          <a:off x="0" y="0"/>
+          <a:ext cx="0" cy="0"/>
+          <a:chOff x="0" y="0"/>
+          <a:chExt cx="0" cy="0"/>
+        </a:xfrm>
+      </p:grpSpPr>
+      <p:sp>
+        <p:nvSpPr>
+          <p:cNvPr id="2" name="Slide Image Placeholder 1"/>
+          <p:cNvSpPr>
+            <a:spLocks noGrp="1" noRot="1" noChangeAspect="1"/>
+          </p:cNvSpPr>
+          <p:nvPr>
+            <p:ph type="sldImg"/>
+          </p:nvPr>
+        </p:nvSpPr>
+        <p:spPr/>
+      </p:sp>
+      <p:sp>
+        <p:nvSpPr>
+          <p:cNvPr id="3" name="Notes Placeholder 2"/>
+          <p:cNvSpPr>
+            <a:spLocks noGrp="1"/>
+          </p:cNvSpPr>
+          <p:nvPr>
+            <p:ph type="body" idx="1"/>
+          </p:nvPr>
+        </p:nvSpPr>
+        <p:spPr/>
+        <p:txBody>
+          <a:bodyPr/>
+          <a:lstStyle/>
+          <a:p>
+            <a:r>
+              <a:rPr lang="en-US" dirty="0"/>
+              <a:t>One of the things to consider when investigating scouting domain</a:t>
+            </a:r>
+          </a:p>
+        </p:txBody>
+      </p:sp>
+      <p:sp>
+        <p:nvSpPr>
+          <p:cNvPr id="4" name="Slide Number Placeholder 3"/>
+          <p:cNvSpPr>
+            <a:spLocks noGrp="1"/>
+          </p:cNvSpPr>
+          <p:nvPr>
+            <p:ph type="sldNum" sz="quarter" idx="5"/>
+          </p:nvPr>
+        </p:nvSpPr>
+        <p:spPr/>
+        <p:txBody>
+          <a:bodyPr/>
+          <a:lstStyle/>
+          <a:p>
+            <a:fld id="{117D17FD-8842-8E4F-8C3E-EC8B634B2D5A}" type="slidenum">
+              <a:rPr lang="en-US" smtClean="0"/>
+              <a:t>6</a:t>
+            </a:fld>
+            <a:endParaRPr lang="en-US"/>
+          </a:p>
+        </p:txBody>
+      </p:sp>
+    </p:spTree>
+    <p:extLst>
+      <p:ext uri="{BB962C8B-B14F-4D97-AF65-F5344CB8AC3E}">
+        <p14:creationId xmlns:p14="http://schemas.microsoft.com/office/powerpoint/2010/main" val="3475043042"/>
+      </p:ext>
+    </p:extLst>
+  </p:cSld>
+  <p:clrMapOvr>
+    <a:masterClrMapping/>
+  </p:clrMapOvr>
+</p:notes>
+</file>
+
+<file path=ppt/notesSlides/notesSlide4.xml><?xml version="1.0" encoding="utf-8"?>
+<p:notes xmlns:a="http://schemas.openxmlformats.org/drawingml/2006/main" xmlns:r="http://schemas.openxmlformats.org/officeDocument/2006/relationships" xmlns:p="http://schemas.openxmlformats.org/presentationml/2006/main">
+  <p:cSld>
+    <p:spTree>
+      <p:nvGrpSpPr>
+        <p:cNvPr id="1" name=""/>
+        <p:cNvGrpSpPr/>
+        <p:nvPr/>
+      </p:nvGrpSpPr>
+      <p:grpSpPr>
+        <a:xfrm>
+          <a:off x="0" y="0"/>
+          <a:ext cx="0" cy="0"/>
+          <a:chOff x="0" y="0"/>
+          <a:chExt cx="0" cy="0"/>
+        </a:xfrm>
+      </p:grpSpPr>
+      <p:sp>
+        <p:nvSpPr>
+          <p:cNvPr id="2" name="Slide Image Placeholder 1"/>
+          <p:cNvSpPr>
+            <a:spLocks noGrp="1" noRot="1" noChangeAspect="1"/>
+          </p:cNvSpPr>
+          <p:nvPr>
+            <p:ph type="sldImg"/>
+          </p:nvPr>
+        </p:nvSpPr>
+        <p:spPr/>
+      </p:sp>
+      <p:sp>
+        <p:nvSpPr>
+          <p:cNvPr id="3" name="Notes Placeholder 2"/>
+          <p:cNvSpPr>
+            <a:spLocks noGrp="1"/>
+          </p:cNvSpPr>
+          <p:nvPr>
+            <p:ph type="body" idx="1"/>
+          </p:nvPr>
+        </p:nvSpPr>
+        <p:spPr/>
+        <p:txBody>
+          <a:bodyPr/>
+          <a:lstStyle/>
+          <a:p>
+            <a:r>
+              <a:rPr lang="en-US" dirty="0"/>
+              <a:t>Often times scouting does not rely on a single data point (it may in your project)</a:t>
+            </a:r>
+          </a:p>
+          <a:p>
+            <a:endParaRPr lang="en-US" dirty="0"/>
+          </a:p>
+          <a:p>
             <a:pPr marL="0" marR="0" lvl="0" indent="0" algn="l" defTabSz="914400" rtl="0" eaLnBrk="1" fontAlgn="auto" latinLnBrk="0" hangingPunct="1">
               <a:lnSpc>
                 <a:spcPct val="100000"/>
@@ -7004,16 +7226,24 @@
               <a:defRPr/>
             </a:pPr>
             <a:r>
-              <a:rPr lang="en-GB" dirty="0"/>
-              <a:t>Sports analytics is not defined by how complicated the method is. It is defined by whether data are being used thoughtfully to understand a problem and support a decision. Sometimes that requires a predictive model. </a:t>
-            </a:r>
-            <a:r>
-              <a:rPr lang="en-GB"/>
-              <a:t>Often, it requires accurate reporting, appropriate context, and clear communication.</a:t>
-            </a:r>
-          </a:p>
-          <a:p>
-            <a:endParaRPr lang="en-US"/>
+              <a:rPr lang="en-GB" dirty="0">
+                <a:solidFill>
+                  <a:srgbClr val="FF0000"/>
+                </a:solidFill>
+              </a:rPr>
+              <a:t>Which source would you trust most?</a:t>
+            </a:r>
+            <a:endParaRPr lang="en-US" dirty="0">
+              <a:solidFill>
+                <a:srgbClr val="FF0000"/>
+              </a:solidFill>
+            </a:endParaRPr>
+          </a:p>
+          <a:p>
+            <a:r>
+              <a:rPr lang="en-US" dirty="0"/>
+              <a:t> and why?</a:t>
+            </a:r>
           </a:p>
         </p:txBody>
       </p:sp>
@@ -7034,7 +7264,288 @@
           <a:p>
             <a:fld id="{117D17FD-8842-8E4F-8C3E-EC8B634B2D5A}" type="slidenum">
               <a:rPr lang="en-US" smtClean="0"/>
-              <a:t>20</a:t>
+              <a:t>7</a:t>
+            </a:fld>
+            <a:endParaRPr lang="en-US"/>
+          </a:p>
+        </p:txBody>
+      </p:sp>
+    </p:spTree>
+    <p:extLst>
+      <p:ext uri="{BB962C8B-B14F-4D97-AF65-F5344CB8AC3E}">
+        <p14:creationId xmlns:p14="http://schemas.microsoft.com/office/powerpoint/2010/main" val="1371583128"/>
+      </p:ext>
+    </p:extLst>
+  </p:cSld>
+  <p:clrMapOvr>
+    <a:masterClrMapping/>
+  </p:clrMapOvr>
+</p:notes>
+</file>
+
+<file path=ppt/notesSlides/notesSlide5.xml><?xml version="1.0" encoding="utf-8"?>
+<p:notes xmlns:a="http://schemas.openxmlformats.org/drawingml/2006/main" xmlns:r="http://schemas.openxmlformats.org/officeDocument/2006/relationships" xmlns:p="http://schemas.openxmlformats.org/presentationml/2006/main">
+  <p:cSld>
+    <p:spTree>
+      <p:nvGrpSpPr>
+        <p:cNvPr id="1" name=""/>
+        <p:cNvGrpSpPr/>
+        <p:nvPr/>
+      </p:nvGrpSpPr>
+      <p:grpSpPr>
+        <a:xfrm>
+          <a:off x="0" y="0"/>
+          <a:ext cx="0" cy="0"/>
+          <a:chOff x="0" y="0"/>
+          <a:chExt cx="0" cy="0"/>
+        </a:xfrm>
+      </p:grpSpPr>
+      <p:sp>
+        <p:nvSpPr>
+          <p:cNvPr id="2" name="Slide Image Placeholder 1"/>
+          <p:cNvSpPr>
+            <a:spLocks noGrp="1" noRot="1" noChangeAspect="1"/>
+          </p:cNvSpPr>
+          <p:nvPr>
+            <p:ph type="sldImg"/>
+          </p:nvPr>
+        </p:nvSpPr>
+        <p:spPr/>
+      </p:sp>
+      <p:sp>
+        <p:nvSpPr>
+          <p:cNvPr id="3" name="Notes Placeholder 2"/>
+          <p:cNvSpPr>
+            <a:spLocks noGrp="1"/>
+          </p:cNvSpPr>
+          <p:nvPr>
+            <p:ph type="body" idx="1"/>
+          </p:nvPr>
+        </p:nvSpPr>
+        <p:spPr/>
+        <p:txBody>
+          <a:bodyPr/>
+          <a:lstStyle/>
+          <a:p>
+            <a:r>
+              <a:rPr lang="en-US" dirty="0"/>
+              <a:t>What is the context here?</a:t>
+            </a:r>
+          </a:p>
+        </p:txBody>
+      </p:sp>
+      <p:sp>
+        <p:nvSpPr>
+          <p:cNvPr id="4" name="Slide Number Placeholder 3"/>
+          <p:cNvSpPr>
+            <a:spLocks noGrp="1"/>
+          </p:cNvSpPr>
+          <p:nvPr>
+            <p:ph type="sldNum" sz="quarter" idx="5"/>
+          </p:nvPr>
+        </p:nvSpPr>
+        <p:spPr/>
+        <p:txBody>
+          <a:bodyPr/>
+          <a:lstStyle/>
+          <a:p>
+            <a:fld id="{117D17FD-8842-8E4F-8C3E-EC8B634B2D5A}" type="slidenum">
+              <a:rPr lang="en-US" smtClean="0"/>
+              <a:t>10</a:t>
+            </a:fld>
+            <a:endParaRPr lang="en-US"/>
+          </a:p>
+        </p:txBody>
+      </p:sp>
+    </p:spTree>
+    <p:extLst>
+      <p:ext uri="{BB962C8B-B14F-4D97-AF65-F5344CB8AC3E}">
+        <p14:creationId xmlns:p14="http://schemas.microsoft.com/office/powerpoint/2010/main" val="3278033118"/>
+      </p:ext>
+    </p:extLst>
+  </p:cSld>
+  <p:clrMapOvr>
+    <a:masterClrMapping/>
+  </p:clrMapOvr>
+</p:notes>
+</file>
+
+<file path=ppt/notesSlides/notesSlide6.xml><?xml version="1.0" encoding="utf-8"?>
+<p:notes xmlns:a="http://schemas.openxmlformats.org/drawingml/2006/main" xmlns:r="http://schemas.openxmlformats.org/officeDocument/2006/relationships" xmlns:p="http://schemas.openxmlformats.org/presentationml/2006/main">
+  <p:cSld>
+    <p:spTree>
+      <p:nvGrpSpPr>
+        <p:cNvPr id="1" name=""/>
+        <p:cNvGrpSpPr/>
+        <p:nvPr/>
+      </p:nvGrpSpPr>
+      <p:grpSpPr>
+        <a:xfrm>
+          <a:off x="0" y="0"/>
+          <a:ext cx="0" cy="0"/>
+          <a:chOff x="0" y="0"/>
+          <a:chExt cx="0" cy="0"/>
+        </a:xfrm>
+      </p:grpSpPr>
+      <p:sp>
+        <p:nvSpPr>
+          <p:cNvPr id="2" name="Slide Image Placeholder 1"/>
+          <p:cNvSpPr>
+            <a:spLocks noGrp="1" noRot="1" noChangeAspect="1"/>
+          </p:cNvSpPr>
+          <p:nvPr>
+            <p:ph type="sldImg"/>
+          </p:nvPr>
+        </p:nvSpPr>
+        <p:spPr/>
+      </p:sp>
+      <p:sp>
+        <p:nvSpPr>
+          <p:cNvPr id="3" name="Notes Placeholder 2"/>
+          <p:cNvSpPr>
+            <a:spLocks noGrp="1"/>
+          </p:cNvSpPr>
+          <p:nvPr>
+            <p:ph type="body" idx="1"/>
+          </p:nvPr>
+        </p:nvSpPr>
+        <p:spPr/>
+        <p:txBody>
+          <a:bodyPr/>
+          <a:lstStyle/>
+          <a:p>
+            <a:r>
+              <a:rPr lang="en-US" dirty="0"/>
+              <a:t>Very important, we will come back to this later</a:t>
+            </a:r>
+          </a:p>
+        </p:txBody>
+      </p:sp>
+      <p:sp>
+        <p:nvSpPr>
+          <p:cNvPr id="4" name="Slide Number Placeholder 3"/>
+          <p:cNvSpPr>
+            <a:spLocks noGrp="1"/>
+          </p:cNvSpPr>
+          <p:nvPr>
+            <p:ph type="sldNum" sz="quarter" idx="5"/>
+          </p:nvPr>
+        </p:nvSpPr>
+        <p:spPr/>
+        <p:txBody>
+          <a:bodyPr/>
+          <a:lstStyle/>
+          <a:p>
+            <a:fld id="{117D17FD-8842-8E4F-8C3E-EC8B634B2D5A}" type="slidenum">
+              <a:rPr lang="en-US" smtClean="0"/>
+              <a:t>18</a:t>
+            </a:fld>
+            <a:endParaRPr lang="en-US"/>
+          </a:p>
+        </p:txBody>
+      </p:sp>
+    </p:spTree>
+    <p:extLst>
+      <p:ext uri="{BB962C8B-B14F-4D97-AF65-F5344CB8AC3E}">
+        <p14:creationId xmlns:p14="http://schemas.microsoft.com/office/powerpoint/2010/main" val="1379439289"/>
+      </p:ext>
+    </p:extLst>
+  </p:cSld>
+  <p:clrMapOvr>
+    <a:masterClrMapping/>
+  </p:clrMapOvr>
+</p:notes>
+</file>
+
+<file path=ppt/notesSlides/notesSlide7.xml><?xml version="1.0" encoding="utf-8"?>
+<p:notes xmlns:a="http://schemas.openxmlformats.org/drawingml/2006/main" xmlns:r="http://schemas.openxmlformats.org/officeDocument/2006/relationships" xmlns:p="http://schemas.openxmlformats.org/presentationml/2006/main">
+  <p:cSld>
+    <p:spTree>
+      <p:nvGrpSpPr>
+        <p:cNvPr id="1" name=""/>
+        <p:cNvGrpSpPr/>
+        <p:nvPr/>
+      </p:nvGrpSpPr>
+      <p:grpSpPr>
+        <a:xfrm>
+          <a:off x="0" y="0"/>
+          <a:ext cx="0" cy="0"/>
+          <a:chOff x="0" y="0"/>
+          <a:chExt cx="0" cy="0"/>
+        </a:xfrm>
+      </p:grpSpPr>
+      <p:sp>
+        <p:nvSpPr>
+          <p:cNvPr id="2" name="Slide Image Placeholder 1"/>
+          <p:cNvSpPr>
+            <a:spLocks noGrp="1" noRot="1" noChangeAspect="1"/>
+          </p:cNvSpPr>
+          <p:nvPr>
+            <p:ph type="sldImg"/>
+          </p:nvPr>
+        </p:nvSpPr>
+        <p:spPr/>
+      </p:sp>
+      <p:sp>
+        <p:nvSpPr>
+          <p:cNvPr id="3" name="Notes Placeholder 2"/>
+          <p:cNvSpPr>
+            <a:spLocks noGrp="1"/>
+          </p:cNvSpPr>
+          <p:nvPr>
+            <p:ph type="body" idx="1"/>
+          </p:nvPr>
+        </p:nvSpPr>
+        <p:spPr/>
+        <p:txBody>
+          <a:bodyPr/>
+          <a:lstStyle/>
+          <a:p>
+            <a:pPr marL="0" marR="0" lvl="0" indent="0" algn="l" defTabSz="914400" rtl="0" eaLnBrk="1" fontAlgn="auto" latinLnBrk="0" hangingPunct="1">
+              <a:lnSpc>
+                <a:spcPct val="100000"/>
+              </a:lnSpc>
+              <a:spcBef>
+                <a:spcPts val="0"/>
+              </a:spcBef>
+              <a:spcAft>
+                <a:spcPts val="0"/>
+              </a:spcAft>
+              <a:buClrTx/>
+              <a:buSzTx/>
+              <a:buFontTx/>
+              <a:buNone/>
+              <a:tabLst/>
+              <a:defRPr/>
+            </a:pPr>
+            <a:r>
+              <a:rPr lang="en-GB" dirty="0"/>
+              <a:t>Sports analytics is not defined by how complicated the method is. It is defined by whether data are being used thoughtfully to understand a problem and support a decision. Sometimes that requires a predictive model. Often, it requires accurate reporting, appropriate context, and clear communication.</a:t>
+            </a:r>
+          </a:p>
+          <a:p>
+            <a:endParaRPr lang="en-US" dirty="0"/>
+          </a:p>
+        </p:txBody>
+      </p:sp>
+      <p:sp>
+        <p:nvSpPr>
+          <p:cNvPr id="4" name="Slide Number Placeholder 3"/>
+          <p:cNvSpPr>
+            <a:spLocks noGrp="1"/>
+          </p:cNvSpPr>
+          <p:nvPr>
+            <p:ph type="sldNum" sz="quarter" idx="5"/>
+          </p:nvPr>
+        </p:nvSpPr>
+        <p:spPr/>
+        <p:txBody>
+          <a:bodyPr/>
+          <a:lstStyle/>
+          <a:p>
+            <a:fld id="{117D17FD-8842-8E4F-8C3E-EC8B634B2D5A}" type="slidenum">
+              <a:rPr lang="en-US" smtClean="0"/>
+              <a:t>24</a:t>
             </a:fld>
             <a:endParaRPr lang="en-US"/>
           </a:p>
@@ -7210,7 +7721,7 @@
           <a:p>
             <a:fld id="{1BF61C71-767E-B84C-BFB3-7B18856D27F4}" type="datetimeFigureOut">
               <a:rPr lang="en-US" smtClean="0"/>
-              <a:t>8/23/26</a:t>
+              <a:t>9/1/2026</a:t>
             </a:fld>
             <a:endParaRPr lang="en-US"/>
           </a:p>
@@ -7418,7 +7929,7 @@
           <a:p>
             <a:fld id="{1BF61C71-767E-B84C-BFB3-7B18856D27F4}" type="datetimeFigureOut">
               <a:rPr lang="en-US" smtClean="0"/>
-              <a:t>8/23/26</a:t>
+              <a:t>9/1/2026</a:t>
             </a:fld>
             <a:endParaRPr lang="en-US"/>
           </a:p>
@@ -7636,7 +8147,7 @@
           <a:p>
             <a:fld id="{1BF61C71-767E-B84C-BFB3-7B18856D27F4}" type="datetimeFigureOut">
               <a:rPr lang="en-US" smtClean="0"/>
-              <a:t>8/23/26</a:t>
+              <a:t>9/1/2026</a:t>
             </a:fld>
             <a:endParaRPr lang="en-US"/>
           </a:p>
@@ -7844,7 +8355,7 @@
           <a:p>
             <a:fld id="{1BF61C71-767E-B84C-BFB3-7B18856D27F4}" type="datetimeFigureOut">
               <a:rPr lang="en-US" smtClean="0"/>
-              <a:t>8/23/26</a:t>
+              <a:t>9/1/2026</a:t>
             </a:fld>
             <a:endParaRPr lang="en-US"/>
           </a:p>
@@ -8128,7 +8639,7 @@
           <a:p>
             <a:fld id="{1BF61C71-767E-B84C-BFB3-7B18856D27F4}" type="datetimeFigureOut">
               <a:rPr lang="en-US" smtClean="0"/>
-              <a:t>8/23/26</a:t>
+              <a:t>9/1/2026</a:t>
             </a:fld>
             <a:endParaRPr lang="en-US"/>
           </a:p>
@@ -8404,7 +8915,7 @@
           <a:p>
             <a:fld id="{1BF61C71-767E-B84C-BFB3-7B18856D27F4}" type="datetimeFigureOut">
               <a:rPr lang="en-US" smtClean="0"/>
-              <a:t>8/23/26</a:t>
+              <a:t>9/1/2026</a:t>
             </a:fld>
             <a:endParaRPr lang="en-US"/>
           </a:p>
@@ -8827,7 +9338,7 @@
           <a:p>
             <a:fld id="{1BF61C71-767E-B84C-BFB3-7B18856D27F4}" type="datetimeFigureOut">
               <a:rPr lang="en-US" smtClean="0"/>
-              <a:t>8/23/26</a:t>
+              <a:t>9/1/2026</a:t>
             </a:fld>
             <a:endParaRPr lang="en-US"/>
           </a:p>
@@ -8977,7 +9488,7 @@
           <a:p>
             <a:fld id="{1BF61C71-767E-B84C-BFB3-7B18856D27F4}" type="datetimeFigureOut">
               <a:rPr lang="en-US" smtClean="0"/>
-              <a:t>8/23/26</a:t>
+              <a:t>9/1/2026</a:t>
             </a:fld>
             <a:endParaRPr lang="en-US"/>
           </a:p>
@@ -9098,7 +9609,7 @@
           <a:p>
             <a:fld id="{1BF61C71-767E-B84C-BFB3-7B18856D27F4}" type="datetimeFigureOut">
               <a:rPr lang="en-US" smtClean="0"/>
-              <a:t>8/23/26</a:t>
+              <a:t>9/1/2026</a:t>
             </a:fld>
             <a:endParaRPr lang="en-US"/>
           </a:p>
@@ -9419,7 +9930,7 @@
           <a:p>
             <a:fld id="{1BF61C71-767E-B84C-BFB3-7B18856D27F4}" type="datetimeFigureOut">
               <a:rPr lang="en-US" smtClean="0"/>
-              <a:t>8/23/26</a:t>
+              <a:t>9/1/2026</a:t>
             </a:fld>
             <a:endParaRPr lang="en-US"/>
           </a:p>
@@ -9716,7 +10227,7 @@
           <a:p>
             <a:fld id="{1BF61C71-767E-B84C-BFB3-7B18856D27F4}" type="datetimeFigureOut">
               <a:rPr lang="en-US" smtClean="0"/>
-              <a:t>8/23/26</a:t>
+              <a:t>9/1/2026</a:t>
             </a:fld>
             <a:endParaRPr lang="en-US"/>
           </a:p>
@@ -9970,7 +10481,7 @@
           <a:p>
             <a:fld id="{1BF61C71-767E-B84C-BFB3-7B18856D27F4}" type="datetimeFigureOut">
               <a:rPr lang="en-US" smtClean="0"/>
-              <a:t>8/23/26</a:t>
+              <a:t>9/1/2026</a:t>
             </a:fld>
             <a:endParaRPr lang="en-US"/>
           </a:p>
@@ -10419,8 +10930,8 @@
           <a:lstStyle/>
           <a:p>
             <a:r>
-              <a:rPr lang="en-GB" b="1" dirty="0"/>
-              <a:t>The Three Domains: Tracking, Scouting, and Strategy</a:t>
+              <a:rPr lang="en-GB" dirty="0"/>
+              <a:t>The Three Domains: Scouting, Tracking, and Strategy</a:t>
             </a:r>
           </a:p>
         </p:txBody>
@@ -10508,13 +11019,13 @@
         <p:spPr/>
         <p:txBody>
           <a:bodyPr>
-            <a:normAutofit fontScale="90000"/>
+            <a:normAutofit/>
           </a:bodyPr>
           <a:lstStyle/>
           <a:p>
             <a:r>
               <a:rPr lang="en-GB" dirty="0"/>
-              <a:t>Load Monitoring Does Not Automatically Prevent Injury</a:t>
+              <a:t>Monitoring Data Requires Interpretation</a:t>
             </a:r>
             <a:endParaRPr lang="en-US" dirty="0"/>
           </a:p>
@@ -10538,55 +11049,54 @@
         </p:nvSpPr>
         <p:spPr/>
         <p:txBody>
-          <a:bodyPr/>
+          <a:bodyPr>
+            <a:normAutofit/>
+          </a:bodyPr>
           <a:lstStyle/>
           <a:p>
             <a:pPr lvl="0"/>
             <a:r>
               <a:rPr lang="en-GB" dirty="0"/>
-              <a:t>Athlete data can identify unusual patterns and support better conversations.</a:t>
-            </a:r>
+              <a:t>Athlete monitoring data can identify unusual patterns or changes. </a:t>
+            </a:r>
+          </a:p>
+          <a:p>
+            <a:pPr lvl="1"/>
+            <a:endParaRPr lang="en-GB" dirty="0"/>
           </a:p>
           <a:p>
             <a:pPr lvl="0"/>
             <a:r>
               <a:rPr lang="en-GB" dirty="0"/>
-              <a:t>A flag indicates that something may deserve attention; it does not diagnose a problem.</a:t>
+              <a:t>A flag indicates that something may deserve </a:t>
+            </a:r>
+            <a:r>
+              <a:rPr lang="en-GB" b="1" dirty="0"/>
+              <a:t>attention </a:t>
+            </a:r>
+            <a:r>
+              <a:rPr lang="en-GB" dirty="0"/>
+              <a:t>but does not diagnose a problem. </a:t>
             </a:r>
           </a:p>
           <a:p>
             <a:pPr lvl="0"/>
+            <a:endParaRPr lang="en-GB" dirty="0"/>
+          </a:p>
+          <a:p>
+            <a:pPr lvl="0"/>
             <a:r>
               <a:rPr lang="en-GB" dirty="0"/>
-              <a:t>Injury and performance are affected by many interacting factors.</a:t>
-            </a:r>
-          </a:p>
-          <a:p>
-            <a:pPr lvl="0"/>
+              <a:t>Coaches and practitioners must interpret the information within the athlete’s broader </a:t>
+            </a:r>
+            <a:r>
+              <a:rPr lang="en-GB" b="1" dirty="0"/>
+              <a:t>context</a:t>
+            </a:r>
             <a:r>
               <a:rPr lang="en-GB" dirty="0"/>
-              <a:t>The practitioner still has to interpret the evidence and decide what to do.</a:t>
-            </a:r>
-          </a:p>
-          <a:p>
-            <a:r>
-              <a:rPr lang="en-GB" dirty="0"/>
-              <a:t>Measurement supports judgment but it does not remove uncertainty.</a:t>
-            </a:r>
-          </a:p>
-          <a:p>
-            <a:pPr lvl="1"/>
-            <a:r>
-              <a:rPr lang="en-GB" dirty="0"/>
-              <a:t>Injury prediction is </a:t>
-            </a:r>
-            <a:r>
-              <a:rPr lang="en-GB" b="1" i="1" dirty="0"/>
-              <a:t>multimodal</a:t>
-            </a:r>
-          </a:p>
-          <a:p>
-            <a:endParaRPr lang="en-US" dirty="0"/>
+              <a:t>.</a:t>
+            </a:r>
           </a:p>
         </p:txBody>
       </p:sp>
@@ -10600,6 +11110,186 @@
   <p:clrMapOvr>
     <a:masterClrMapping/>
   </p:clrMapOvr>
+  <p:timing>
+    <p:tnLst>
+      <p:par>
+        <p:cTn id="1" dur="indefinite" restart="never" nodeType="tmRoot">
+          <p:childTnLst>
+            <p:seq concurrent="1" nextAc="seek">
+              <p:cTn id="2" dur="indefinite" nodeType="mainSeq">
+                <p:childTnLst>
+                  <p:par>
+                    <p:cTn id="3" fill="hold">
+                      <p:stCondLst>
+                        <p:cond delay="indefinite"/>
+                      </p:stCondLst>
+                      <p:childTnLst>
+                        <p:par>
+                          <p:cTn id="4" fill="hold">
+                            <p:stCondLst>
+                              <p:cond delay="0"/>
+                            </p:stCondLst>
+                            <p:childTnLst>
+                              <p:par>
+                                <p:cTn id="5" presetID="1" presetClass="entr" presetSubtype="0" fill="hold" grpId="0" nodeType="clickEffect">
+                                  <p:stCondLst>
+                                    <p:cond delay="0"/>
+                                  </p:stCondLst>
+                                  <p:childTnLst>
+                                    <p:set>
+                                      <p:cBhvr>
+                                        <p:cTn id="6" dur="1" fill="hold">
+                                          <p:stCondLst>
+                                            <p:cond delay="0"/>
+                                          </p:stCondLst>
+                                        </p:cTn>
+                                        <p:tgtEl>
+                                          <p:spTgt spid="3">
+                                            <p:txEl>
+                                              <p:pRg st="0" end="0"/>
+                                            </p:txEl>
+                                          </p:spTgt>
+                                        </p:tgtEl>
+                                        <p:attrNameLst>
+                                          <p:attrName>style.visibility</p:attrName>
+                                        </p:attrNameLst>
+                                      </p:cBhvr>
+                                      <p:to>
+                                        <p:strVal val="visible"/>
+                                      </p:to>
+                                    </p:set>
+                                  </p:childTnLst>
+                                </p:cTn>
+                              </p:par>
+                            </p:childTnLst>
+                          </p:cTn>
+                        </p:par>
+                      </p:childTnLst>
+                    </p:cTn>
+                  </p:par>
+                  <p:par>
+                    <p:cTn id="7" fill="hold">
+                      <p:stCondLst>
+                        <p:cond delay="indefinite"/>
+                      </p:stCondLst>
+                      <p:childTnLst>
+                        <p:par>
+                          <p:cTn id="8" fill="hold">
+                            <p:stCondLst>
+                              <p:cond delay="0"/>
+                            </p:stCondLst>
+                            <p:childTnLst>
+                              <p:par>
+                                <p:cTn id="9" presetID="1" presetClass="entr" presetSubtype="0" fill="hold" grpId="0" nodeType="clickEffect">
+                                  <p:stCondLst>
+                                    <p:cond delay="0"/>
+                                  </p:stCondLst>
+                                  <p:childTnLst>
+                                    <p:set>
+                                      <p:cBhvr>
+                                        <p:cTn id="10" dur="1" fill="hold">
+                                          <p:stCondLst>
+                                            <p:cond delay="0"/>
+                                          </p:stCondLst>
+                                        </p:cTn>
+                                        <p:tgtEl>
+                                          <p:spTgt spid="3">
+                                            <p:txEl>
+                                              <p:pRg st="2" end="2"/>
+                                            </p:txEl>
+                                          </p:spTgt>
+                                        </p:tgtEl>
+                                        <p:attrNameLst>
+                                          <p:attrName>style.visibility</p:attrName>
+                                        </p:attrNameLst>
+                                      </p:cBhvr>
+                                      <p:to>
+                                        <p:strVal val="visible"/>
+                                      </p:to>
+                                    </p:set>
+                                  </p:childTnLst>
+                                </p:cTn>
+                              </p:par>
+                            </p:childTnLst>
+                          </p:cTn>
+                        </p:par>
+                      </p:childTnLst>
+                    </p:cTn>
+                  </p:par>
+                  <p:par>
+                    <p:cTn id="11" fill="hold">
+                      <p:stCondLst>
+                        <p:cond delay="indefinite"/>
+                      </p:stCondLst>
+                      <p:childTnLst>
+                        <p:par>
+                          <p:cTn id="12" fill="hold">
+                            <p:stCondLst>
+                              <p:cond delay="0"/>
+                            </p:stCondLst>
+                            <p:childTnLst>
+                              <p:par>
+                                <p:cTn id="13" presetID="1" presetClass="entr" presetSubtype="0" fill="hold" grpId="0" nodeType="clickEffect">
+                                  <p:stCondLst>
+                                    <p:cond delay="0"/>
+                                  </p:stCondLst>
+                                  <p:childTnLst>
+                                    <p:set>
+                                      <p:cBhvr>
+                                        <p:cTn id="14" dur="1" fill="hold">
+                                          <p:stCondLst>
+                                            <p:cond delay="0"/>
+                                          </p:stCondLst>
+                                        </p:cTn>
+                                        <p:tgtEl>
+                                          <p:spTgt spid="3">
+                                            <p:txEl>
+                                              <p:pRg st="4" end="4"/>
+                                            </p:txEl>
+                                          </p:spTgt>
+                                        </p:tgtEl>
+                                        <p:attrNameLst>
+                                          <p:attrName>style.visibility</p:attrName>
+                                        </p:attrNameLst>
+                                      </p:cBhvr>
+                                      <p:to>
+                                        <p:strVal val="visible"/>
+                                      </p:to>
+                                    </p:set>
+                                  </p:childTnLst>
+                                </p:cTn>
+                              </p:par>
+                            </p:childTnLst>
+                          </p:cTn>
+                        </p:par>
+                      </p:childTnLst>
+                    </p:cTn>
+                  </p:par>
+                </p:childTnLst>
+              </p:cTn>
+              <p:prevCondLst>
+                <p:cond evt="onPrev" delay="0">
+                  <p:tgtEl>
+                    <p:sldTgt/>
+                  </p:tgtEl>
+                </p:cond>
+              </p:prevCondLst>
+              <p:nextCondLst>
+                <p:cond evt="onNext" delay="0">
+                  <p:tgtEl>
+                    <p:sldTgt/>
+                  </p:tgtEl>
+                </p:cond>
+              </p:nextCondLst>
+            </p:seq>
+          </p:childTnLst>
+        </p:cTn>
+      </p:par>
+    </p:tnLst>
+    <p:bldLst>
+      <p:bldP spid="3" grpId="0" build="p"/>
+    </p:bldLst>
+  </p:timing>
 </p:sld>
 </file>
 
@@ -10651,7 +11341,7 @@
           <a:p>
             <a:r>
               <a:rPr lang="en-GB" dirty="0"/>
-              <a:t>Domain 3: Strategy &amp; Tactical Optimization</a:t>
+              <a:t>Domain 3: Strategy &amp; Tactical Analysis</a:t>
             </a:r>
             <a:endParaRPr lang="en-US" dirty="0"/>
           </a:p>
@@ -10817,7 +11507,7 @@
           <a:p>
             <a:r>
               <a:rPr lang="en-GB" sz="2400" b="1" dirty="0"/>
-              <a:t>Common decision</a:t>
+              <a:t>Common decisions</a:t>
             </a:r>
           </a:p>
           <a:p>
@@ -10872,6 +11562,130 @@
   <p:clrMapOvr>
     <a:masterClrMapping/>
   </p:clrMapOvr>
+  <p:timing>
+    <p:tnLst>
+      <p:par>
+        <p:cTn id="1" dur="indefinite" restart="never" nodeType="tmRoot">
+          <p:childTnLst>
+            <p:seq concurrent="1" nextAc="seek">
+              <p:cTn id="2" dur="indefinite" nodeType="mainSeq">
+                <p:childTnLst>
+                  <p:par>
+                    <p:cTn id="3" fill="hold">
+                      <p:stCondLst>
+                        <p:cond delay="indefinite"/>
+                      </p:stCondLst>
+                      <p:childTnLst>
+                        <p:par>
+                          <p:cTn id="4" fill="hold">
+                            <p:stCondLst>
+                              <p:cond delay="0"/>
+                            </p:stCondLst>
+                            <p:childTnLst>
+                              <p:par>
+                                <p:cTn id="5" presetID="1" presetClass="entr" presetSubtype="0" fill="hold" grpId="0" nodeType="clickEffect">
+                                  <p:stCondLst>
+                                    <p:cond delay="0"/>
+                                  </p:stCondLst>
+                                  <p:childTnLst>
+                                    <p:set>
+                                      <p:cBhvr>
+                                        <p:cTn id="6" dur="1" fill="hold">
+                                          <p:stCondLst>
+                                            <p:cond delay="0"/>
+                                          </p:stCondLst>
+                                        </p:cTn>
+                                        <p:tgtEl>
+                                          <p:spTgt spid="4"/>
+                                        </p:tgtEl>
+                                        <p:attrNameLst>
+                                          <p:attrName>style.visibility</p:attrName>
+                                        </p:attrNameLst>
+                                      </p:cBhvr>
+                                      <p:to>
+                                        <p:strVal val="visible"/>
+                                      </p:to>
+                                    </p:set>
+                                  </p:childTnLst>
+                                </p:cTn>
+                              </p:par>
+                            </p:childTnLst>
+                          </p:cTn>
+                        </p:par>
+                      </p:childTnLst>
+                    </p:cTn>
+                  </p:par>
+                  <p:par>
+                    <p:cTn id="7" fill="hold">
+                      <p:stCondLst>
+                        <p:cond delay="indefinite"/>
+                      </p:stCondLst>
+                      <p:childTnLst>
+                        <p:par>
+                          <p:cTn id="8" fill="hold">
+                            <p:stCondLst>
+                              <p:cond delay="0"/>
+                            </p:stCondLst>
+                            <p:childTnLst>
+                              <p:par>
+                                <p:cTn id="9" presetID="1" presetClass="entr" presetSubtype="0" fill="hold" grpId="0" nodeType="clickEffect">
+                                  <p:stCondLst>
+                                    <p:cond delay="0"/>
+                                  </p:stCondLst>
+                                  <p:childTnLst>
+                                    <p:set>
+                                      <p:cBhvr>
+                                        <p:cTn id="10" dur="1" fill="hold">
+                                          <p:stCondLst>
+                                            <p:cond delay="0"/>
+                                          </p:stCondLst>
+                                        </p:cTn>
+                                        <p:tgtEl>
+                                          <p:spTgt spid="5"/>
+                                        </p:tgtEl>
+                                        <p:attrNameLst>
+                                          <p:attrName>style.visibility</p:attrName>
+                                        </p:attrNameLst>
+                                      </p:cBhvr>
+                                      <p:to>
+                                        <p:strVal val="visible"/>
+                                      </p:to>
+                                    </p:set>
+                                  </p:childTnLst>
+                                </p:cTn>
+                              </p:par>
+                            </p:childTnLst>
+                          </p:cTn>
+                        </p:par>
+                      </p:childTnLst>
+                    </p:cTn>
+                  </p:par>
+                </p:childTnLst>
+              </p:cTn>
+              <p:prevCondLst>
+                <p:cond evt="onPrev" delay="0">
+                  <p:tgtEl>
+                    <p:sldTgt/>
+                  </p:tgtEl>
+                </p:cond>
+              </p:prevCondLst>
+              <p:nextCondLst>
+                <p:cond evt="onNext" delay="0">
+                  <p:tgtEl>
+                    <p:sldTgt/>
+                  </p:tgtEl>
+                </p:cond>
+              </p:nextCondLst>
+            </p:seq>
+          </p:childTnLst>
+        </p:cTn>
+      </p:par>
+    </p:tnLst>
+    <p:bldLst>
+      <p:bldP spid="4" grpId="0" animBg="1"/>
+      <p:bldP spid="5" grpId="0" animBg="1"/>
+    </p:bldLst>
+  </p:timing>
 </p:sld>
 </file>
 
@@ -10911,13 +11725,13 @@
         <p:spPr/>
         <p:txBody>
           <a:bodyPr>
-            <a:normAutofit fontScale="90000"/>
+            <a:normAutofit/>
           </a:bodyPr>
           <a:lstStyle/>
           <a:p>
             <a:r>
               <a:rPr lang="en-GB" dirty="0"/>
-              <a:t>Context Changes the Meaning of a Game Event	</a:t>
+              <a:t>Situational Context and Game Event	</a:t>
             </a:r>
           </a:p>
         </p:txBody>
@@ -10947,43 +11761,56 @@
           <a:p>
             <a:r>
               <a:rPr lang="en-GB" dirty="0"/>
-              <a:t>The same shot, pass, or play can have different value depending on:</a:t>
+              <a:t>The value of a shot, pass, or play depends on:</a:t>
             </a:r>
           </a:p>
           <a:p>
             <a:pPr lvl="1"/>
+            <a:endParaRPr lang="en-GB" dirty="0"/>
+          </a:p>
+          <a:p>
+            <a:pPr lvl="1"/>
+            <a:r>
+              <a:rPr lang="en-GB" b="1" dirty="0"/>
+              <a:t>When </a:t>
+            </a:r>
             <a:r>
               <a:rPr lang="en-GB" dirty="0"/>
-              <a:t>Score and time remaining</a:t>
+              <a:t>it occurred: score, time remaining, and game situation </a:t>
             </a:r>
           </a:p>
           <a:p>
             <a:pPr lvl="1"/>
+            <a:endParaRPr lang="en-GB" dirty="0"/>
+          </a:p>
+          <a:p>
+            <a:pPr lvl="1"/>
+            <a:r>
+              <a:rPr lang="en-GB" b="1" dirty="0"/>
+              <a:t>Where </a:t>
+            </a:r>
             <a:r>
               <a:rPr lang="en-GB" dirty="0"/>
-              <a:t>Opponent and matchup</a:t>
+              <a:t>it occurred: player location and defensive pressure </a:t>
             </a:r>
           </a:p>
           <a:p>
             <a:pPr lvl="1"/>
+            <a:endParaRPr lang="en-GB" dirty="0"/>
+          </a:p>
+          <a:p>
+            <a:pPr lvl="1"/>
+            <a:r>
+              <a:rPr lang="en-GB" b="1" dirty="0"/>
+              <a:t>Who </a:t>
+            </a:r>
             <a:r>
               <a:rPr lang="en-GB" dirty="0"/>
-              <a:t>Player location and defensive pressure</a:t>
-            </a:r>
-          </a:p>
-          <a:p>
-            <a:pPr lvl="1"/>
-            <a:r>
-              <a:rPr lang="en-GB" dirty="0"/>
-              <a:t>Teammates on the court or field</a:t>
-            </a:r>
-          </a:p>
-          <a:p>
-            <a:pPr lvl="1"/>
-            <a:r>
-              <a:rPr lang="en-GB" dirty="0"/>
-              <a:t>The sequence of events leading to it</a:t>
-            </a:r>
+              <a:t>was involved: opponent, matchup, and teammates on the court or field</a:t>
+            </a:r>
+          </a:p>
+          <a:p>
+            <a:endParaRPr lang="en-GB" dirty="0"/>
           </a:p>
         </p:txBody>
       </p:sp>
@@ -11038,10 +11865,334 @@
   <p:clrMapOvr>
     <a:masterClrMapping/>
   </p:clrMapOvr>
+  <p:timing>
+    <p:tnLst>
+      <p:par>
+        <p:cTn id="1" dur="indefinite" restart="never" nodeType="tmRoot">
+          <p:childTnLst>
+            <p:seq concurrent="1" nextAc="seek">
+              <p:cTn id="2" dur="indefinite" nodeType="mainSeq">
+                <p:childTnLst>
+                  <p:par>
+                    <p:cTn id="3" fill="hold">
+                      <p:stCondLst>
+                        <p:cond delay="indefinite"/>
+                      </p:stCondLst>
+                      <p:childTnLst>
+                        <p:par>
+                          <p:cTn id="4" fill="hold">
+                            <p:stCondLst>
+                              <p:cond delay="0"/>
+                            </p:stCondLst>
+                            <p:childTnLst>
+                              <p:par>
+                                <p:cTn id="5" presetID="1" presetClass="entr" presetSubtype="0" fill="hold" grpId="0" nodeType="clickEffect">
+                                  <p:stCondLst>
+                                    <p:cond delay="0"/>
+                                  </p:stCondLst>
+                                  <p:childTnLst>
+                                    <p:set>
+                                      <p:cBhvr>
+                                        <p:cTn id="6" dur="1" fill="hold">
+                                          <p:stCondLst>
+                                            <p:cond delay="0"/>
+                                          </p:stCondLst>
+                                        </p:cTn>
+                                        <p:tgtEl>
+                                          <p:spTgt spid="3">
+                                            <p:txEl>
+                                              <p:pRg st="0" end="0"/>
+                                            </p:txEl>
+                                          </p:spTgt>
+                                        </p:tgtEl>
+                                        <p:attrNameLst>
+                                          <p:attrName>style.visibility</p:attrName>
+                                        </p:attrNameLst>
+                                      </p:cBhvr>
+                                      <p:to>
+                                        <p:strVal val="visible"/>
+                                      </p:to>
+                                    </p:set>
+                                  </p:childTnLst>
+                                </p:cTn>
+                              </p:par>
+                            </p:childTnLst>
+                          </p:cTn>
+                        </p:par>
+                      </p:childTnLst>
+                    </p:cTn>
+                  </p:par>
+                  <p:par>
+                    <p:cTn id="7" fill="hold">
+                      <p:stCondLst>
+                        <p:cond delay="indefinite"/>
+                      </p:stCondLst>
+                      <p:childTnLst>
+                        <p:par>
+                          <p:cTn id="8" fill="hold">
+                            <p:stCondLst>
+                              <p:cond delay="0"/>
+                            </p:stCondLst>
+                            <p:childTnLst>
+                              <p:par>
+                                <p:cTn id="9" presetID="1" presetClass="entr" presetSubtype="0" fill="hold" grpId="0" nodeType="clickEffect">
+                                  <p:stCondLst>
+                                    <p:cond delay="0"/>
+                                  </p:stCondLst>
+                                  <p:childTnLst>
+                                    <p:set>
+                                      <p:cBhvr>
+                                        <p:cTn id="10" dur="1" fill="hold">
+                                          <p:stCondLst>
+                                            <p:cond delay="0"/>
+                                          </p:stCondLst>
+                                        </p:cTn>
+                                        <p:tgtEl>
+                                          <p:spTgt spid="3">
+                                            <p:txEl>
+                                              <p:pRg st="2" end="2"/>
+                                            </p:txEl>
+                                          </p:spTgt>
+                                        </p:tgtEl>
+                                        <p:attrNameLst>
+                                          <p:attrName>style.visibility</p:attrName>
+                                        </p:attrNameLst>
+                                      </p:cBhvr>
+                                      <p:to>
+                                        <p:strVal val="visible"/>
+                                      </p:to>
+                                    </p:set>
+                                  </p:childTnLst>
+                                </p:cTn>
+                              </p:par>
+                              <p:par>
+                                <p:cTn id="11" presetID="1" presetClass="entr" presetSubtype="0" fill="hold" grpId="0" nodeType="withEffect">
+                                  <p:stCondLst>
+                                    <p:cond delay="0"/>
+                                  </p:stCondLst>
+                                  <p:childTnLst>
+                                    <p:set>
+                                      <p:cBhvr>
+                                        <p:cTn id="12" dur="1" fill="hold">
+                                          <p:stCondLst>
+                                            <p:cond delay="0"/>
+                                          </p:stCondLst>
+                                        </p:cTn>
+                                        <p:tgtEl>
+                                          <p:spTgt spid="3">
+                                            <p:txEl>
+                                              <p:pRg st="4" end="4"/>
+                                            </p:txEl>
+                                          </p:spTgt>
+                                        </p:tgtEl>
+                                        <p:attrNameLst>
+                                          <p:attrName>style.visibility</p:attrName>
+                                        </p:attrNameLst>
+                                      </p:cBhvr>
+                                      <p:to>
+                                        <p:strVal val="visible"/>
+                                      </p:to>
+                                    </p:set>
+                                  </p:childTnLst>
+                                </p:cTn>
+                              </p:par>
+                              <p:par>
+                                <p:cTn id="13" presetID="1" presetClass="entr" presetSubtype="0" fill="hold" grpId="0" nodeType="withEffect">
+                                  <p:stCondLst>
+                                    <p:cond delay="0"/>
+                                  </p:stCondLst>
+                                  <p:childTnLst>
+                                    <p:set>
+                                      <p:cBhvr>
+                                        <p:cTn id="14" dur="1" fill="hold">
+                                          <p:stCondLst>
+                                            <p:cond delay="0"/>
+                                          </p:stCondLst>
+                                        </p:cTn>
+                                        <p:tgtEl>
+                                          <p:spTgt spid="3">
+                                            <p:txEl>
+                                              <p:pRg st="6" end="6"/>
+                                            </p:txEl>
+                                          </p:spTgt>
+                                        </p:tgtEl>
+                                        <p:attrNameLst>
+                                          <p:attrName>style.visibility</p:attrName>
+                                        </p:attrNameLst>
+                                      </p:cBhvr>
+                                      <p:to>
+                                        <p:strVal val="visible"/>
+                                      </p:to>
+                                    </p:set>
+                                  </p:childTnLst>
+                                </p:cTn>
+                              </p:par>
+                            </p:childTnLst>
+                          </p:cTn>
+                        </p:par>
+                      </p:childTnLst>
+                    </p:cTn>
+                  </p:par>
+                  <p:par>
+                    <p:cTn id="15" fill="hold">
+                      <p:stCondLst>
+                        <p:cond delay="indefinite"/>
+                      </p:stCondLst>
+                      <p:childTnLst>
+                        <p:par>
+                          <p:cTn id="16" fill="hold">
+                            <p:stCondLst>
+                              <p:cond delay="0"/>
+                            </p:stCondLst>
+                            <p:childTnLst>
+                              <p:par>
+                                <p:cTn id="17" presetID="1" presetClass="entr" presetSubtype="0" fill="hold" grpId="0" nodeType="clickEffect">
+                                  <p:stCondLst>
+                                    <p:cond delay="0"/>
+                                  </p:stCondLst>
+                                  <p:childTnLst>
+                                    <p:set>
+                                      <p:cBhvr>
+                                        <p:cTn id="18" dur="1" fill="hold">
+                                          <p:stCondLst>
+                                            <p:cond delay="0"/>
+                                          </p:stCondLst>
+                                        </p:cTn>
+                                        <p:tgtEl>
+                                          <p:spTgt spid="4"/>
+                                        </p:tgtEl>
+                                        <p:attrNameLst>
+                                          <p:attrName>style.visibility</p:attrName>
+                                        </p:attrNameLst>
+                                      </p:cBhvr>
+                                      <p:to>
+                                        <p:strVal val="visible"/>
+                                      </p:to>
+                                    </p:set>
+                                  </p:childTnLst>
+                                </p:cTn>
+                              </p:par>
+                            </p:childTnLst>
+                          </p:cTn>
+                        </p:par>
+                      </p:childTnLst>
+                    </p:cTn>
+                  </p:par>
+                </p:childTnLst>
+              </p:cTn>
+              <p:prevCondLst>
+                <p:cond evt="onPrev" delay="0">
+                  <p:tgtEl>
+                    <p:sldTgt/>
+                  </p:tgtEl>
+                </p:cond>
+              </p:prevCondLst>
+              <p:nextCondLst>
+                <p:cond evt="onNext" delay="0">
+                  <p:tgtEl>
+                    <p:sldTgt/>
+                  </p:tgtEl>
+                </p:cond>
+              </p:nextCondLst>
+            </p:seq>
+          </p:childTnLst>
+        </p:cTn>
+      </p:par>
+    </p:tnLst>
+    <p:bldLst>
+      <p:bldP spid="3" grpId="0" uiExpand="1" build="p"/>
+      <p:bldP spid="4" grpId="0"/>
+    </p:bldLst>
+  </p:timing>
 </p:sld>
 </file>
 
 <file path=ppt/slides/slide13.xml><?xml version="1.0" encoding="utf-8"?>
+<p:sld xmlns:a="http://schemas.openxmlformats.org/drawingml/2006/main" xmlns:r="http://schemas.openxmlformats.org/officeDocument/2006/relationships" xmlns:p="http://schemas.openxmlformats.org/presentationml/2006/main">
+  <p:cSld>
+    <p:spTree>
+      <p:nvGrpSpPr>
+        <p:cNvPr id="1" name=""/>
+        <p:cNvGrpSpPr/>
+        <p:nvPr/>
+      </p:nvGrpSpPr>
+      <p:grpSpPr>
+        <a:xfrm>
+          <a:off x="0" y="0"/>
+          <a:ext cx="0" cy="0"/>
+          <a:chOff x="0" y="0"/>
+          <a:chExt cx="0" cy="0"/>
+        </a:xfrm>
+      </p:grpSpPr>
+      <p:sp>
+        <p:nvSpPr>
+          <p:cNvPr id="2" name="Title 1">
+            <a:extLst>
+              <a:ext uri="{FF2B5EF4-FFF2-40B4-BE49-F238E27FC236}">
+                <a16:creationId xmlns:a16="http://schemas.microsoft.com/office/drawing/2014/main" id="{14009AD9-21AB-F292-D8DE-189FC1682897}"/>
+              </a:ext>
+            </a:extLst>
+          </p:cNvPr>
+          <p:cNvSpPr>
+            <a:spLocks noGrp="1"/>
+          </p:cNvSpPr>
+          <p:nvPr>
+            <p:ph type="title"/>
+          </p:nvPr>
+        </p:nvSpPr>
+        <p:spPr/>
+        <p:txBody>
+          <a:bodyPr>
+            <a:normAutofit/>
+          </a:bodyPr>
+          <a:lstStyle/>
+          <a:p>
+            <a:r>
+              <a:rPr lang="en-US" sz="4800" dirty="0"/>
+              <a:t>Developing an Analytical Question</a:t>
+            </a:r>
+          </a:p>
+        </p:txBody>
+      </p:sp>
+      <p:sp>
+        <p:nvSpPr>
+          <p:cNvPr id="3" name="Text Placeholder 2">
+            <a:extLst>
+              <a:ext uri="{FF2B5EF4-FFF2-40B4-BE49-F238E27FC236}">
+                <a16:creationId xmlns:a16="http://schemas.microsoft.com/office/drawing/2014/main" id="{4FFB6CB8-04B0-5CB0-1F16-6718FEDB96DD}"/>
+              </a:ext>
+            </a:extLst>
+          </p:cNvPr>
+          <p:cNvSpPr>
+            <a:spLocks noGrp="1"/>
+          </p:cNvSpPr>
+          <p:nvPr>
+            <p:ph type="body" idx="1"/>
+          </p:nvPr>
+        </p:nvSpPr>
+        <p:spPr/>
+        <p:txBody>
+          <a:bodyPr/>
+          <a:lstStyle/>
+          <a:p>
+            <a:endParaRPr lang="en-US"/>
+          </a:p>
+        </p:txBody>
+      </p:sp>
+    </p:spTree>
+    <p:extLst>
+      <p:ext uri="{BB962C8B-B14F-4D97-AF65-F5344CB8AC3E}">
+        <p14:creationId xmlns:p14="http://schemas.microsoft.com/office/powerpoint/2010/main" val="2930076464"/>
+      </p:ext>
+    </p:extLst>
+  </p:cSld>
+  <p:clrMapOvr>
+    <a:masterClrMapping/>
+  </p:clrMapOvr>
+</p:sld>
+</file>
+
+<file path=ppt/slides/slide14.xml><?xml version="1.0" encoding="utf-8"?>
 <p:sld xmlns:a="http://schemas.openxmlformats.org/drawingml/2006/main" xmlns:r="http://schemas.openxmlformats.org/officeDocument/2006/relationships" xmlns:p="http://schemas.openxmlformats.org/presentationml/2006/main">
   <p:cSld>
     <p:spTree>
@@ -11076,13 +12227,16 @@
         </p:nvSpPr>
         <p:spPr/>
         <p:txBody>
-          <a:bodyPr/>
+          <a:bodyPr>
+            <a:normAutofit fontScale="90000"/>
+          </a:bodyPr>
           <a:lstStyle/>
           <a:p>
             <a:r>
-              <a:rPr lang="en-US" dirty="0"/>
-              <a:t>Developing an Analytical Question</a:t>
-            </a:r>
+              <a:rPr lang="en-GB" dirty="0"/>
+              <a:t>Analytical Questions Serve Different Purposes</a:t>
+            </a:r>
+            <a:endParaRPr lang="en-US" dirty="0"/>
           </a:p>
         </p:txBody>
       </p:sp>
@@ -11114,33 +12268,66 @@
           </a:p>
           <a:p>
             <a:pPr lvl="1"/>
+            <a:endParaRPr lang="en-GB" b="1" dirty="0"/>
+          </a:p>
+          <a:p>
+            <a:pPr lvl="1"/>
+            <a:r>
+              <a:rPr lang="en-GB" b="1" dirty="0"/>
+              <a:t>Describe</a:t>
+            </a:r>
             <a:r>
               <a:rPr lang="en-GB" dirty="0"/>
-              <a:t>Summarize what occurred</a:t>
+              <a:t> what occurred </a:t>
             </a:r>
           </a:p>
           <a:p>
             <a:pPr lvl="1"/>
+            <a:endParaRPr lang="en-GB" dirty="0"/>
+          </a:p>
+          <a:p>
+            <a:pPr lvl="1"/>
+            <a:r>
+              <a:rPr lang="en-GB" b="1" dirty="0"/>
+              <a:t>Diagnose</a:t>
+            </a:r>
             <a:r>
               <a:rPr lang="en-GB" dirty="0"/>
-              <a:t>Investigate why it occurred</a:t>
+              <a:t> why it may have occurred </a:t>
             </a:r>
           </a:p>
           <a:p>
             <a:pPr lvl="1"/>
+            <a:endParaRPr lang="en-GB" dirty="0"/>
+          </a:p>
+          <a:p>
+            <a:pPr lvl="1"/>
+            <a:r>
+              <a:rPr lang="en-GB" b="1" dirty="0"/>
+              <a:t>Predict</a:t>
+            </a:r>
             <a:r>
               <a:rPr lang="en-GB" dirty="0"/>
-              <a:t>Estimate what may occur next</a:t>
+              <a:t> what may occur next </a:t>
             </a:r>
           </a:p>
           <a:p>
             <a:pPr lvl="1"/>
+            <a:endParaRPr lang="en-GB" dirty="0"/>
+          </a:p>
+          <a:p>
+            <a:pPr lvl="1"/>
+            <a:r>
+              <a:rPr lang="en-GB" b="1" dirty="0"/>
+              <a:t>Prescribe</a:t>
+            </a:r>
             <a:r>
               <a:rPr lang="en-GB" dirty="0"/>
-              <a:t>Decide what action to take</a:t>
-            </a:r>
-          </a:p>
-          <a:p>
+              <a:t> what action should be taken</a:t>
+            </a:r>
+          </a:p>
+          <a:p>
+            <a:pPr lvl="1"/>
             <a:endParaRPr lang="en-US" dirty="0"/>
           </a:p>
         </p:txBody>
@@ -11155,10 +12342,239 @@
   <p:clrMapOvr>
     <a:masterClrMapping/>
   </p:clrMapOvr>
+  <p:timing>
+    <p:tnLst>
+      <p:par>
+        <p:cTn id="1" dur="indefinite" restart="never" nodeType="tmRoot">
+          <p:childTnLst>
+            <p:seq concurrent="1" nextAc="seek">
+              <p:cTn id="2" dur="indefinite" nodeType="mainSeq">
+                <p:childTnLst>
+                  <p:par>
+                    <p:cTn id="3" fill="hold">
+                      <p:stCondLst>
+                        <p:cond delay="indefinite"/>
+                      </p:stCondLst>
+                      <p:childTnLst>
+                        <p:par>
+                          <p:cTn id="4" fill="hold">
+                            <p:stCondLst>
+                              <p:cond delay="0"/>
+                            </p:stCondLst>
+                            <p:childTnLst>
+                              <p:par>
+                                <p:cTn id="5" presetID="1" presetClass="entr" presetSubtype="0" fill="hold" grpId="0" nodeType="clickEffect">
+                                  <p:stCondLst>
+                                    <p:cond delay="0"/>
+                                  </p:stCondLst>
+                                  <p:childTnLst>
+                                    <p:set>
+                                      <p:cBhvr>
+                                        <p:cTn id="6" dur="1" fill="hold">
+                                          <p:stCondLst>
+                                            <p:cond delay="0"/>
+                                          </p:stCondLst>
+                                        </p:cTn>
+                                        <p:tgtEl>
+                                          <p:spTgt spid="3">
+                                            <p:txEl>
+                                              <p:pRg st="2" end="2"/>
+                                            </p:txEl>
+                                          </p:spTgt>
+                                        </p:tgtEl>
+                                        <p:attrNameLst>
+                                          <p:attrName>style.visibility</p:attrName>
+                                        </p:attrNameLst>
+                                      </p:cBhvr>
+                                      <p:to>
+                                        <p:strVal val="visible"/>
+                                      </p:to>
+                                    </p:set>
+                                  </p:childTnLst>
+                                </p:cTn>
+                              </p:par>
+                            </p:childTnLst>
+                          </p:cTn>
+                        </p:par>
+                      </p:childTnLst>
+                    </p:cTn>
+                  </p:par>
+                  <p:par>
+                    <p:cTn id="7" fill="hold">
+                      <p:stCondLst>
+                        <p:cond delay="indefinite"/>
+                      </p:stCondLst>
+                      <p:childTnLst>
+                        <p:par>
+                          <p:cTn id="8" fill="hold">
+                            <p:stCondLst>
+                              <p:cond delay="0"/>
+                            </p:stCondLst>
+                            <p:childTnLst>
+                              <p:par>
+                                <p:cTn id="9" presetID="1" presetClass="entr" presetSubtype="0" fill="hold" grpId="0" nodeType="clickEffect">
+                                  <p:stCondLst>
+                                    <p:cond delay="0"/>
+                                  </p:stCondLst>
+                                  <p:childTnLst>
+                                    <p:set>
+                                      <p:cBhvr>
+                                        <p:cTn id="10" dur="1" fill="hold">
+                                          <p:stCondLst>
+                                            <p:cond delay="0"/>
+                                          </p:stCondLst>
+                                        </p:cTn>
+                                        <p:tgtEl>
+                                          <p:spTgt spid="3">
+                                            <p:txEl>
+                                              <p:pRg st="4" end="4"/>
+                                            </p:txEl>
+                                          </p:spTgt>
+                                        </p:tgtEl>
+                                        <p:attrNameLst>
+                                          <p:attrName>style.visibility</p:attrName>
+                                        </p:attrNameLst>
+                                      </p:cBhvr>
+                                      <p:to>
+                                        <p:strVal val="visible"/>
+                                      </p:to>
+                                    </p:set>
+                                  </p:childTnLst>
+                                </p:cTn>
+                              </p:par>
+                            </p:childTnLst>
+                          </p:cTn>
+                        </p:par>
+                      </p:childTnLst>
+                    </p:cTn>
+                  </p:par>
+                  <p:par>
+                    <p:cTn id="11" fill="hold">
+                      <p:stCondLst>
+                        <p:cond delay="indefinite"/>
+                      </p:stCondLst>
+                      <p:childTnLst>
+                        <p:par>
+                          <p:cTn id="12" fill="hold">
+                            <p:stCondLst>
+                              <p:cond delay="0"/>
+                            </p:stCondLst>
+                            <p:childTnLst>
+                              <p:par>
+                                <p:cTn id="13" presetID="1" presetClass="entr" presetSubtype="0" fill="hold" grpId="0" nodeType="clickEffect">
+                                  <p:stCondLst>
+                                    <p:cond delay="0"/>
+                                  </p:stCondLst>
+                                  <p:childTnLst>
+                                    <p:set>
+                                      <p:cBhvr>
+                                        <p:cTn id="14" dur="1" fill="hold">
+                                          <p:stCondLst>
+                                            <p:cond delay="0"/>
+                                          </p:stCondLst>
+                                        </p:cTn>
+                                        <p:tgtEl>
+                                          <p:spTgt spid="3">
+                                            <p:txEl>
+                                              <p:pRg st="6" end="6"/>
+                                            </p:txEl>
+                                          </p:spTgt>
+                                        </p:tgtEl>
+                                        <p:attrNameLst>
+                                          <p:attrName>style.visibility</p:attrName>
+                                        </p:attrNameLst>
+                                      </p:cBhvr>
+                                      <p:to>
+                                        <p:strVal val="visible"/>
+                                      </p:to>
+                                    </p:set>
+                                  </p:childTnLst>
+                                </p:cTn>
+                              </p:par>
+                            </p:childTnLst>
+                          </p:cTn>
+                        </p:par>
+                      </p:childTnLst>
+                    </p:cTn>
+                  </p:par>
+                  <p:par>
+                    <p:cTn id="15" fill="hold">
+                      <p:stCondLst>
+                        <p:cond delay="indefinite"/>
+                      </p:stCondLst>
+                      <p:childTnLst>
+                        <p:par>
+                          <p:cTn id="16" fill="hold">
+                            <p:stCondLst>
+                              <p:cond delay="0"/>
+                            </p:stCondLst>
+                            <p:childTnLst>
+                              <p:par>
+                                <p:cTn id="17" presetID="1" presetClass="entr" presetSubtype="0" fill="hold" grpId="0" nodeType="clickEffect">
+                                  <p:stCondLst>
+                                    <p:cond delay="0"/>
+                                  </p:stCondLst>
+                                  <p:childTnLst>
+                                    <p:set>
+                                      <p:cBhvr>
+                                        <p:cTn id="18" dur="1" fill="hold">
+                                          <p:stCondLst>
+                                            <p:cond delay="0"/>
+                                          </p:stCondLst>
+                                        </p:cTn>
+                                        <p:tgtEl>
+                                          <p:spTgt spid="3">
+                                            <p:txEl>
+                                              <p:pRg st="8" end="8"/>
+                                            </p:txEl>
+                                          </p:spTgt>
+                                        </p:tgtEl>
+                                        <p:attrNameLst>
+                                          <p:attrName>style.visibility</p:attrName>
+                                        </p:attrNameLst>
+                                      </p:cBhvr>
+                                      <p:to>
+                                        <p:strVal val="visible"/>
+                                      </p:to>
+                                    </p:set>
+                                  </p:childTnLst>
+                                </p:cTn>
+                              </p:par>
+                            </p:childTnLst>
+                          </p:cTn>
+                        </p:par>
+                      </p:childTnLst>
+                    </p:cTn>
+                  </p:par>
+                </p:childTnLst>
+              </p:cTn>
+              <p:prevCondLst>
+                <p:cond evt="onPrev" delay="0">
+                  <p:tgtEl>
+                    <p:sldTgt/>
+                  </p:tgtEl>
+                </p:cond>
+              </p:prevCondLst>
+              <p:nextCondLst>
+                <p:cond evt="onNext" delay="0">
+                  <p:tgtEl>
+                    <p:sldTgt/>
+                  </p:tgtEl>
+                </p:cond>
+              </p:nextCondLst>
+            </p:seq>
+          </p:childTnLst>
+        </p:cTn>
+      </p:par>
+    </p:tnLst>
+    <p:bldLst>
+      <p:bldP spid="3" grpId="0" uiExpand="1" build="p"/>
+    </p:bldLst>
+  </p:timing>
 </p:sld>
 </file>
 
-<file path=ppt/slides/slide14.xml><?xml version="1.0" encoding="utf-8"?>
+<file path=ppt/slides/slide15.xml><?xml version="1.0" encoding="utf-8"?>
 <p:sld xmlns:a="http://schemas.openxmlformats.org/drawingml/2006/main" xmlns:r="http://schemas.openxmlformats.org/officeDocument/2006/relationships" xmlns:p="http://schemas.openxmlformats.org/presentationml/2006/main">
   <p:cSld>
     <p:spTree>
@@ -11194,7 +12610,7 @@
         <p:spPr>
           <a:xfrm>
             <a:off x="838200" y="365126"/>
-            <a:ext cx="10515600" cy="1366692"/>
+            <a:ext cx="10515600" cy="1269710"/>
           </a:xfrm>
         </p:spPr>
         <p:txBody>
@@ -11268,13 +12684,13 @@
           </a:bodyPr>
           <a:lstStyle/>
           <a:p>
-            <a:pPr marL="0" indent="0" algn="l">
+            <a:pPr marL="0" indent="0" algn="ctr">
               <a:buNone/>
             </a:pPr>
             <a:r>
               <a:rPr lang="en-GB" sz="1800" b="0" i="0" dirty="0">
                 <a:solidFill>
-                  <a:schemeClr val="tx1"/>
+                  <a:srgbClr val="FF0000"/>
                 </a:solidFill>
                 <a:effectLst/>
                 <a:latin typeface="+mn-lt"/>
@@ -11284,7 +12700,7 @@
             <a:r>
               <a:rPr lang="en-GB" sz="1800" b="1" i="0" dirty="0">
                 <a:solidFill>
-                  <a:schemeClr val="tx1"/>
+                  <a:srgbClr val="FF0000"/>
                 </a:solidFill>
                 <a:effectLst/>
                 <a:latin typeface="+mn-lt"/>
@@ -11294,7 +12710,7 @@
             <a:r>
               <a:rPr lang="en-GB" sz="1800" b="0" i="0" dirty="0">
                 <a:solidFill>
-                  <a:schemeClr val="tx1"/>
+                  <a:srgbClr val="FF0000"/>
                 </a:solidFill>
                 <a:effectLst/>
                 <a:latin typeface="+mn-lt"/>
@@ -11303,7 +12719,7 @@
             </a:r>
             <a:endParaRPr lang="en-GB" sz="2250" b="0" i="0" dirty="0">
               <a:solidFill>
-                <a:srgbClr val="1A292C"/>
+                <a:srgbClr val="FF0000"/>
               </a:solidFill>
               <a:effectLst/>
               <a:latin typeface="Fira Sans" panose="020B0503050000020004" pitchFamily="34" charset="0"/>
@@ -11324,7 +12740,7 @@
 </p:sld>
 </file>
 
-<file path=ppt/slides/slide15.xml><?xml version="1.0" encoding="utf-8"?>
+<file path=ppt/slides/slide16.xml><?xml version="1.0" encoding="utf-8"?>
 <p:sld xmlns:a="http://schemas.openxmlformats.org/drawingml/2006/main" xmlns:r="http://schemas.openxmlformats.org/officeDocument/2006/relationships" xmlns:p="http://schemas.openxmlformats.org/presentationml/2006/main">
   <p:cSld>
     <p:spTree>
@@ -11388,7 +12804,9 @@
         </p:nvSpPr>
         <p:spPr/>
         <p:txBody>
-          <a:bodyPr/>
+          <a:bodyPr>
+            <a:normAutofit/>
+          </a:bodyPr>
           <a:lstStyle/>
           <a:p>
             <a:r>
@@ -11415,30 +12833,39 @@
           <a:p>
             <a:pPr lvl="1"/>
             <a:r>
+              <a:rPr lang="en-GB" b="1" dirty="0"/>
+              <a:t>Tracking:</a:t>
+            </a:r>
+            <a:r>
               <a:rPr lang="en-GB" dirty="0"/>
-              <a:t>How much high-intensity work did an athlete complete?</a:t>
+              <a:t> How much high-intensity work did the athlete complete? </a:t>
             </a:r>
           </a:p>
           <a:p>
             <a:pPr lvl="1"/>
             <a:r>
+              <a:rPr lang="en-GB" b="1" dirty="0"/>
+              <a:t>Scouting:</a:t>
+            </a:r>
+            <a:r>
               <a:rPr lang="en-GB" dirty="0"/>
-              <a:t>Which players created the most scoring opportunities?</a:t>
+              <a:t> What are the prospect’s current performance statistics? </a:t>
             </a:r>
           </a:p>
           <a:p>
             <a:pPr lvl="1"/>
             <a:r>
+              <a:rPr lang="en-GB" b="1" dirty="0"/>
+              <a:t>Strategy:</a:t>
+            </a:r>
+            <a:r>
               <a:rPr lang="en-GB" dirty="0"/>
-              <a:t>How did the team perform during the previous five games?</a:t>
+              <a:t> Which players created the most scoring opportunities?</a:t>
             </a:r>
           </a:p>
           <a:p>
             <a:pPr lvl="1"/>
-            <a:r>
-              <a:rPr lang="en-GB" dirty="0"/>
-              <a:t>What are a prospect’s current performance statistics?</a:t>
-            </a:r>
+            <a:endParaRPr lang="en-GB" dirty="0"/>
           </a:p>
         </p:txBody>
       </p:sp>
@@ -11452,10 +12879,283 @@
   <p:clrMapOvr>
     <a:masterClrMapping/>
   </p:clrMapOvr>
+  <p:timing>
+    <p:tnLst>
+      <p:par>
+        <p:cTn id="1" dur="indefinite" restart="never" nodeType="tmRoot">
+          <p:childTnLst>
+            <p:seq concurrent="1" nextAc="seek">
+              <p:cTn id="2" dur="indefinite" nodeType="mainSeq">
+                <p:childTnLst>
+                  <p:par>
+                    <p:cTn id="3" fill="hold">
+                      <p:stCondLst>
+                        <p:cond delay="indefinite"/>
+                      </p:stCondLst>
+                      <p:childTnLst>
+                        <p:par>
+                          <p:cTn id="4" fill="hold">
+                            <p:stCondLst>
+                              <p:cond delay="0"/>
+                            </p:stCondLst>
+                            <p:childTnLst>
+                              <p:par>
+                                <p:cTn id="5" presetID="1" presetClass="entr" presetSubtype="0" fill="hold" grpId="0" nodeType="clickEffect">
+                                  <p:stCondLst>
+                                    <p:cond delay="0"/>
+                                  </p:stCondLst>
+                                  <p:childTnLst>
+                                    <p:set>
+                                      <p:cBhvr>
+                                        <p:cTn id="6" dur="1" fill="hold">
+                                          <p:stCondLst>
+                                            <p:cond delay="0"/>
+                                          </p:stCondLst>
+                                        </p:cTn>
+                                        <p:tgtEl>
+                                          <p:spTgt spid="3">
+                                            <p:txEl>
+                                              <p:pRg st="0" end="0"/>
+                                            </p:txEl>
+                                          </p:spTgt>
+                                        </p:tgtEl>
+                                        <p:attrNameLst>
+                                          <p:attrName>style.visibility</p:attrName>
+                                        </p:attrNameLst>
+                                      </p:cBhvr>
+                                      <p:to>
+                                        <p:strVal val="visible"/>
+                                      </p:to>
+                                    </p:set>
+                                  </p:childTnLst>
+                                </p:cTn>
+                              </p:par>
+                            </p:childTnLst>
+                          </p:cTn>
+                        </p:par>
+                      </p:childTnLst>
+                    </p:cTn>
+                  </p:par>
+                  <p:par>
+                    <p:cTn id="7" fill="hold">
+                      <p:stCondLst>
+                        <p:cond delay="indefinite"/>
+                      </p:stCondLst>
+                      <p:childTnLst>
+                        <p:par>
+                          <p:cTn id="8" fill="hold">
+                            <p:stCondLst>
+                              <p:cond delay="0"/>
+                            </p:stCondLst>
+                            <p:childTnLst>
+                              <p:par>
+                                <p:cTn id="9" presetID="1" presetClass="entr" presetSubtype="0" fill="hold" grpId="0" nodeType="clickEffect">
+                                  <p:stCondLst>
+                                    <p:cond delay="0"/>
+                                  </p:stCondLst>
+                                  <p:childTnLst>
+                                    <p:set>
+                                      <p:cBhvr>
+                                        <p:cTn id="10" dur="1" fill="hold">
+                                          <p:stCondLst>
+                                            <p:cond delay="0"/>
+                                          </p:stCondLst>
+                                        </p:cTn>
+                                        <p:tgtEl>
+                                          <p:spTgt spid="3">
+                                            <p:txEl>
+                                              <p:pRg st="1" end="1"/>
+                                            </p:txEl>
+                                          </p:spTgt>
+                                        </p:tgtEl>
+                                        <p:attrNameLst>
+                                          <p:attrName>style.visibility</p:attrName>
+                                        </p:attrNameLst>
+                                      </p:cBhvr>
+                                      <p:to>
+                                        <p:strVal val="visible"/>
+                                      </p:to>
+                                    </p:set>
+                                  </p:childTnLst>
+                                </p:cTn>
+                              </p:par>
+                            </p:childTnLst>
+                          </p:cTn>
+                        </p:par>
+                      </p:childTnLst>
+                    </p:cTn>
+                  </p:par>
+                  <p:par>
+                    <p:cTn id="11" fill="hold">
+                      <p:stCondLst>
+                        <p:cond delay="indefinite"/>
+                      </p:stCondLst>
+                      <p:childTnLst>
+                        <p:par>
+                          <p:cTn id="12" fill="hold">
+                            <p:stCondLst>
+                              <p:cond delay="0"/>
+                            </p:stCondLst>
+                            <p:childTnLst>
+                              <p:par>
+                                <p:cTn id="13" presetID="1" presetClass="entr" presetSubtype="0" fill="hold" grpId="0" nodeType="clickEffect">
+                                  <p:stCondLst>
+                                    <p:cond delay="0"/>
+                                  </p:stCondLst>
+                                  <p:childTnLst>
+                                    <p:set>
+                                      <p:cBhvr>
+                                        <p:cTn id="14" dur="1" fill="hold">
+                                          <p:stCondLst>
+                                            <p:cond delay="0"/>
+                                          </p:stCondLst>
+                                        </p:cTn>
+                                        <p:tgtEl>
+                                          <p:spTgt spid="3">
+                                            <p:txEl>
+                                              <p:pRg st="3" end="3"/>
+                                            </p:txEl>
+                                          </p:spTgt>
+                                        </p:tgtEl>
+                                        <p:attrNameLst>
+                                          <p:attrName>style.visibility</p:attrName>
+                                        </p:attrNameLst>
+                                      </p:cBhvr>
+                                      <p:to>
+                                        <p:strVal val="visible"/>
+                                      </p:to>
+                                    </p:set>
+                                  </p:childTnLst>
+                                </p:cTn>
+                              </p:par>
+                              <p:par>
+                                <p:cTn id="15" presetID="1" presetClass="entr" presetSubtype="0" fill="hold" grpId="0" nodeType="withEffect">
+                                  <p:stCondLst>
+                                    <p:cond delay="0"/>
+                                  </p:stCondLst>
+                                  <p:childTnLst>
+                                    <p:set>
+                                      <p:cBhvr>
+                                        <p:cTn id="16" dur="1" fill="hold">
+                                          <p:stCondLst>
+                                            <p:cond delay="0"/>
+                                          </p:stCondLst>
+                                        </p:cTn>
+                                        <p:tgtEl>
+                                          <p:spTgt spid="3">
+                                            <p:txEl>
+                                              <p:pRg st="4" end="4"/>
+                                            </p:txEl>
+                                          </p:spTgt>
+                                        </p:tgtEl>
+                                        <p:attrNameLst>
+                                          <p:attrName>style.visibility</p:attrName>
+                                        </p:attrNameLst>
+                                      </p:cBhvr>
+                                      <p:to>
+                                        <p:strVal val="visible"/>
+                                      </p:to>
+                                    </p:set>
+                                  </p:childTnLst>
+                                </p:cTn>
+                              </p:par>
+                              <p:par>
+                                <p:cTn id="17" presetID="1" presetClass="entr" presetSubtype="0" fill="hold" grpId="0" nodeType="withEffect">
+                                  <p:stCondLst>
+                                    <p:cond delay="0"/>
+                                  </p:stCondLst>
+                                  <p:childTnLst>
+                                    <p:set>
+                                      <p:cBhvr>
+                                        <p:cTn id="18" dur="1" fill="hold">
+                                          <p:stCondLst>
+                                            <p:cond delay="0"/>
+                                          </p:stCondLst>
+                                        </p:cTn>
+                                        <p:tgtEl>
+                                          <p:spTgt spid="3">
+                                            <p:txEl>
+                                              <p:pRg st="5" end="5"/>
+                                            </p:txEl>
+                                          </p:spTgt>
+                                        </p:tgtEl>
+                                        <p:attrNameLst>
+                                          <p:attrName>style.visibility</p:attrName>
+                                        </p:attrNameLst>
+                                      </p:cBhvr>
+                                      <p:to>
+                                        <p:strVal val="visible"/>
+                                      </p:to>
+                                    </p:set>
+                                  </p:childTnLst>
+                                </p:cTn>
+                              </p:par>
+                              <p:par>
+                                <p:cTn id="19" presetID="1" presetClass="entr" presetSubtype="0" fill="hold" grpId="0" nodeType="withEffect">
+                                  <p:stCondLst>
+                                    <p:cond delay="0"/>
+                                  </p:stCondLst>
+                                  <p:childTnLst>
+                                    <p:set>
+                                      <p:cBhvr>
+                                        <p:cTn id="20" dur="1" fill="hold">
+                                          <p:stCondLst>
+                                            <p:cond delay="0"/>
+                                          </p:stCondLst>
+                                        </p:cTn>
+                                        <p:tgtEl>
+                                          <p:spTgt spid="3">
+                                            <p:txEl>
+                                              <p:pRg st="6" end="6"/>
+                                            </p:txEl>
+                                          </p:spTgt>
+                                        </p:tgtEl>
+                                        <p:attrNameLst>
+                                          <p:attrName>style.visibility</p:attrName>
+                                        </p:attrNameLst>
+                                      </p:cBhvr>
+                                      <p:to>
+                                        <p:strVal val="visible"/>
+                                      </p:to>
+                                    </p:set>
+                                  </p:childTnLst>
+                                </p:cTn>
+                              </p:par>
+                            </p:childTnLst>
+                          </p:cTn>
+                        </p:par>
+                      </p:childTnLst>
+                    </p:cTn>
+                  </p:par>
+                </p:childTnLst>
+              </p:cTn>
+              <p:prevCondLst>
+                <p:cond evt="onPrev" delay="0">
+                  <p:tgtEl>
+                    <p:sldTgt/>
+                  </p:tgtEl>
+                </p:cond>
+              </p:prevCondLst>
+              <p:nextCondLst>
+                <p:cond evt="onNext" delay="0">
+                  <p:tgtEl>
+                    <p:sldTgt/>
+                  </p:tgtEl>
+                </p:cond>
+              </p:nextCondLst>
+            </p:seq>
+          </p:childTnLst>
+        </p:cTn>
+      </p:par>
+    </p:tnLst>
+    <p:bldLst>
+      <p:bldP spid="3" grpId="0" build="p"/>
+    </p:bldLst>
+  </p:timing>
 </p:sld>
 </file>
 
-<file path=ppt/slides/slide16.xml><?xml version="1.0" encoding="utf-8"?>
+<file path=ppt/slides/slide17.xml><?xml version="1.0" encoding="utf-8"?>
 <p:sld xmlns:a="http://schemas.openxmlformats.org/drawingml/2006/main" xmlns:r="http://schemas.openxmlformats.org/officeDocument/2006/relationships" xmlns:p="http://schemas.openxmlformats.org/presentationml/2006/main">
   <p:cSld>
     <p:spTree>
@@ -11532,7 +13232,15 @@
           <a:p>
             <a:r>
               <a:rPr lang="en-GB" dirty="0"/>
-              <a:t>Diagnostic analytics uses data and context to investigate the possible reasons behind an outcome.</a:t>
+              <a:t>Diagnostic analytics uses data to investigate the </a:t>
+            </a:r>
+            <a:r>
+              <a:rPr lang="en-GB" b="1" dirty="0"/>
+              <a:t>possible</a:t>
+            </a:r>
+            <a:r>
+              <a:rPr lang="en-GB" dirty="0"/>
+              <a:t> reasons behind an outcome.</a:t>
             </a:r>
           </a:p>
           <a:p>
@@ -11541,7 +13249,7 @@
               <a:t>May identify </a:t>
             </a:r>
             <a:r>
-              <a:rPr lang="en-GB" i="1" u="sng" dirty="0"/>
+              <a:rPr lang="en-GB" b="1" dirty="0"/>
               <a:t>possible</a:t>
             </a:r>
             <a:r>
@@ -11550,16 +13258,19 @@
             </a:r>
             <a:r>
               <a:rPr lang="en-GB" dirty="0"/>
-              <a:t>explanations, but an observed relationship does </a:t>
+              <a:t>explanations, but an observed relationship </a:t>
             </a:r>
             <a:r>
               <a:rPr lang="en-GB" b="1" dirty="0"/>
-              <a:t>not</a:t>
+              <a:t>does not prove </a:t>
             </a:r>
             <a:r>
               <a:rPr lang="en-GB" dirty="0"/>
-              <a:t> prove causation.</a:t>
-            </a:r>
+              <a:t>causation.</a:t>
+            </a:r>
+          </a:p>
+          <a:p>
+            <a:endParaRPr lang="en-GB" dirty="0"/>
           </a:p>
           <a:p>
             <a:r>
@@ -11571,29 +13282,26 @@
             <a:pPr lvl="1"/>
             <a:r>
               <a:rPr lang="en-GB" dirty="0"/>
-              <a:t>Did an athlete’s workload increase because practice was longer or more intense?</a:t>
+              <a:t>Did workload increase because practice was longer or more intense? </a:t>
             </a:r>
           </a:p>
           <a:p>
             <a:pPr lvl="1"/>
             <a:r>
               <a:rPr lang="en-GB" dirty="0"/>
-              <a:t>Did the team allow more shots because of turnovers or poor defensive positioning?</a:t>
+              <a:t>Did the player perform differently against stronger opponents? </a:t>
             </a:r>
           </a:p>
           <a:p>
             <a:pPr lvl="1"/>
             <a:r>
               <a:rPr lang="en-GB" dirty="0"/>
-              <a:t>Did a player perform differently against stronger opponents?</a:t>
+              <a:t>Did turnovers contribute to the team allowing more shots?</a:t>
             </a:r>
           </a:p>
           <a:p>
             <a:pPr lvl="1"/>
-            <a:r>
-              <a:rPr lang="en-GB" dirty="0"/>
-              <a:t>Did performance decline after travel or limited recovery?</a:t>
-            </a:r>
+            <a:endParaRPr lang="en-GB" dirty="0"/>
           </a:p>
         </p:txBody>
       </p:sp>
@@ -11607,10 +13315,545 @@
   <p:clrMapOvr>
     <a:masterClrMapping/>
   </p:clrMapOvr>
+  <p:timing>
+    <p:tnLst>
+      <p:par>
+        <p:cTn id="1" dur="indefinite" restart="never" nodeType="tmRoot">
+          <p:childTnLst>
+            <p:seq concurrent="1" nextAc="seek">
+              <p:cTn id="2" dur="indefinite" nodeType="mainSeq">
+                <p:childTnLst>
+                  <p:par>
+                    <p:cTn id="3" fill="hold">
+                      <p:stCondLst>
+                        <p:cond delay="indefinite"/>
+                      </p:stCondLst>
+                      <p:childTnLst>
+                        <p:par>
+                          <p:cTn id="4" fill="hold">
+                            <p:stCondLst>
+                              <p:cond delay="0"/>
+                            </p:stCondLst>
+                            <p:childTnLst>
+                              <p:par>
+                                <p:cTn id="5" presetID="1" presetClass="entr" presetSubtype="0" fill="hold" grpId="0" nodeType="clickEffect">
+                                  <p:stCondLst>
+                                    <p:cond delay="0"/>
+                                  </p:stCondLst>
+                                  <p:childTnLst>
+                                    <p:set>
+                                      <p:cBhvr>
+                                        <p:cTn id="6" dur="1" fill="hold">
+                                          <p:stCondLst>
+                                            <p:cond delay="0"/>
+                                          </p:stCondLst>
+                                        </p:cTn>
+                                        <p:tgtEl>
+                                          <p:spTgt spid="3">
+                                            <p:txEl>
+                                              <p:pRg st="0" end="0"/>
+                                            </p:txEl>
+                                          </p:spTgt>
+                                        </p:tgtEl>
+                                        <p:attrNameLst>
+                                          <p:attrName>style.visibility</p:attrName>
+                                        </p:attrNameLst>
+                                      </p:cBhvr>
+                                      <p:to>
+                                        <p:strVal val="visible"/>
+                                      </p:to>
+                                    </p:set>
+                                  </p:childTnLst>
+                                </p:cTn>
+                              </p:par>
+                            </p:childTnLst>
+                          </p:cTn>
+                        </p:par>
+                      </p:childTnLst>
+                    </p:cTn>
+                  </p:par>
+                  <p:par>
+                    <p:cTn id="7" fill="hold">
+                      <p:stCondLst>
+                        <p:cond delay="indefinite"/>
+                      </p:stCondLst>
+                      <p:childTnLst>
+                        <p:par>
+                          <p:cTn id="8" fill="hold">
+                            <p:stCondLst>
+                              <p:cond delay="0"/>
+                            </p:stCondLst>
+                            <p:childTnLst>
+                              <p:par>
+                                <p:cTn id="9" presetID="1" presetClass="entr" presetSubtype="0" fill="hold" grpId="0" nodeType="clickEffect">
+                                  <p:stCondLst>
+                                    <p:cond delay="0"/>
+                                  </p:stCondLst>
+                                  <p:childTnLst>
+                                    <p:set>
+                                      <p:cBhvr>
+                                        <p:cTn id="10" dur="1" fill="hold">
+                                          <p:stCondLst>
+                                            <p:cond delay="0"/>
+                                          </p:stCondLst>
+                                        </p:cTn>
+                                        <p:tgtEl>
+                                          <p:spTgt spid="3">
+                                            <p:txEl>
+                                              <p:pRg st="1" end="1"/>
+                                            </p:txEl>
+                                          </p:spTgt>
+                                        </p:tgtEl>
+                                        <p:attrNameLst>
+                                          <p:attrName>style.visibility</p:attrName>
+                                        </p:attrNameLst>
+                                      </p:cBhvr>
+                                      <p:to>
+                                        <p:strVal val="visible"/>
+                                      </p:to>
+                                    </p:set>
+                                  </p:childTnLst>
+                                </p:cTn>
+                              </p:par>
+                            </p:childTnLst>
+                          </p:cTn>
+                        </p:par>
+                      </p:childTnLst>
+                    </p:cTn>
+                  </p:par>
+                  <p:par>
+                    <p:cTn id="11" fill="hold">
+                      <p:stCondLst>
+                        <p:cond delay="indefinite"/>
+                      </p:stCondLst>
+                      <p:childTnLst>
+                        <p:par>
+                          <p:cTn id="12" fill="hold">
+                            <p:stCondLst>
+                              <p:cond delay="0"/>
+                            </p:stCondLst>
+                            <p:childTnLst>
+                              <p:par>
+                                <p:cTn id="13" presetID="1" presetClass="entr" presetSubtype="0" fill="hold" grpId="0" nodeType="clickEffect">
+                                  <p:stCondLst>
+                                    <p:cond delay="0"/>
+                                  </p:stCondLst>
+                                  <p:childTnLst>
+                                    <p:set>
+                                      <p:cBhvr>
+                                        <p:cTn id="14" dur="1" fill="hold">
+                                          <p:stCondLst>
+                                            <p:cond delay="0"/>
+                                          </p:stCondLst>
+                                        </p:cTn>
+                                        <p:tgtEl>
+                                          <p:spTgt spid="3">
+                                            <p:txEl>
+                                              <p:pRg st="3" end="3"/>
+                                            </p:txEl>
+                                          </p:spTgt>
+                                        </p:tgtEl>
+                                        <p:attrNameLst>
+                                          <p:attrName>style.visibility</p:attrName>
+                                        </p:attrNameLst>
+                                      </p:cBhvr>
+                                      <p:to>
+                                        <p:strVal val="visible"/>
+                                      </p:to>
+                                    </p:set>
+                                  </p:childTnLst>
+                                </p:cTn>
+                              </p:par>
+                              <p:par>
+                                <p:cTn id="15" presetID="1" presetClass="entr" presetSubtype="0" fill="hold" grpId="0" nodeType="withEffect">
+                                  <p:stCondLst>
+                                    <p:cond delay="0"/>
+                                  </p:stCondLst>
+                                  <p:childTnLst>
+                                    <p:set>
+                                      <p:cBhvr>
+                                        <p:cTn id="16" dur="1" fill="hold">
+                                          <p:stCondLst>
+                                            <p:cond delay="0"/>
+                                          </p:stCondLst>
+                                        </p:cTn>
+                                        <p:tgtEl>
+                                          <p:spTgt spid="3">
+                                            <p:txEl>
+                                              <p:pRg st="4" end="4"/>
+                                            </p:txEl>
+                                          </p:spTgt>
+                                        </p:tgtEl>
+                                        <p:attrNameLst>
+                                          <p:attrName>style.visibility</p:attrName>
+                                        </p:attrNameLst>
+                                      </p:cBhvr>
+                                      <p:to>
+                                        <p:strVal val="visible"/>
+                                      </p:to>
+                                    </p:set>
+                                  </p:childTnLst>
+                                </p:cTn>
+                              </p:par>
+                              <p:par>
+                                <p:cTn id="17" presetID="1" presetClass="entr" presetSubtype="0" fill="hold" grpId="0" nodeType="withEffect">
+                                  <p:stCondLst>
+                                    <p:cond delay="0"/>
+                                  </p:stCondLst>
+                                  <p:childTnLst>
+                                    <p:set>
+                                      <p:cBhvr>
+                                        <p:cTn id="18" dur="1" fill="hold">
+                                          <p:stCondLst>
+                                            <p:cond delay="0"/>
+                                          </p:stCondLst>
+                                        </p:cTn>
+                                        <p:tgtEl>
+                                          <p:spTgt spid="3">
+                                            <p:txEl>
+                                              <p:pRg st="5" end="5"/>
+                                            </p:txEl>
+                                          </p:spTgt>
+                                        </p:tgtEl>
+                                        <p:attrNameLst>
+                                          <p:attrName>style.visibility</p:attrName>
+                                        </p:attrNameLst>
+                                      </p:cBhvr>
+                                      <p:to>
+                                        <p:strVal val="visible"/>
+                                      </p:to>
+                                    </p:set>
+                                  </p:childTnLst>
+                                </p:cTn>
+                              </p:par>
+                              <p:par>
+                                <p:cTn id="19" presetID="1" presetClass="entr" presetSubtype="0" fill="hold" grpId="0" nodeType="withEffect">
+                                  <p:stCondLst>
+                                    <p:cond delay="0"/>
+                                  </p:stCondLst>
+                                  <p:childTnLst>
+                                    <p:set>
+                                      <p:cBhvr>
+                                        <p:cTn id="20" dur="1" fill="hold">
+                                          <p:stCondLst>
+                                            <p:cond delay="0"/>
+                                          </p:stCondLst>
+                                        </p:cTn>
+                                        <p:tgtEl>
+                                          <p:spTgt spid="3">
+                                            <p:txEl>
+                                              <p:pRg st="6" end="6"/>
+                                            </p:txEl>
+                                          </p:spTgt>
+                                        </p:tgtEl>
+                                        <p:attrNameLst>
+                                          <p:attrName>style.visibility</p:attrName>
+                                        </p:attrNameLst>
+                                      </p:cBhvr>
+                                      <p:to>
+                                        <p:strVal val="visible"/>
+                                      </p:to>
+                                    </p:set>
+                                  </p:childTnLst>
+                                </p:cTn>
+                              </p:par>
+                            </p:childTnLst>
+                          </p:cTn>
+                        </p:par>
+                      </p:childTnLst>
+                    </p:cTn>
+                  </p:par>
+                </p:childTnLst>
+              </p:cTn>
+              <p:prevCondLst>
+                <p:cond evt="onPrev" delay="0">
+                  <p:tgtEl>
+                    <p:sldTgt/>
+                  </p:tgtEl>
+                </p:cond>
+              </p:prevCondLst>
+              <p:nextCondLst>
+                <p:cond evt="onNext" delay="0">
+                  <p:tgtEl>
+                    <p:sldTgt/>
+                  </p:tgtEl>
+                </p:cond>
+              </p:nextCondLst>
+            </p:seq>
+          </p:childTnLst>
+        </p:cTn>
+      </p:par>
+    </p:tnLst>
+    <p:bldLst>
+      <p:bldP spid="3" grpId="0" build="p"/>
+    </p:bldLst>
+  </p:timing>
 </p:sld>
 </file>
 
-<file path=ppt/slides/slide17.xml><?xml version="1.0" encoding="utf-8"?>
+<file path=ppt/slides/slide18.xml><?xml version="1.0" encoding="utf-8"?>
+<p:sld xmlns:a="http://schemas.openxmlformats.org/drawingml/2006/main" xmlns:r="http://schemas.openxmlformats.org/officeDocument/2006/relationships" xmlns:p="http://schemas.openxmlformats.org/presentationml/2006/main">
+  <p:cSld>
+    <p:spTree>
+      <p:nvGrpSpPr>
+        <p:cNvPr id="1" name=""/>
+        <p:cNvGrpSpPr/>
+        <p:nvPr/>
+      </p:nvGrpSpPr>
+      <p:grpSpPr>
+        <a:xfrm>
+          <a:off x="0" y="0"/>
+          <a:ext cx="0" cy="0"/>
+          <a:chOff x="0" y="0"/>
+          <a:chExt cx="0" cy="0"/>
+        </a:xfrm>
+      </p:grpSpPr>
+      <p:sp>
+        <p:nvSpPr>
+          <p:cNvPr id="2" name="Title 1">
+            <a:extLst>
+              <a:ext uri="{FF2B5EF4-FFF2-40B4-BE49-F238E27FC236}">
+                <a16:creationId xmlns:a16="http://schemas.microsoft.com/office/drawing/2014/main" id="{8C2A467B-B4E5-CEF4-9E7B-8AC4FA62029D}"/>
+              </a:ext>
+            </a:extLst>
+          </p:cNvPr>
+          <p:cNvSpPr>
+            <a:spLocks noGrp="1"/>
+          </p:cNvSpPr>
+          <p:nvPr>
+            <p:ph type="title"/>
+          </p:nvPr>
+        </p:nvSpPr>
+        <p:spPr/>
+        <p:txBody>
+          <a:bodyPr/>
+          <a:lstStyle/>
+          <a:p>
+            <a:r>
+              <a:rPr lang="en-US" dirty="0"/>
+              <a:t>Spurious Correlation in </a:t>
+            </a:r>
+            <a:r>
+              <a:rPr lang="en-GB" dirty="0"/>
+              <a:t>Diagnostic Analytics</a:t>
+            </a:r>
+            <a:endParaRPr lang="en-US" dirty="0"/>
+          </a:p>
+        </p:txBody>
+      </p:sp>
+      <p:sp>
+        <p:nvSpPr>
+          <p:cNvPr id="3" name="Content Placeholder 2">
+            <a:extLst>
+              <a:ext uri="{FF2B5EF4-FFF2-40B4-BE49-F238E27FC236}">
+                <a16:creationId xmlns:a16="http://schemas.microsoft.com/office/drawing/2014/main" id="{3611D64F-8619-3164-2F4C-D3C09F926A77}"/>
+              </a:ext>
+            </a:extLst>
+          </p:cNvPr>
+          <p:cNvSpPr>
+            <a:spLocks noGrp="1"/>
+          </p:cNvSpPr>
+          <p:nvPr>
+            <p:ph idx="1"/>
+          </p:nvPr>
+        </p:nvSpPr>
+        <p:spPr/>
+        <p:txBody>
+          <a:bodyPr/>
+          <a:lstStyle/>
+          <a:p>
+            <a:r>
+              <a:rPr lang="en-US" dirty="0"/>
+              <a:t>Relationship in which two or more events or variables are associated but not causally related</a:t>
+            </a:r>
+          </a:p>
+          <a:p>
+            <a:r>
+              <a:rPr lang="en-US" dirty="0"/>
+              <a:t>Relationship may be driven by coincidence or a </a:t>
+            </a:r>
+            <a:r>
+              <a:rPr lang="en-US" b="1" dirty="0"/>
+              <a:t>confounding variable </a:t>
+            </a:r>
+          </a:p>
+        </p:txBody>
+      </p:sp>
+      <p:pic>
+        <p:nvPicPr>
+          <p:cNvPr id="4" name="Picture 3" descr="Ice cream consumption correlates with Robberies in South Carolina (r=0.901)">
+            <a:extLst>
+              <a:ext uri="{FF2B5EF4-FFF2-40B4-BE49-F238E27FC236}">
+                <a16:creationId xmlns:a16="http://schemas.microsoft.com/office/drawing/2014/main" id="{1BE9FF5C-F8E0-913E-17DE-DC8AF2A1795D}"/>
+              </a:ext>
+            </a:extLst>
+          </p:cNvPr>
+          <p:cNvPicPr>
+            <a:picLocks noChangeAspect="1"/>
+          </p:cNvPicPr>
+          <p:nvPr/>
+        </p:nvPicPr>
+        <p:blipFill>
+          <a:blip r:embed="rId3"/>
+          <a:stretch>
+            <a:fillRect/>
+          </a:stretch>
+        </p:blipFill>
+        <p:spPr>
+          <a:xfrm>
+            <a:off x="3870960" y="3010564"/>
+            <a:ext cx="3968879" cy="3451200"/>
+          </a:xfrm>
+          <a:prstGeom prst="rect">
+            <a:avLst/>
+          </a:prstGeom>
+        </p:spPr>
+      </p:pic>
+    </p:spTree>
+    <p:extLst>
+      <p:ext uri="{BB962C8B-B14F-4D97-AF65-F5344CB8AC3E}">
+        <p14:creationId xmlns:p14="http://schemas.microsoft.com/office/powerpoint/2010/main" val="2954557868"/>
+      </p:ext>
+    </p:extLst>
+  </p:cSld>
+  <p:clrMapOvr>
+    <a:masterClrMapping/>
+  </p:clrMapOvr>
+  <p:timing>
+    <p:tnLst>
+      <p:par>
+        <p:cTn id="1" dur="indefinite" restart="never" nodeType="tmRoot">
+          <p:childTnLst>
+            <p:seq concurrent="1" nextAc="seek">
+              <p:cTn id="2" dur="indefinite" nodeType="mainSeq">
+                <p:childTnLst>
+                  <p:par>
+                    <p:cTn id="3" fill="hold">
+                      <p:stCondLst>
+                        <p:cond delay="indefinite"/>
+                      </p:stCondLst>
+                      <p:childTnLst>
+                        <p:par>
+                          <p:cTn id="4" fill="hold">
+                            <p:stCondLst>
+                              <p:cond delay="0"/>
+                            </p:stCondLst>
+                            <p:childTnLst>
+                              <p:par>
+                                <p:cTn id="5" presetID="1" presetClass="entr" presetSubtype="0" fill="hold" grpId="0" nodeType="clickEffect">
+                                  <p:stCondLst>
+                                    <p:cond delay="0"/>
+                                  </p:stCondLst>
+                                  <p:childTnLst>
+                                    <p:set>
+                                      <p:cBhvr>
+                                        <p:cTn id="6" dur="1" fill="hold">
+                                          <p:stCondLst>
+                                            <p:cond delay="0"/>
+                                          </p:stCondLst>
+                                        </p:cTn>
+                                        <p:tgtEl>
+                                          <p:spTgt spid="3">
+                                            <p:txEl>
+                                              <p:pRg st="0" end="0"/>
+                                            </p:txEl>
+                                          </p:spTgt>
+                                        </p:tgtEl>
+                                        <p:attrNameLst>
+                                          <p:attrName>style.visibility</p:attrName>
+                                        </p:attrNameLst>
+                                      </p:cBhvr>
+                                      <p:to>
+                                        <p:strVal val="visible"/>
+                                      </p:to>
+                                    </p:set>
+                                  </p:childTnLst>
+                                </p:cTn>
+                              </p:par>
+                            </p:childTnLst>
+                          </p:cTn>
+                        </p:par>
+                      </p:childTnLst>
+                    </p:cTn>
+                  </p:par>
+                  <p:par>
+                    <p:cTn id="7" fill="hold">
+                      <p:stCondLst>
+                        <p:cond delay="indefinite"/>
+                      </p:stCondLst>
+                      <p:childTnLst>
+                        <p:par>
+                          <p:cTn id="8" fill="hold">
+                            <p:stCondLst>
+                              <p:cond delay="0"/>
+                            </p:stCondLst>
+                            <p:childTnLst>
+                              <p:par>
+                                <p:cTn id="9" presetID="1" presetClass="entr" presetSubtype="0" fill="hold" grpId="0" nodeType="clickEffect">
+                                  <p:stCondLst>
+                                    <p:cond delay="0"/>
+                                  </p:stCondLst>
+                                  <p:childTnLst>
+                                    <p:set>
+                                      <p:cBhvr>
+                                        <p:cTn id="10" dur="1" fill="hold">
+                                          <p:stCondLst>
+                                            <p:cond delay="0"/>
+                                          </p:stCondLst>
+                                        </p:cTn>
+                                        <p:tgtEl>
+                                          <p:spTgt spid="3">
+                                            <p:txEl>
+                                              <p:pRg st="1" end="1"/>
+                                            </p:txEl>
+                                          </p:spTgt>
+                                        </p:tgtEl>
+                                        <p:attrNameLst>
+                                          <p:attrName>style.visibility</p:attrName>
+                                        </p:attrNameLst>
+                                      </p:cBhvr>
+                                      <p:to>
+                                        <p:strVal val="visible"/>
+                                      </p:to>
+                                    </p:set>
+                                  </p:childTnLst>
+                                </p:cTn>
+                              </p:par>
+                            </p:childTnLst>
+                          </p:cTn>
+                        </p:par>
+                      </p:childTnLst>
+                    </p:cTn>
+                  </p:par>
+                </p:childTnLst>
+              </p:cTn>
+              <p:prevCondLst>
+                <p:cond evt="onPrev" delay="0">
+                  <p:tgtEl>
+                    <p:sldTgt/>
+                  </p:tgtEl>
+                </p:cond>
+              </p:prevCondLst>
+              <p:nextCondLst>
+                <p:cond evt="onNext" delay="0">
+                  <p:tgtEl>
+                    <p:sldTgt/>
+                  </p:tgtEl>
+                </p:cond>
+              </p:nextCondLst>
+            </p:seq>
+          </p:childTnLst>
+        </p:cTn>
+      </p:par>
+    </p:tnLst>
+    <p:bldLst>
+      <p:bldP spid="3" grpId="0" build="p"/>
+    </p:bldLst>
+  </p:timing>
+</p:sld>
+</file>
+
+<file path=ppt/slides/slide19.xml><?xml version="1.0" encoding="utf-8"?>
 <p:sld xmlns:a="http://schemas.openxmlformats.org/drawingml/2006/main" xmlns:r="http://schemas.openxmlformats.org/officeDocument/2006/relationships" xmlns:p="http://schemas.openxmlformats.org/presentationml/2006/main">
   <p:cSld>
     <p:spTree>
@@ -11685,14 +13928,17 @@
           <a:p>
             <a:r>
               <a:rPr lang="en-GB" dirty="0"/>
-              <a:t>Predictive analytics uses available information to estimate a future or unknown outcome.</a:t>
+              <a:t>Predictive analytics uses available information to estimate an unknown outcome, often in the future.</a:t>
             </a:r>
           </a:p>
           <a:p>
             <a:r>
               <a:rPr lang="en-GB" dirty="0"/>
-              <a:t>Predictions always involve uncertainty and are only as reliable as the data and assumptions behind them.</a:t>
-            </a:r>
+              <a:t>Predictions are uncertain and depend on the quality of the data and assumptions.</a:t>
+            </a:r>
+          </a:p>
+          <a:p>
+            <a:endParaRPr lang="en-GB" dirty="0"/>
           </a:p>
           <a:p>
             <a:r>
@@ -11704,14 +13950,14 @@
             <a:pPr lvl="1"/>
             <a:r>
               <a:rPr lang="en-GB" dirty="0"/>
-              <a:t>How is an athlete likely to perform in the next game?</a:t>
+              <a:t>How is the athlete likely to perform in the next game? </a:t>
             </a:r>
           </a:p>
           <a:p>
             <a:pPr lvl="1"/>
             <a:r>
               <a:rPr lang="en-GB" dirty="0"/>
-              <a:t>Which prospect is most likely to succeed at the next level?</a:t>
+              <a:t>Which prospect is most likely to succeed at the next level? </a:t>
             </a:r>
           </a:p>
           <a:p>
@@ -11723,10 +13969,7 @@
           </a:p>
           <a:p>
             <a:pPr lvl="1"/>
-            <a:r>
-              <a:rPr lang="en-GB" dirty="0"/>
-              <a:t>Is an athlete likely to be adequately recovered for tomorrow’s practice?</a:t>
-            </a:r>
+            <a:endParaRPr lang="en-GB" dirty="0"/>
           </a:p>
         </p:txBody>
       </p:sp>
@@ -11740,10 +13983,664 @@
   <p:clrMapOvr>
     <a:masterClrMapping/>
   </p:clrMapOvr>
+  <p:timing>
+    <p:tnLst>
+      <p:par>
+        <p:cTn id="1" dur="indefinite" restart="never" nodeType="tmRoot">
+          <p:childTnLst>
+            <p:seq concurrent="1" nextAc="seek">
+              <p:cTn id="2" dur="indefinite" nodeType="mainSeq">
+                <p:childTnLst>
+                  <p:par>
+                    <p:cTn id="3" fill="hold">
+                      <p:stCondLst>
+                        <p:cond delay="indefinite"/>
+                      </p:stCondLst>
+                      <p:childTnLst>
+                        <p:par>
+                          <p:cTn id="4" fill="hold">
+                            <p:stCondLst>
+                              <p:cond delay="0"/>
+                            </p:stCondLst>
+                            <p:childTnLst>
+                              <p:par>
+                                <p:cTn id="5" presetID="1" presetClass="entr" presetSubtype="0" fill="hold" grpId="0" nodeType="clickEffect">
+                                  <p:stCondLst>
+                                    <p:cond delay="0"/>
+                                  </p:stCondLst>
+                                  <p:childTnLst>
+                                    <p:set>
+                                      <p:cBhvr>
+                                        <p:cTn id="6" dur="1" fill="hold">
+                                          <p:stCondLst>
+                                            <p:cond delay="0"/>
+                                          </p:stCondLst>
+                                        </p:cTn>
+                                        <p:tgtEl>
+                                          <p:spTgt spid="3">
+                                            <p:txEl>
+                                              <p:pRg st="0" end="0"/>
+                                            </p:txEl>
+                                          </p:spTgt>
+                                        </p:tgtEl>
+                                        <p:attrNameLst>
+                                          <p:attrName>style.visibility</p:attrName>
+                                        </p:attrNameLst>
+                                      </p:cBhvr>
+                                      <p:to>
+                                        <p:strVal val="visible"/>
+                                      </p:to>
+                                    </p:set>
+                                  </p:childTnLst>
+                                </p:cTn>
+                              </p:par>
+                            </p:childTnLst>
+                          </p:cTn>
+                        </p:par>
+                      </p:childTnLst>
+                    </p:cTn>
+                  </p:par>
+                  <p:par>
+                    <p:cTn id="7" fill="hold">
+                      <p:stCondLst>
+                        <p:cond delay="indefinite"/>
+                      </p:stCondLst>
+                      <p:childTnLst>
+                        <p:par>
+                          <p:cTn id="8" fill="hold">
+                            <p:stCondLst>
+                              <p:cond delay="0"/>
+                            </p:stCondLst>
+                            <p:childTnLst>
+                              <p:par>
+                                <p:cTn id="9" presetID="1" presetClass="entr" presetSubtype="0" fill="hold" grpId="0" nodeType="clickEffect">
+                                  <p:stCondLst>
+                                    <p:cond delay="0"/>
+                                  </p:stCondLst>
+                                  <p:childTnLst>
+                                    <p:set>
+                                      <p:cBhvr>
+                                        <p:cTn id="10" dur="1" fill="hold">
+                                          <p:stCondLst>
+                                            <p:cond delay="0"/>
+                                          </p:stCondLst>
+                                        </p:cTn>
+                                        <p:tgtEl>
+                                          <p:spTgt spid="3">
+                                            <p:txEl>
+                                              <p:pRg st="1" end="1"/>
+                                            </p:txEl>
+                                          </p:spTgt>
+                                        </p:tgtEl>
+                                        <p:attrNameLst>
+                                          <p:attrName>style.visibility</p:attrName>
+                                        </p:attrNameLst>
+                                      </p:cBhvr>
+                                      <p:to>
+                                        <p:strVal val="visible"/>
+                                      </p:to>
+                                    </p:set>
+                                  </p:childTnLst>
+                                </p:cTn>
+                              </p:par>
+                            </p:childTnLst>
+                          </p:cTn>
+                        </p:par>
+                      </p:childTnLst>
+                    </p:cTn>
+                  </p:par>
+                  <p:par>
+                    <p:cTn id="11" fill="hold">
+                      <p:stCondLst>
+                        <p:cond delay="indefinite"/>
+                      </p:stCondLst>
+                      <p:childTnLst>
+                        <p:par>
+                          <p:cTn id="12" fill="hold">
+                            <p:stCondLst>
+                              <p:cond delay="0"/>
+                            </p:stCondLst>
+                            <p:childTnLst>
+                              <p:par>
+                                <p:cTn id="13" presetID="1" presetClass="entr" presetSubtype="0" fill="hold" grpId="0" nodeType="clickEffect">
+                                  <p:stCondLst>
+                                    <p:cond delay="0"/>
+                                  </p:stCondLst>
+                                  <p:childTnLst>
+                                    <p:set>
+                                      <p:cBhvr>
+                                        <p:cTn id="14" dur="1" fill="hold">
+                                          <p:stCondLst>
+                                            <p:cond delay="0"/>
+                                          </p:stCondLst>
+                                        </p:cTn>
+                                        <p:tgtEl>
+                                          <p:spTgt spid="3">
+                                            <p:txEl>
+                                              <p:pRg st="3" end="3"/>
+                                            </p:txEl>
+                                          </p:spTgt>
+                                        </p:tgtEl>
+                                        <p:attrNameLst>
+                                          <p:attrName>style.visibility</p:attrName>
+                                        </p:attrNameLst>
+                                      </p:cBhvr>
+                                      <p:to>
+                                        <p:strVal val="visible"/>
+                                      </p:to>
+                                    </p:set>
+                                  </p:childTnLst>
+                                </p:cTn>
+                              </p:par>
+                              <p:par>
+                                <p:cTn id="15" presetID="1" presetClass="entr" presetSubtype="0" fill="hold" grpId="0" nodeType="withEffect">
+                                  <p:stCondLst>
+                                    <p:cond delay="0"/>
+                                  </p:stCondLst>
+                                  <p:childTnLst>
+                                    <p:set>
+                                      <p:cBhvr>
+                                        <p:cTn id="16" dur="1" fill="hold">
+                                          <p:stCondLst>
+                                            <p:cond delay="0"/>
+                                          </p:stCondLst>
+                                        </p:cTn>
+                                        <p:tgtEl>
+                                          <p:spTgt spid="3">
+                                            <p:txEl>
+                                              <p:pRg st="4" end="4"/>
+                                            </p:txEl>
+                                          </p:spTgt>
+                                        </p:tgtEl>
+                                        <p:attrNameLst>
+                                          <p:attrName>style.visibility</p:attrName>
+                                        </p:attrNameLst>
+                                      </p:cBhvr>
+                                      <p:to>
+                                        <p:strVal val="visible"/>
+                                      </p:to>
+                                    </p:set>
+                                  </p:childTnLst>
+                                </p:cTn>
+                              </p:par>
+                              <p:par>
+                                <p:cTn id="17" presetID="1" presetClass="entr" presetSubtype="0" fill="hold" grpId="0" nodeType="withEffect">
+                                  <p:stCondLst>
+                                    <p:cond delay="0"/>
+                                  </p:stCondLst>
+                                  <p:childTnLst>
+                                    <p:set>
+                                      <p:cBhvr>
+                                        <p:cTn id="18" dur="1" fill="hold">
+                                          <p:stCondLst>
+                                            <p:cond delay="0"/>
+                                          </p:stCondLst>
+                                        </p:cTn>
+                                        <p:tgtEl>
+                                          <p:spTgt spid="3">
+                                            <p:txEl>
+                                              <p:pRg st="5" end="5"/>
+                                            </p:txEl>
+                                          </p:spTgt>
+                                        </p:tgtEl>
+                                        <p:attrNameLst>
+                                          <p:attrName>style.visibility</p:attrName>
+                                        </p:attrNameLst>
+                                      </p:cBhvr>
+                                      <p:to>
+                                        <p:strVal val="visible"/>
+                                      </p:to>
+                                    </p:set>
+                                  </p:childTnLst>
+                                </p:cTn>
+                              </p:par>
+                              <p:par>
+                                <p:cTn id="19" presetID="1" presetClass="entr" presetSubtype="0" fill="hold" grpId="0" nodeType="withEffect">
+                                  <p:stCondLst>
+                                    <p:cond delay="0"/>
+                                  </p:stCondLst>
+                                  <p:childTnLst>
+                                    <p:set>
+                                      <p:cBhvr>
+                                        <p:cTn id="20" dur="1" fill="hold">
+                                          <p:stCondLst>
+                                            <p:cond delay="0"/>
+                                          </p:stCondLst>
+                                        </p:cTn>
+                                        <p:tgtEl>
+                                          <p:spTgt spid="3">
+                                            <p:txEl>
+                                              <p:pRg st="6" end="6"/>
+                                            </p:txEl>
+                                          </p:spTgt>
+                                        </p:tgtEl>
+                                        <p:attrNameLst>
+                                          <p:attrName>style.visibility</p:attrName>
+                                        </p:attrNameLst>
+                                      </p:cBhvr>
+                                      <p:to>
+                                        <p:strVal val="visible"/>
+                                      </p:to>
+                                    </p:set>
+                                  </p:childTnLst>
+                                </p:cTn>
+                              </p:par>
+                            </p:childTnLst>
+                          </p:cTn>
+                        </p:par>
+                      </p:childTnLst>
+                    </p:cTn>
+                  </p:par>
+                </p:childTnLst>
+              </p:cTn>
+              <p:prevCondLst>
+                <p:cond evt="onPrev" delay="0">
+                  <p:tgtEl>
+                    <p:sldTgt/>
+                  </p:tgtEl>
+                </p:cond>
+              </p:prevCondLst>
+              <p:nextCondLst>
+                <p:cond evt="onNext" delay="0">
+                  <p:tgtEl>
+                    <p:sldTgt/>
+                  </p:tgtEl>
+                </p:cond>
+              </p:nextCondLst>
+            </p:seq>
+          </p:childTnLst>
+        </p:cTn>
+      </p:par>
+    </p:tnLst>
+    <p:bldLst>
+      <p:bldP spid="3" grpId="0" build="p"/>
+    </p:bldLst>
+  </p:timing>
 </p:sld>
 </file>
 
-<file path=ppt/slides/slide18.xml><?xml version="1.0" encoding="utf-8"?>
+<file path=ppt/slides/slide2.xml><?xml version="1.0" encoding="utf-8"?>
+<p:sld xmlns:a="http://schemas.openxmlformats.org/drawingml/2006/main" xmlns:r="http://schemas.openxmlformats.org/officeDocument/2006/relationships" xmlns:p="http://schemas.openxmlformats.org/presentationml/2006/main">
+  <p:cSld>
+    <p:spTree>
+      <p:nvGrpSpPr>
+        <p:cNvPr id="1" name=""/>
+        <p:cNvGrpSpPr/>
+        <p:nvPr/>
+      </p:nvGrpSpPr>
+      <p:grpSpPr>
+        <a:xfrm>
+          <a:off x="0" y="0"/>
+          <a:ext cx="0" cy="0"/>
+          <a:chOff x="0" y="0"/>
+          <a:chExt cx="0" cy="0"/>
+        </a:xfrm>
+      </p:grpSpPr>
+      <p:sp>
+        <p:nvSpPr>
+          <p:cNvPr id="2" name="Title 1">
+            <a:extLst>
+              <a:ext uri="{FF2B5EF4-FFF2-40B4-BE49-F238E27FC236}">
+                <a16:creationId xmlns:a16="http://schemas.microsoft.com/office/drawing/2014/main" id="{E6104B99-C0BE-C514-46EC-CAE531CB329A}"/>
+              </a:ext>
+            </a:extLst>
+          </p:cNvPr>
+          <p:cNvSpPr>
+            <a:spLocks noGrp="1"/>
+          </p:cNvSpPr>
+          <p:nvPr>
+            <p:ph type="title"/>
+          </p:nvPr>
+        </p:nvSpPr>
+        <p:spPr/>
+        <p:txBody>
+          <a:bodyPr>
+            <a:normAutofit/>
+          </a:bodyPr>
+          <a:lstStyle/>
+          <a:p>
+            <a:r>
+              <a:rPr lang="en-GB" dirty="0"/>
+              <a:t>Sport Analytics Begins With a Decision</a:t>
+            </a:r>
+            <a:endParaRPr lang="en-US" dirty="0"/>
+          </a:p>
+        </p:txBody>
+      </p:sp>
+      <p:sp>
+        <p:nvSpPr>
+          <p:cNvPr id="3" name="Content Placeholder 2">
+            <a:extLst>
+              <a:ext uri="{FF2B5EF4-FFF2-40B4-BE49-F238E27FC236}">
+                <a16:creationId xmlns:a16="http://schemas.microsoft.com/office/drawing/2014/main" id="{35EC063E-392D-93CE-404B-5B2C5A5F6B12}"/>
+              </a:ext>
+            </a:extLst>
+          </p:cNvPr>
+          <p:cNvSpPr>
+            <a:spLocks noGrp="1"/>
+          </p:cNvSpPr>
+          <p:nvPr>
+            <p:ph idx="1"/>
+          </p:nvPr>
+        </p:nvSpPr>
+        <p:spPr/>
+        <p:txBody>
+          <a:bodyPr>
+            <a:normAutofit/>
+          </a:bodyPr>
+          <a:lstStyle/>
+          <a:p>
+            <a:pPr marL="0" indent="0">
+              <a:buNone/>
+            </a:pPr>
+            <a:r>
+              <a:rPr lang="en-GB" dirty="0"/>
+              <a:t>For any sport analytics problem, ask:</a:t>
+            </a:r>
+          </a:p>
+          <a:p>
+            <a:pPr marL="971550" lvl="1" indent="-514350">
+              <a:buFont typeface="+mj-lt"/>
+              <a:buAutoNum type="arabicPeriod"/>
+            </a:pPr>
+            <a:r>
+              <a:rPr lang="en-GB" dirty="0"/>
+              <a:t>Who will use the analysis? </a:t>
+            </a:r>
+          </a:p>
+          <a:p>
+            <a:pPr marL="971550" lvl="1" indent="-514350">
+              <a:buFont typeface="+mj-lt"/>
+              <a:buAutoNum type="arabicPeriod"/>
+            </a:pPr>
+            <a:r>
+              <a:rPr lang="en-GB" dirty="0"/>
+              <a:t>What decision are they trying to make? </a:t>
+            </a:r>
+          </a:p>
+          <a:p>
+            <a:pPr marL="971550" lvl="1" indent="-514350">
+              <a:buFont typeface="+mj-lt"/>
+              <a:buAutoNum type="arabicPeriod"/>
+            </a:pPr>
+            <a:r>
+              <a:rPr lang="en-GB" dirty="0"/>
+              <a:t>What information could improve that decision? </a:t>
+            </a:r>
+          </a:p>
+          <a:p>
+            <a:pPr marL="971550" lvl="1" indent="-514350">
+              <a:buFont typeface="+mj-lt"/>
+              <a:buAutoNum type="arabicPeriod"/>
+            </a:pPr>
+            <a:r>
+              <a:rPr lang="en-GB" dirty="0"/>
+              <a:t>What are the consequences of being wrong? </a:t>
+            </a:r>
+          </a:p>
+          <a:p>
+            <a:pPr marL="971550" lvl="1" indent="-514350">
+              <a:buFont typeface="+mj-lt"/>
+              <a:buAutoNum type="arabicPeriod"/>
+            </a:pPr>
+            <a:r>
+              <a:rPr lang="en-GB" dirty="0"/>
+              <a:t>What data might provide that information?</a:t>
+            </a:r>
+          </a:p>
+        </p:txBody>
+      </p:sp>
+    </p:spTree>
+    <p:extLst>
+      <p:ext uri="{BB962C8B-B14F-4D97-AF65-F5344CB8AC3E}">
+        <p14:creationId xmlns:p14="http://schemas.microsoft.com/office/powerpoint/2010/main" val="2477808522"/>
+      </p:ext>
+    </p:extLst>
+  </p:cSld>
+  <p:clrMapOvr>
+    <a:masterClrMapping/>
+  </p:clrMapOvr>
+  <p:timing>
+    <p:tnLst>
+      <p:par>
+        <p:cTn id="1" dur="indefinite" restart="never" nodeType="tmRoot">
+          <p:childTnLst>
+            <p:seq concurrent="1" nextAc="seek">
+              <p:cTn id="2" dur="indefinite" nodeType="mainSeq">
+                <p:childTnLst>
+                  <p:par>
+                    <p:cTn id="3" fill="hold">
+                      <p:stCondLst>
+                        <p:cond delay="indefinite"/>
+                      </p:stCondLst>
+                      <p:childTnLst>
+                        <p:par>
+                          <p:cTn id="4" fill="hold">
+                            <p:stCondLst>
+                              <p:cond delay="0"/>
+                            </p:stCondLst>
+                            <p:childTnLst>
+                              <p:par>
+                                <p:cTn id="5" presetID="1" presetClass="entr" presetSubtype="0" fill="hold" grpId="0" nodeType="clickEffect">
+                                  <p:stCondLst>
+                                    <p:cond delay="0"/>
+                                  </p:stCondLst>
+                                  <p:childTnLst>
+                                    <p:set>
+                                      <p:cBhvr>
+                                        <p:cTn id="6" dur="1" fill="hold">
+                                          <p:stCondLst>
+                                            <p:cond delay="0"/>
+                                          </p:stCondLst>
+                                        </p:cTn>
+                                        <p:tgtEl>
+                                          <p:spTgt spid="3">
+                                            <p:txEl>
+                                              <p:pRg st="0" end="0"/>
+                                            </p:txEl>
+                                          </p:spTgt>
+                                        </p:tgtEl>
+                                        <p:attrNameLst>
+                                          <p:attrName>style.visibility</p:attrName>
+                                        </p:attrNameLst>
+                                      </p:cBhvr>
+                                      <p:to>
+                                        <p:strVal val="visible"/>
+                                      </p:to>
+                                    </p:set>
+                                  </p:childTnLst>
+                                </p:cTn>
+                              </p:par>
+                              <p:par>
+                                <p:cTn id="7" presetID="1" presetClass="entr" presetSubtype="0" fill="hold" grpId="0" nodeType="withEffect">
+                                  <p:stCondLst>
+                                    <p:cond delay="0"/>
+                                  </p:stCondLst>
+                                  <p:childTnLst>
+                                    <p:set>
+                                      <p:cBhvr>
+                                        <p:cTn id="8" dur="1" fill="hold">
+                                          <p:stCondLst>
+                                            <p:cond delay="0"/>
+                                          </p:stCondLst>
+                                        </p:cTn>
+                                        <p:tgtEl>
+                                          <p:spTgt spid="3">
+                                            <p:txEl>
+                                              <p:pRg st="1" end="1"/>
+                                            </p:txEl>
+                                          </p:spTgt>
+                                        </p:tgtEl>
+                                        <p:attrNameLst>
+                                          <p:attrName>style.visibility</p:attrName>
+                                        </p:attrNameLst>
+                                      </p:cBhvr>
+                                      <p:to>
+                                        <p:strVal val="visible"/>
+                                      </p:to>
+                                    </p:set>
+                                  </p:childTnLst>
+                                </p:cTn>
+                              </p:par>
+                              <p:par>
+                                <p:cTn id="9" presetID="1" presetClass="entr" presetSubtype="0" fill="hold" grpId="0" nodeType="withEffect">
+                                  <p:stCondLst>
+                                    <p:cond delay="0"/>
+                                  </p:stCondLst>
+                                  <p:childTnLst>
+                                    <p:set>
+                                      <p:cBhvr>
+                                        <p:cTn id="10" dur="1" fill="hold">
+                                          <p:stCondLst>
+                                            <p:cond delay="0"/>
+                                          </p:stCondLst>
+                                        </p:cTn>
+                                        <p:tgtEl>
+                                          <p:spTgt spid="3">
+                                            <p:txEl>
+                                              <p:pRg st="2" end="2"/>
+                                            </p:txEl>
+                                          </p:spTgt>
+                                        </p:tgtEl>
+                                        <p:attrNameLst>
+                                          <p:attrName>style.visibility</p:attrName>
+                                        </p:attrNameLst>
+                                      </p:cBhvr>
+                                      <p:to>
+                                        <p:strVal val="visible"/>
+                                      </p:to>
+                                    </p:set>
+                                  </p:childTnLst>
+                                </p:cTn>
+                              </p:par>
+                              <p:par>
+                                <p:cTn id="11" presetID="1" presetClass="entr" presetSubtype="0" fill="hold" grpId="0" nodeType="withEffect">
+                                  <p:stCondLst>
+                                    <p:cond delay="0"/>
+                                  </p:stCondLst>
+                                  <p:childTnLst>
+                                    <p:set>
+                                      <p:cBhvr>
+                                        <p:cTn id="12" dur="1" fill="hold">
+                                          <p:stCondLst>
+                                            <p:cond delay="0"/>
+                                          </p:stCondLst>
+                                        </p:cTn>
+                                        <p:tgtEl>
+                                          <p:spTgt spid="3">
+                                            <p:txEl>
+                                              <p:pRg st="3" end="3"/>
+                                            </p:txEl>
+                                          </p:spTgt>
+                                        </p:tgtEl>
+                                        <p:attrNameLst>
+                                          <p:attrName>style.visibility</p:attrName>
+                                        </p:attrNameLst>
+                                      </p:cBhvr>
+                                      <p:to>
+                                        <p:strVal val="visible"/>
+                                      </p:to>
+                                    </p:set>
+                                  </p:childTnLst>
+                                </p:cTn>
+                              </p:par>
+                              <p:par>
+                                <p:cTn id="13" presetID="1" presetClass="entr" presetSubtype="0" fill="hold" grpId="0" nodeType="withEffect">
+                                  <p:stCondLst>
+                                    <p:cond delay="0"/>
+                                  </p:stCondLst>
+                                  <p:childTnLst>
+                                    <p:set>
+                                      <p:cBhvr>
+                                        <p:cTn id="14" dur="1" fill="hold">
+                                          <p:stCondLst>
+                                            <p:cond delay="0"/>
+                                          </p:stCondLst>
+                                        </p:cTn>
+                                        <p:tgtEl>
+                                          <p:spTgt spid="3">
+                                            <p:txEl>
+                                              <p:pRg st="4" end="4"/>
+                                            </p:txEl>
+                                          </p:spTgt>
+                                        </p:tgtEl>
+                                        <p:attrNameLst>
+                                          <p:attrName>style.visibility</p:attrName>
+                                        </p:attrNameLst>
+                                      </p:cBhvr>
+                                      <p:to>
+                                        <p:strVal val="visible"/>
+                                      </p:to>
+                                    </p:set>
+                                  </p:childTnLst>
+                                </p:cTn>
+                              </p:par>
+                              <p:par>
+                                <p:cTn id="15" presetID="1" presetClass="entr" presetSubtype="0" fill="hold" grpId="0" nodeType="withEffect">
+                                  <p:stCondLst>
+                                    <p:cond delay="0"/>
+                                  </p:stCondLst>
+                                  <p:childTnLst>
+                                    <p:set>
+                                      <p:cBhvr>
+                                        <p:cTn id="16" dur="1" fill="hold">
+                                          <p:stCondLst>
+                                            <p:cond delay="0"/>
+                                          </p:stCondLst>
+                                        </p:cTn>
+                                        <p:tgtEl>
+                                          <p:spTgt spid="3">
+                                            <p:txEl>
+                                              <p:pRg st="5" end="5"/>
+                                            </p:txEl>
+                                          </p:spTgt>
+                                        </p:tgtEl>
+                                        <p:attrNameLst>
+                                          <p:attrName>style.visibility</p:attrName>
+                                        </p:attrNameLst>
+                                      </p:cBhvr>
+                                      <p:to>
+                                        <p:strVal val="visible"/>
+                                      </p:to>
+                                    </p:set>
+                                  </p:childTnLst>
+                                </p:cTn>
+                              </p:par>
+                            </p:childTnLst>
+                          </p:cTn>
+                        </p:par>
+                      </p:childTnLst>
+                    </p:cTn>
+                  </p:par>
+                </p:childTnLst>
+              </p:cTn>
+              <p:prevCondLst>
+                <p:cond evt="onPrev" delay="0">
+                  <p:tgtEl>
+                    <p:sldTgt/>
+                  </p:tgtEl>
+                </p:cond>
+              </p:prevCondLst>
+              <p:nextCondLst>
+                <p:cond evt="onNext" delay="0">
+                  <p:tgtEl>
+                    <p:sldTgt/>
+                  </p:tgtEl>
+                </p:cond>
+              </p:nextCondLst>
+            </p:seq>
+          </p:childTnLst>
+        </p:cTn>
+      </p:par>
+    </p:tnLst>
+    <p:bldLst>
+      <p:bldP spid="3" grpId="0" build="p"/>
+    </p:bldLst>
+  </p:timing>
+</p:sld>
+</file>
+
+<file path=ppt/slides/slide20.xml><?xml version="1.0" encoding="utf-8"?>
 <p:sld xmlns:a="http://schemas.openxmlformats.org/drawingml/2006/main" xmlns:r="http://schemas.openxmlformats.org/officeDocument/2006/relationships" xmlns:p="http://schemas.openxmlformats.org/presentationml/2006/main">
   <p:cSld>
     <p:spTree>
@@ -11820,14 +14717,25 @@
           <a:p>
             <a:r>
               <a:rPr lang="en-GB" dirty="0"/>
-              <a:t>Prescriptive analytics uses evidence to recommend an action or decision.</a:t>
+              <a:t>Prescriptive analytics uses evidence to compare possible actions and recommend what should be done.</a:t>
             </a:r>
           </a:p>
           <a:p>
             <a:r>
               <a:rPr lang="en-GB" dirty="0"/>
-              <a:t>May guide decisions, but the final choice also depends on context, priorities, experience, and human judgment.</a:t>
-            </a:r>
+              <a:t>May </a:t>
+            </a:r>
+            <a:r>
+              <a:rPr lang="en-GB" b="1" u="sng" dirty="0"/>
+              <a:t>guide</a:t>
+            </a:r>
+            <a:r>
+              <a:rPr lang="en-GB" dirty="0"/>
+              <a:t> decisions, but the final choice also depends on context, priorities, experience, and human judgment.</a:t>
+            </a:r>
+          </a:p>
+          <a:p>
+            <a:endParaRPr lang="en-GB" dirty="0"/>
           </a:p>
           <a:p>
             <a:r>
@@ -11839,35 +14747,21 @@
             <a:pPr lvl="1"/>
             <a:r>
               <a:rPr lang="en-GB" dirty="0"/>
-              <a:t>Should an athlete’s training load be modified?</a:t>
+              <a:t>Should the athlete’s training be modified? </a:t>
             </a:r>
           </a:p>
           <a:p>
             <a:pPr lvl="1"/>
             <a:r>
               <a:rPr lang="en-GB" dirty="0"/>
-              <a:t>Which prospect should the team select?</a:t>
+              <a:t>Which prospect should the team select? </a:t>
             </a:r>
           </a:p>
           <a:p>
             <a:pPr lvl="1"/>
             <a:r>
               <a:rPr lang="en-GB" dirty="0"/>
-              <a:t>Which lineup should the coach use?</a:t>
-            </a:r>
-          </a:p>
-          <a:p>
-            <a:pPr lvl="1"/>
-            <a:r>
-              <a:rPr lang="en-GB" dirty="0"/>
-              <a:t>Should the team change its defensive strategy?</a:t>
-            </a:r>
-          </a:p>
-          <a:p>
-            <a:pPr lvl="1"/>
-            <a:r>
-              <a:rPr lang="en-GB" dirty="0"/>
-              <a:t>How should limited resources be allocated?</a:t>
+              <a:t>Which defensive strategy should the team use?</a:t>
             </a:r>
           </a:p>
         </p:txBody>
@@ -11882,10 +14776,283 @@
   <p:clrMapOvr>
     <a:masterClrMapping/>
   </p:clrMapOvr>
+  <p:timing>
+    <p:tnLst>
+      <p:par>
+        <p:cTn id="1" dur="indefinite" restart="never" nodeType="tmRoot">
+          <p:childTnLst>
+            <p:seq concurrent="1" nextAc="seek">
+              <p:cTn id="2" dur="indefinite" nodeType="mainSeq">
+                <p:childTnLst>
+                  <p:par>
+                    <p:cTn id="3" fill="hold">
+                      <p:stCondLst>
+                        <p:cond delay="indefinite"/>
+                      </p:stCondLst>
+                      <p:childTnLst>
+                        <p:par>
+                          <p:cTn id="4" fill="hold">
+                            <p:stCondLst>
+                              <p:cond delay="0"/>
+                            </p:stCondLst>
+                            <p:childTnLst>
+                              <p:par>
+                                <p:cTn id="5" presetID="1" presetClass="entr" presetSubtype="0" fill="hold" grpId="0" nodeType="clickEffect">
+                                  <p:stCondLst>
+                                    <p:cond delay="0"/>
+                                  </p:stCondLst>
+                                  <p:childTnLst>
+                                    <p:set>
+                                      <p:cBhvr>
+                                        <p:cTn id="6" dur="1" fill="hold">
+                                          <p:stCondLst>
+                                            <p:cond delay="0"/>
+                                          </p:stCondLst>
+                                        </p:cTn>
+                                        <p:tgtEl>
+                                          <p:spTgt spid="3">
+                                            <p:txEl>
+                                              <p:pRg st="0" end="0"/>
+                                            </p:txEl>
+                                          </p:spTgt>
+                                        </p:tgtEl>
+                                        <p:attrNameLst>
+                                          <p:attrName>style.visibility</p:attrName>
+                                        </p:attrNameLst>
+                                      </p:cBhvr>
+                                      <p:to>
+                                        <p:strVal val="visible"/>
+                                      </p:to>
+                                    </p:set>
+                                  </p:childTnLst>
+                                </p:cTn>
+                              </p:par>
+                            </p:childTnLst>
+                          </p:cTn>
+                        </p:par>
+                      </p:childTnLst>
+                    </p:cTn>
+                  </p:par>
+                  <p:par>
+                    <p:cTn id="7" fill="hold">
+                      <p:stCondLst>
+                        <p:cond delay="indefinite"/>
+                      </p:stCondLst>
+                      <p:childTnLst>
+                        <p:par>
+                          <p:cTn id="8" fill="hold">
+                            <p:stCondLst>
+                              <p:cond delay="0"/>
+                            </p:stCondLst>
+                            <p:childTnLst>
+                              <p:par>
+                                <p:cTn id="9" presetID="1" presetClass="entr" presetSubtype="0" fill="hold" grpId="0" nodeType="clickEffect">
+                                  <p:stCondLst>
+                                    <p:cond delay="0"/>
+                                  </p:stCondLst>
+                                  <p:childTnLst>
+                                    <p:set>
+                                      <p:cBhvr>
+                                        <p:cTn id="10" dur="1" fill="hold">
+                                          <p:stCondLst>
+                                            <p:cond delay="0"/>
+                                          </p:stCondLst>
+                                        </p:cTn>
+                                        <p:tgtEl>
+                                          <p:spTgt spid="3">
+                                            <p:txEl>
+                                              <p:pRg st="1" end="1"/>
+                                            </p:txEl>
+                                          </p:spTgt>
+                                        </p:tgtEl>
+                                        <p:attrNameLst>
+                                          <p:attrName>style.visibility</p:attrName>
+                                        </p:attrNameLst>
+                                      </p:cBhvr>
+                                      <p:to>
+                                        <p:strVal val="visible"/>
+                                      </p:to>
+                                    </p:set>
+                                  </p:childTnLst>
+                                </p:cTn>
+                              </p:par>
+                            </p:childTnLst>
+                          </p:cTn>
+                        </p:par>
+                      </p:childTnLst>
+                    </p:cTn>
+                  </p:par>
+                  <p:par>
+                    <p:cTn id="11" fill="hold">
+                      <p:stCondLst>
+                        <p:cond delay="indefinite"/>
+                      </p:stCondLst>
+                      <p:childTnLst>
+                        <p:par>
+                          <p:cTn id="12" fill="hold">
+                            <p:stCondLst>
+                              <p:cond delay="0"/>
+                            </p:stCondLst>
+                            <p:childTnLst>
+                              <p:par>
+                                <p:cTn id="13" presetID="1" presetClass="entr" presetSubtype="0" fill="hold" grpId="0" nodeType="clickEffect">
+                                  <p:stCondLst>
+                                    <p:cond delay="0"/>
+                                  </p:stCondLst>
+                                  <p:childTnLst>
+                                    <p:set>
+                                      <p:cBhvr>
+                                        <p:cTn id="14" dur="1" fill="hold">
+                                          <p:stCondLst>
+                                            <p:cond delay="0"/>
+                                          </p:stCondLst>
+                                        </p:cTn>
+                                        <p:tgtEl>
+                                          <p:spTgt spid="3">
+                                            <p:txEl>
+                                              <p:pRg st="3" end="3"/>
+                                            </p:txEl>
+                                          </p:spTgt>
+                                        </p:tgtEl>
+                                        <p:attrNameLst>
+                                          <p:attrName>style.visibility</p:attrName>
+                                        </p:attrNameLst>
+                                      </p:cBhvr>
+                                      <p:to>
+                                        <p:strVal val="visible"/>
+                                      </p:to>
+                                    </p:set>
+                                  </p:childTnLst>
+                                </p:cTn>
+                              </p:par>
+                              <p:par>
+                                <p:cTn id="15" presetID="1" presetClass="entr" presetSubtype="0" fill="hold" grpId="0" nodeType="withEffect">
+                                  <p:stCondLst>
+                                    <p:cond delay="0"/>
+                                  </p:stCondLst>
+                                  <p:childTnLst>
+                                    <p:set>
+                                      <p:cBhvr>
+                                        <p:cTn id="16" dur="1" fill="hold">
+                                          <p:stCondLst>
+                                            <p:cond delay="0"/>
+                                          </p:stCondLst>
+                                        </p:cTn>
+                                        <p:tgtEl>
+                                          <p:spTgt spid="3">
+                                            <p:txEl>
+                                              <p:pRg st="4" end="4"/>
+                                            </p:txEl>
+                                          </p:spTgt>
+                                        </p:tgtEl>
+                                        <p:attrNameLst>
+                                          <p:attrName>style.visibility</p:attrName>
+                                        </p:attrNameLst>
+                                      </p:cBhvr>
+                                      <p:to>
+                                        <p:strVal val="visible"/>
+                                      </p:to>
+                                    </p:set>
+                                  </p:childTnLst>
+                                </p:cTn>
+                              </p:par>
+                              <p:par>
+                                <p:cTn id="17" presetID="1" presetClass="entr" presetSubtype="0" fill="hold" grpId="0" nodeType="withEffect">
+                                  <p:stCondLst>
+                                    <p:cond delay="0"/>
+                                  </p:stCondLst>
+                                  <p:childTnLst>
+                                    <p:set>
+                                      <p:cBhvr>
+                                        <p:cTn id="18" dur="1" fill="hold">
+                                          <p:stCondLst>
+                                            <p:cond delay="0"/>
+                                          </p:stCondLst>
+                                        </p:cTn>
+                                        <p:tgtEl>
+                                          <p:spTgt spid="3">
+                                            <p:txEl>
+                                              <p:pRg st="5" end="5"/>
+                                            </p:txEl>
+                                          </p:spTgt>
+                                        </p:tgtEl>
+                                        <p:attrNameLst>
+                                          <p:attrName>style.visibility</p:attrName>
+                                        </p:attrNameLst>
+                                      </p:cBhvr>
+                                      <p:to>
+                                        <p:strVal val="visible"/>
+                                      </p:to>
+                                    </p:set>
+                                  </p:childTnLst>
+                                </p:cTn>
+                              </p:par>
+                              <p:par>
+                                <p:cTn id="19" presetID="1" presetClass="entr" presetSubtype="0" fill="hold" grpId="0" nodeType="withEffect">
+                                  <p:stCondLst>
+                                    <p:cond delay="0"/>
+                                  </p:stCondLst>
+                                  <p:childTnLst>
+                                    <p:set>
+                                      <p:cBhvr>
+                                        <p:cTn id="20" dur="1" fill="hold">
+                                          <p:stCondLst>
+                                            <p:cond delay="0"/>
+                                          </p:stCondLst>
+                                        </p:cTn>
+                                        <p:tgtEl>
+                                          <p:spTgt spid="3">
+                                            <p:txEl>
+                                              <p:pRg st="6" end="6"/>
+                                            </p:txEl>
+                                          </p:spTgt>
+                                        </p:tgtEl>
+                                        <p:attrNameLst>
+                                          <p:attrName>style.visibility</p:attrName>
+                                        </p:attrNameLst>
+                                      </p:cBhvr>
+                                      <p:to>
+                                        <p:strVal val="visible"/>
+                                      </p:to>
+                                    </p:set>
+                                  </p:childTnLst>
+                                </p:cTn>
+                              </p:par>
+                            </p:childTnLst>
+                          </p:cTn>
+                        </p:par>
+                      </p:childTnLst>
+                    </p:cTn>
+                  </p:par>
+                </p:childTnLst>
+              </p:cTn>
+              <p:prevCondLst>
+                <p:cond evt="onPrev" delay="0">
+                  <p:tgtEl>
+                    <p:sldTgt/>
+                  </p:tgtEl>
+                </p:cond>
+              </p:prevCondLst>
+              <p:nextCondLst>
+                <p:cond evt="onNext" delay="0">
+                  <p:tgtEl>
+                    <p:sldTgt/>
+                  </p:tgtEl>
+                </p:cond>
+              </p:nextCondLst>
+            </p:seq>
+          </p:childTnLst>
+        </p:cTn>
+      </p:par>
+    </p:tnLst>
+    <p:bldLst>
+      <p:bldP spid="3" grpId="0" build="p"/>
+    </p:bldLst>
+  </p:timing>
 </p:sld>
 </file>
 
-<file path=ppt/slides/slide19.xml><?xml version="1.0" encoding="utf-8"?>
+<file path=ppt/slides/slide21.xml><?xml version="1.0" encoding="utf-8"?>
 <p:sld xmlns:a="http://schemas.openxmlformats.org/drawingml/2006/main" xmlns:r="http://schemas.openxmlformats.org/officeDocument/2006/relationships" xmlns:p="http://schemas.openxmlformats.org/presentationml/2006/main">
   <p:cSld>
     <p:spTree>
@@ -12364,273 +15531,7 @@
 </p:sld>
 </file>
 
-<file path=ppt/slides/slide2.xml><?xml version="1.0" encoding="utf-8"?>
-<p:sld xmlns:a="http://schemas.openxmlformats.org/drawingml/2006/main" xmlns:r="http://schemas.openxmlformats.org/officeDocument/2006/relationships" xmlns:p="http://schemas.openxmlformats.org/presentationml/2006/main">
-  <p:cSld>
-    <p:spTree>
-      <p:nvGrpSpPr>
-        <p:cNvPr id="1" name=""/>
-        <p:cNvGrpSpPr/>
-        <p:nvPr/>
-      </p:nvGrpSpPr>
-      <p:grpSpPr>
-        <a:xfrm>
-          <a:off x="0" y="0"/>
-          <a:ext cx="0" cy="0"/>
-          <a:chOff x="0" y="0"/>
-          <a:chExt cx="0" cy="0"/>
-        </a:xfrm>
-      </p:grpSpPr>
-      <p:sp>
-        <p:nvSpPr>
-          <p:cNvPr id="2" name="Title 1">
-            <a:extLst>
-              <a:ext uri="{FF2B5EF4-FFF2-40B4-BE49-F238E27FC236}">
-                <a16:creationId xmlns:a16="http://schemas.microsoft.com/office/drawing/2014/main" id="{B9892A2B-5817-51A8-D2A2-29D0DEAEF021}"/>
-              </a:ext>
-            </a:extLst>
-          </p:cNvPr>
-          <p:cNvSpPr>
-            <a:spLocks noGrp="1"/>
-          </p:cNvSpPr>
-          <p:nvPr>
-            <p:ph type="title"/>
-          </p:nvPr>
-        </p:nvSpPr>
-        <p:spPr/>
-        <p:txBody>
-          <a:bodyPr>
-            <a:normAutofit/>
-          </a:bodyPr>
-          <a:lstStyle/>
-          <a:p>
-            <a:r>
-              <a:rPr lang="en-GB" dirty="0"/>
-              <a:t>Overview</a:t>
-            </a:r>
-            <a:endParaRPr lang="en-US" dirty="0"/>
-          </a:p>
-        </p:txBody>
-      </p:sp>
-      <p:sp>
-        <p:nvSpPr>
-          <p:cNvPr id="3" name="Content Placeholder 2">
-            <a:extLst>
-              <a:ext uri="{FF2B5EF4-FFF2-40B4-BE49-F238E27FC236}">
-                <a16:creationId xmlns:a16="http://schemas.microsoft.com/office/drawing/2014/main" id="{01A1AA7A-7F93-5D7D-958E-1D9C62FF0B50}"/>
-              </a:ext>
-            </a:extLst>
-          </p:cNvPr>
-          <p:cNvSpPr>
-            <a:spLocks noGrp="1"/>
-          </p:cNvSpPr>
-          <p:nvPr>
-            <p:ph idx="1"/>
-          </p:nvPr>
-        </p:nvSpPr>
-        <p:spPr/>
-        <p:txBody>
-          <a:bodyPr>
-            <a:normAutofit/>
-          </a:bodyPr>
-          <a:lstStyle/>
-          <a:p>
-            <a:pPr lvl="0"/>
-            <a:r>
-              <a:rPr lang="en-GB" dirty="0"/>
-              <a:t>Objective: Understand how each domain transforms raw data into competitive advantages and changes real-world sports decisions.</a:t>
-            </a:r>
-          </a:p>
-        </p:txBody>
-      </p:sp>
-      <p:graphicFrame>
-        <p:nvGraphicFramePr>
-          <p:cNvPr id="4" name="Content Placeholder 2">
-            <a:extLst>
-              <a:ext uri="{FF2B5EF4-FFF2-40B4-BE49-F238E27FC236}">
-                <a16:creationId xmlns:a16="http://schemas.microsoft.com/office/drawing/2014/main" id="{81DA72B8-9C87-E1AF-B98A-35BB87112E7F}"/>
-              </a:ext>
-            </a:extLst>
-          </p:cNvPr>
-          <p:cNvGraphicFramePr>
-            <a:graphicFrameLocks/>
-          </p:cNvGraphicFramePr>
-          <p:nvPr>
-            <p:extLst>
-              <p:ext uri="{D42A27DB-BD31-4B8C-83A1-F6EECF244321}">
-                <p14:modId xmlns:p14="http://schemas.microsoft.com/office/powerpoint/2010/main" val="1504352316"/>
-              </p:ext>
-            </p:extLst>
-          </p:nvPr>
-        </p:nvGraphicFramePr>
-        <p:xfrm>
-          <a:off x="838200" y="2921675"/>
-          <a:ext cx="10927829" cy="3255288"/>
-        </p:xfrm>
-        <a:graphic>
-          <a:graphicData uri="http://schemas.openxmlformats.org/drawingml/2006/diagram">
-            <dgm:relIds xmlns:dgm="http://schemas.openxmlformats.org/drawingml/2006/diagram" xmlns:r="http://schemas.openxmlformats.org/officeDocument/2006/relationships" r:dm="rId2" r:lo="rId3" r:qs="rId4" r:cs="rId5"/>
-          </a:graphicData>
-        </a:graphic>
-      </p:graphicFrame>
-    </p:spTree>
-    <p:extLst>
-      <p:ext uri="{BB962C8B-B14F-4D97-AF65-F5344CB8AC3E}">
-        <p14:creationId xmlns:p14="http://schemas.microsoft.com/office/powerpoint/2010/main" val="755555282"/>
-      </p:ext>
-    </p:extLst>
-  </p:cSld>
-  <p:clrMapOvr>
-    <a:masterClrMapping/>
-  </p:clrMapOvr>
-</p:sld>
-</file>
-
-<file path=ppt/slides/slide20.xml><?xml version="1.0" encoding="utf-8"?>
-<p:sld xmlns:a="http://schemas.openxmlformats.org/drawingml/2006/main" xmlns:r="http://schemas.openxmlformats.org/officeDocument/2006/relationships" xmlns:p="http://schemas.openxmlformats.org/presentationml/2006/main">
-  <p:cSld>
-    <p:spTree>
-      <p:nvGrpSpPr>
-        <p:cNvPr id="1" name="">
-          <a:extLst>
-            <a:ext uri="{FF2B5EF4-FFF2-40B4-BE49-F238E27FC236}">
-              <a16:creationId xmlns:a16="http://schemas.microsoft.com/office/drawing/2014/main" id="{339BC448-0E80-7EFF-4754-8229B404CAC0}"/>
-            </a:ext>
-          </a:extLst>
-        </p:cNvPr>
-        <p:cNvGrpSpPr/>
-        <p:nvPr/>
-      </p:nvGrpSpPr>
-      <p:grpSpPr>
-        <a:xfrm>
-          <a:off x="0" y="0"/>
-          <a:ext cx="0" cy="0"/>
-          <a:chOff x="0" y="0"/>
-          <a:chExt cx="0" cy="0"/>
-        </a:xfrm>
-      </p:grpSpPr>
-      <p:sp>
-        <p:nvSpPr>
-          <p:cNvPr id="2" name="Title 1">
-            <a:extLst>
-              <a:ext uri="{FF2B5EF4-FFF2-40B4-BE49-F238E27FC236}">
-                <a16:creationId xmlns:a16="http://schemas.microsoft.com/office/drawing/2014/main" id="{3B416AE1-4E7C-4C41-76FF-F2538718C69D}"/>
-              </a:ext>
-            </a:extLst>
-          </p:cNvPr>
-          <p:cNvSpPr>
-            <a:spLocks noGrp="1"/>
-          </p:cNvSpPr>
-          <p:nvPr>
-            <p:ph type="title"/>
-          </p:nvPr>
-        </p:nvSpPr>
-        <p:spPr/>
-        <p:txBody>
-          <a:bodyPr>
-            <a:normAutofit fontScale="90000"/>
-          </a:bodyPr>
-          <a:lstStyle/>
-          <a:p>
-            <a:r>
-              <a:rPr lang="en-GB" dirty="0"/>
-              <a:t>More Advanced Does Not Mean More Valuable</a:t>
-            </a:r>
-            <a:endParaRPr lang="en-US" dirty="0"/>
-          </a:p>
-        </p:txBody>
-      </p:sp>
-      <p:sp>
-        <p:nvSpPr>
-          <p:cNvPr id="3" name="Content Placeholder 2">
-            <a:extLst>
-              <a:ext uri="{FF2B5EF4-FFF2-40B4-BE49-F238E27FC236}">
-                <a16:creationId xmlns:a16="http://schemas.microsoft.com/office/drawing/2014/main" id="{7FFAA4CE-A3EC-AB3B-0675-93654EC1B928}"/>
-              </a:ext>
-            </a:extLst>
-          </p:cNvPr>
-          <p:cNvSpPr>
-            <a:spLocks noGrp="1"/>
-          </p:cNvSpPr>
-          <p:nvPr>
-            <p:ph idx="1"/>
-          </p:nvPr>
-        </p:nvSpPr>
-        <p:spPr/>
-        <p:txBody>
-          <a:bodyPr>
-            <a:normAutofit lnSpcReduction="10000"/>
-          </a:bodyPr>
-          <a:lstStyle/>
-          <a:p>
-            <a:r>
-              <a:rPr lang="en-GB" dirty="0"/>
-              <a:t>Much of the daily work in sports analytics is descriptive and diagnostic:</a:t>
-            </a:r>
-          </a:p>
-          <a:p>
-            <a:pPr lvl="1"/>
-            <a:r>
-              <a:rPr lang="en-GB" dirty="0"/>
-              <a:t>Collecting, cleaning, and organizing data</a:t>
-            </a:r>
-          </a:p>
-          <a:p>
-            <a:pPr lvl="1"/>
-            <a:r>
-              <a:rPr lang="en-GB" dirty="0"/>
-              <a:t>Defining metrics consistently</a:t>
-            </a:r>
-          </a:p>
-          <a:p>
-            <a:pPr lvl="1"/>
-            <a:r>
-              <a:rPr lang="en-GB" dirty="0"/>
-              <a:t>Monitoring recent performance and workload</a:t>
-            </a:r>
-          </a:p>
-          <a:p>
-            <a:pPr lvl="1"/>
-            <a:r>
-              <a:rPr lang="en-GB" dirty="0"/>
-              <a:t>Identifying meaningful changes or patterns</a:t>
-            </a:r>
-          </a:p>
-          <a:p>
-            <a:pPr lvl="1"/>
-            <a:r>
-              <a:rPr lang="en-GB" dirty="0"/>
-              <a:t>Communicating findings to coaches, athletes, and decision-makers</a:t>
-            </a:r>
-          </a:p>
-          <a:p>
-            <a:r>
-              <a:rPr lang="en-GB" dirty="0"/>
-              <a:t>Predictive models can be valuable, but only when they address a real decision and are supported by reliable foundational work.</a:t>
-            </a:r>
-          </a:p>
-          <a:p>
-            <a:r>
-              <a:rPr lang="en-GB" dirty="0"/>
-              <a:t>The best analysis is not necessarily the most complicated analysis. It is the analysis that helps someone make a better decision.</a:t>
-            </a:r>
-          </a:p>
-        </p:txBody>
-      </p:sp>
-    </p:spTree>
-    <p:extLst>
-      <p:ext uri="{BB962C8B-B14F-4D97-AF65-F5344CB8AC3E}">
-        <p14:creationId xmlns:p14="http://schemas.microsoft.com/office/powerpoint/2010/main" val="2329336833"/>
-      </p:ext>
-    </p:extLst>
-  </p:cSld>
-  <p:clrMapOvr>
-    <a:masterClrMapping/>
-  </p:clrMapOvr>
-</p:sld>
-</file>
-
-<file path=ppt/slides/slide21.xml><?xml version="1.0" encoding="utf-8"?>
+<file path=ppt/slides/slide22.xml><?xml version="1.0" encoding="utf-8"?>
 <p:sld xmlns:a="http://schemas.openxmlformats.org/drawingml/2006/main" xmlns:r="http://schemas.openxmlformats.org/officeDocument/2006/relationships" xmlns:p="http://schemas.openxmlformats.org/presentationml/2006/main">
   <p:cSld>
     <p:spTree>
@@ -12697,7 +15598,11 @@
           <a:bodyPr/>
           <a:lstStyle/>
           <a:p>
-            <a:endParaRPr lang="en-US"/>
+            <a:r>
+              <a:rPr lang="en-GB" dirty="0"/>
+              <a:t>Description can support diagnosis, diagnosis can inform prediction, and all three can contribute to a recommendation.</a:t>
+            </a:r>
+            <a:endParaRPr lang="en-US" dirty="0"/>
           </a:p>
         </p:txBody>
       </p:sp>
@@ -13048,7 +15953,7 @@
 </p:sld>
 </file>
 
-<file path=ppt/slides/slide22.xml><?xml version="1.0" encoding="utf-8"?>
+<file path=ppt/slides/slide23.xml><?xml version="1.0" encoding="utf-8"?>
 <p:sld xmlns:a="http://schemas.openxmlformats.org/drawingml/2006/main" xmlns:r="http://schemas.openxmlformats.org/officeDocument/2006/relationships" xmlns:p="http://schemas.openxmlformats.org/presentationml/2006/main">
   <p:cSld>
     <p:spTree>
@@ -13094,33 +15999,8 @@
           <a:p>
             <a:r>
               <a:rPr lang="en-GB" dirty="0"/>
-              <a:t>Analytics Is a Connected Process</a:t>
-            </a:r>
-            <a:endParaRPr lang="en-US" dirty="0"/>
-          </a:p>
-        </p:txBody>
-      </p:sp>
-      <p:sp>
-        <p:nvSpPr>
-          <p:cNvPr id="3" name="Content Placeholder 2">
-            <a:extLst>
-              <a:ext uri="{FF2B5EF4-FFF2-40B4-BE49-F238E27FC236}">
-                <a16:creationId xmlns:a16="http://schemas.microsoft.com/office/drawing/2014/main" id="{1BC90F12-59E9-B91B-B183-BF4016A59BD7}"/>
-              </a:ext>
-            </a:extLst>
-          </p:cNvPr>
-          <p:cNvSpPr>
-            <a:spLocks noGrp="1"/>
-          </p:cNvSpPr>
-          <p:nvPr>
-            <p:ph idx="1"/>
-          </p:nvPr>
-        </p:nvSpPr>
-        <p:spPr/>
-        <p:txBody>
-          <a:bodyPr/>
-          <a:lstStyle/>
-          <a:p>
+              <a:t>Real Analytical Work Is Rarely Linear</a:t>
+            </a:r>
             <a:endParaRPr lang="en-US" dirty="0"/>
           </a:p>
         </p:txBody>
@@ -13187,8 +16067,8 @@
           <p:nvPr/>
         </p:nvSpPr>
         <p:spPr>
-          <a:xfrm rot="3743277">
-            <a:off x="8881700" y="3260213"/>
+          <a:xfrm rot="2872106">
+            <a:off x="9067303" y="3260213"/>
             <a:ext cx="558141" cy="484632"/>
           </a:xfrm>
           <a:prstGeom prst="rightArrow">
@@ -13234,7 +16114,7 @@
         </p:nvSpPr>
         <p:spPr>
           <a:xfrm>
-            <a:off x="3488377" y="3925817"/>
+            <a:off x="2858985" y="2149558"/>
             <a:ext cx="1840675" cy="914400"/>
           </a:xfrm>
           <a:prstGeom prst="roundRect">
@@ -13271,52 +16151,6 @@
       </p:sp>
       <p:sp>
         <p:nvSpPr>
-          <p:cNvPr id="7" name="Right Arrow 6">
-            <a:extLst>
-              <a:ext uri="{FF2B5EF4-FFF2-40B4-BE49-F238E27FC236}">
-                <a16:creationId xmlns:a16="http://schemas.microsoft.com/office/drawing/2014/main" id="{90FB8E53-FB0C-259D-CD09-AFD9C3DD9245}"/>
-              </a:ext>
-            </a:extLst>
-          </p:cNvPr>
-          <p:cNvSpPr/>
-          <p:nvPr/>
-        </p:nvSpPr>
-        <p:spPr>
-          <a:xfrm>
-            <a:off x="5478483" y="4140701"/>
-            <a:ext cx="558141" cy="484632"/>
-          </a:xfrm>
-          <a:prstGeom prst="rightArrow">
-            <a:avLst/>
-          </a:prstGeom>
-        </p:spPr>
-        <p:style>
-          <a:lnRef idx="2">
-            <a:schemeClr val="accent1">
-              <a:shade val="15000"/>
-            </a:schemeClr>
-          </a:lnRef>
-          <a:fillRef idx="1">
-            <a:schemeClr val="accent1"/>
-          </a:fillRef>
-          <a:effectRef idx="0">
-            <a:schemeClr val="accent1"/>
-          </a:effectRef>
-          <a:fontRef idx="minor">
-            <a:schemeClr val="lt1"/>
-          </a:fontRef>
-        </p:style>
-        <p:txBody>
-          <a:bodyPr rtlCol="0" anchor="ctr"/>
-          <a:lstStyle/>
-          <a:p>
-            <a:pPr algn="ctr"/>
-            <a:endParaRPr lang="en-US"/>
-          </a:p>
-        </p:txBody>
-      </p:sp>
-      <p:sp>
-        <p:nvSpPr>
           <p:cNvPr id="8" name="Rounded Rectangle 7">
             <a:extLst>
               <a:ext uri="{FF2B5EF4-FFF2-40B4-BE49-F238E27FC236}">
@@ -13329,7 +16163,7 @@
         </p:nvSpPr>
         <p:spPr>
           <a:xfrm>
-            <a:off x="6186055" y="3928097"/>
+            <a:off x="5286895" y="3925817"/>
             <a:ext cx="1840675" cy="914400"/>
           </a:xfrm>
           <a:prstGeom prst="roundRect">
@@ -13473,7 +16307,7 @@
         </p:nvSpPr>
         <p:spPr>
           <a:xfrm>
-            <a:off x="1467592" y="4240264"/>
+            <a:off x="838200" y="2464005"/>
             <a:ext cx="1163782" cy="410595"/>
           </a:xfrm>
           <a:prstGeom prst="flowChartMagneticDisk">
@@ -13522,7 +16356,7 @@
         </p:nvSpPr>
         <p:spPr>
           <a:xfrm>
-            <a:off x="2780805" y="4202358"/>
+            <a:off x="2151413" y="2426099"/>
             <a:ext cx="558141" cy="484632"/>
           </a:xfrm>
           <a:prstGeom prst="rightArrow">
@@ -13762,6 +16596,239 @@
           </a:p>
         </p:txBody>
       </p:sp>
+      <p:sp>
+        <p:nvSpPr>
+          <p:cNvPr id="6" name="Right Arrow 10">
+            <a:extLst>
+              <a:ext uri="{FF2B5EF4-FFF2-40B4-BE49-F238E27FC236}">
+                <a16:creationId xmlns:a16="http://schemas.microsoft.com/office/drawing/2014/main" id="{F8D00B4E-5019-385A-00F9-88EF7EA66798}"/>
+              </a:ext>
+            </a:extLst>
+          </p:cNvPr>
+          <p:cNvSpPr/>
+          <p:nvPr/>
+        </p:nvSpPr>
+        <p:spPr>
+          <a:xfrm rot="2872106">
+            <a:off x="4685346" y="3260212"/>
+            <a:ext cx="558141" cy="484632"/>
+          </a:xfrm>
+          <a:prstGeom prst="rightArrow">
+            <a:avLst/>
+          </a:prstGeom>
+        </p:spPr>
+        <p:style>
+          <a:lnRef idx="2">
+            <a:schemeClr val="accent1">
+              <a:shade val="15000"/>
+            </a:schemeClr>
+          </a:lnRef>
+          <a:fillRef idx="1">
+            <a:schemeClr val="accent1"/>
+          </a:fillRef>
+          <a:effectRef idx="0">
+            <a:schemeClr val="accent1"/>
+          </a:effectRef>
+          <a:fontRef idx="minor">
+            <a:schemeClr val="lt1"/>
+          </a:fontRef>
+        </p:style>
+        <p:txBody>
+          <a:bodyPr rtlCol="0" anchor="ctr"/>
+          <a:lstStyle/>
+          <a:p>
+            <a:pPr algn="ctr"/>
+            <a:endParaRPr lang="en-US"/>
+          </a:p>
+        </p:txBody>
+      </p:sp>
+      <p:sp>
+        <p:nvSpPr>
+          <p:cNvPr id="14" name="Magnetic Disk 14">
+            <a:extLst>
+              <a:ext uri="{FF2B5EF4-FFF2-40B4-BE49-F238E27FC236}">
+                <a16:creationId xmlns:a16="http://schemas.microsoft.com/office/drawing/2014/main" id="{3A81D705-48DD-03D2-FA63-8DA562319BB9}"/>
+              </a:ext>
+            </a:extLst>
+          </p:cNvPr>
+          <p:cNvSpPr/>
+          <p:nvPr/>
+        </p:nvSpPr>
+        <p:spPr>
+          <a:xfrm>
+            <a:off x="3157525" y="4276163"/>
+            <a:ext cx="1163782" cy="410595"/>
+          </a:xfrm>
+          <a:prstGeom prst="flowChartMagneticDisk">
+            <a:avLst/>
+          </a:prstGeom>
+        </p:spPr>
+        <p:style>
+          <a:lnRef idx="2">
+            <a:schemeClr val="accent1">
+              <a:shade val="15000"/>
+            </a:schemeClr>
+          </a:lnRef>
+          <a:fillRef idx="1">
+            <a:schemeClr val="accent1"/>
+          </a:fillRef>
+          <a:effectRef idx="0">
+            <a:schemeClr val="accent1"/>
+          </a:effectRef>
+          <a:fontRef idx="minor">
+            <a:schemeClr val="lt1"/>
+          </a:fontRef>
+        </p:style>
+        <p:txBody>
+          <a:bodyPr rtlCol="0" anchor="ctr"/>
+          <a:lstStyle/>
+          <a:p>
+            <a:pPr algn="ctr"/>
+            <a:r>
+              <a:rPr lang="en-US" dirty="0"/>
+              <a:t>Data</a:t>
+            </a:r>
+          </a:p>
+        </p:txBody>
+      </p:sp>
+      <p:sp>
+        <p:nvSpPr>
+          <p:cNvPr id="17" name="Right Arrow 17">
+            <a:extLst>
+              <a:ext uri="{FF2B5EF4-FFF2-40B4-BE49-F238E27FC236}">
+                <a16:creationId xmlns:a16="http://schemas.microsoft.com/office/drawing/2014/main" id="{EE119E15-F600-9DEE-D5F2-4173C101A4D3}"/>
+              </a:ext>
+            </a:extLst>
+          </p:cNvPr>
+          <p:cNvSpPr/>
+          <p:nvPr/>
+        </p:nvSpPr>
+        <p:spPr>
+          <a:xfrm>
+            <a:off x="4469774" y="4114267"/>
+            <a:ext cx="558141" cy="484632"/>
+          </a:xfrm>
+          <a:prstGeom prst="rightArrow">
+            <a:avLst/>
+          </a:prstGeom>
+        </p:spPr>
+        <p:style>
+          <a:lnRef idx="2">
+            <a:schemeClr val="accent1">
+              <a:shade val="15000"/>
+            </a:schemeClr>
+          </a:lnRef>
+          <a:fillRef idx="1">
+            <a:schemeClr val="accent1"/>
+          </a:fillRef>
+          <a:effectRef idx="0">
+            <a:schemeClr val="accent1"/>
+          </a:effectRef>
+          <a:fontRef idx="minor">
+            <a:schemeClr val="lt1"/>
+          </a:fontRef>
+        </p:style>
+        <p:txBody>
+          <a:bodyPr rtlCol="0" anchor="ctr"/>
+          <a:lstStyle/>
+          <a:p>
+            <a:pPr algn="ctr"/>
+            <a:endParaRPr lang="en-US"/>
+          </a:p>
+        </p:txBody>
+      </p:sp>
+      <p:sp>
+        <p:nvSpPr>
+          <p:cNvPr id="25" name="Magnetic Disk 14">
+            <a:extLst>
+              <a:ext uri="{FF2B5EF4-FFF2-40B4-BE49-F238E27FC236}">
+                <a16:creationId xmlns:a16="http://schemas.microsoft.com/office/drawing/2014/main" id="{706D57CE-82CD-A455-7EC6-295C78BB5D64}"/>
+              </a:ext>
+            </a:extLst>
+          </p:cNvPr>
+          <p:cNvSpPr/>
+          <p:nvPr/>
+        </p:nvSpPr>
+        <p:spPr>
+          <a:xfrm>
+            <a:off x="3162226" y="3933228"/>
+            <a:ext cx="1163782" cy="410595"/>
+          </a:xfrm>
+          <a:prstGeom prst="flowChartMagneticDisk">
+            <a:avLst/>
+          </a:prstGeom>
+        </p:spPr>
+        <p:style>
+          <a:lnRef idx="2">
+            <a:schemeClr val="accent1">
+              <a:shade val="15000"/>
+            </a:schemeClr>
+          </a:lnRef>
+          <a:fillRef idx="1">
+            <a:schemeClr val="accent1"/>
+          </a:fillRef>
+          <a:effectRef idx="0">
+            <a:schemeClr val="accent1"/>
+          </a:effectRef>
+          <a:fontRef idx="minor">
+            <a:schemeClr val="lt1"/>
+          </a:fontRef>
+        </p:style>
+        <p:txBody>
+          <a:bodyPr rtlCol="0" anchor="ctr"/>
+          <a:lstStyle/>
+          <a:p>
+            <a:pPr algn="ctr"/>
+            <a:endParaRPr lang="en-US" dirty="0"/>
+          </a:p>
+        </p:txBody>
+      </p:sp>
+      <p:sp>
+        <p:nvSpPr>
+          <p:cNvPr id="29" name="Right Arrow 22">
+            <a:extLst>
+              <a:ext uri="{FF2B5EF4-FFF2-40B4-BE49-F238E27FC236}">
+                <a16:creationId xmlns:a16="http://schemas.microsoft.com/office/drawing/2014/main" id="{D840C640-27D1-B0ED-939B-B21E542B9A51}"/>
+              </a:ext>
+            </a:extLst>
+          </p:cNvPr>
+          <p:cNvSpPr/>
+          <p:nvPr/>
+        </p:nvSpPr>
+        <p:spPr>
+          <a:xfrm>
+            <a:off x="7726581" y="4174201"/>
+            <a:ext cx="558141" cy="484632"/>
+          </a:xfrm>
+          <a:prstGeom prst="rightArrow">
+            <a:avLst/>
+          </a:prstGeom>
+        </p:spPr>
+        <p:style>
+          <a:lnRef idx="2">
+            <a:schemeClr val="accent1">
+              <a:shade val="15000"/>
+            </a:schemeClr>
+          </a:lnRef>
+          <a:fillRef idx="1">
+            <a:schemeClr val="accent1"/>
+          </a:fillRef>
+          <a:effectRef idx="0">
+            <a:schemeClr val="accent1"/>
+          </a:effectRef>
+          <a:fontRef idx="minor">
+            <a:schemeClr val="lt1"/>
+          </a:fontRef>
+        </p:style>
+        <p:txBody>
+          <a:bodyPr rtlCol="0" anchor="ctr"/>
+          <a:lstStyle/>
+          <a:p>
+            <a:pPr algn="ctr"/>
+            <a:endParaRPr lang="en-US"/>
+          </a:p>
+        </p:txBody>
+      </p:sp>
     </p:spTree>
     <p:extLst>
       <p:ext uri="{BB962C8B-B14F-4D97-AF65-F5344CB8AC3E}">
@@ -13775,7 +16842,400 @@
 </p:sld>
 </file>
 
-<file path=ppt/slides/slide23.xml><?xml version="1.0" encoding="utf-8"?>
+<file path=ppt/slides/slide24.xml><?xml version="1.0" encoding="utf-8"?>
+<p:sld xmlns:a="http://schemas.openxmlformats.org/drawingml/2006/main" xmlns:r="http://schemas.openxmlformats.org/officeDocument/2006/relationships" xmlns:p="http://schemas.openxmlformats.org/presentationml/2006/main">
+  <p:cSld>
+    <p:spTree>
+      <p:nvGrpSpPr>
+        <p:cNvPr id="1" name="">
+          <a:extLst>
+            <a:ext uri="{FF2B5EF4-FFF2-40B4-BE49-F238E27FC236}">
+              <a16:creationId xmlns:a16="http://schemas.microsoft.com/office/drawing/2014/main" id="{339BC448-0E80-7EFF-4754-8229B404CAC0}"/>
+            </a:ext>
+          </a:extLst>
+        </p:cNvPr>
+        <p:cNvGrpSpPr/>
+        <p:nvPr/>
+      </p:nvGrpSpPr>
+      <p:grpSpPr>
+        <a:xfrm>
+          <a:off x="0" y="0"/>
+          <a:ext cx="0" cy="0"/>
+          <a:chOff x="0" y="0"/>
+          <a:chExt cx="0" cy="0"/>
+        </a:xfrm>
+      </p:grpSpPr>
+      <p:sp>
+        <p:nvSpPr>
+          <p:cNvPr id="2" name="Title 1">
+            <a:extLst>
+              <a:ext uri="{FF2B5EF4-FFF2-40B4-BE49-F238E27FC236}">
+                <a16:creationId xmlns:a16="http://schemas.microsoft.com/office/drawing/2014/main" id="{3B416AE1-4E7C-4C41-76FF-F2538718C69D}"/>
+              </a:ext>
+            </a:extLst>
+          </p:cNvPr>
+          <p:cNvSpPr>
+            <a:spLocks noGrp="1"/>
+          </p:cNvSpPr>
+          <p:nvPr>
+            <p:ph type="title"/>
+          </p:nvPr>
+        </p:nvSpPr>
+        <p:spPr/>
+        <p:txBody>
+          <a:bodyPr>
+            <a:normAutofit/>
+          </a:bodyPr>
+          <a:lstStyle/>
+          <a:p>
+            <a:r>
+              <a:rPr lang="en-GB" dirty="0"/>
+              <a:t>More Complex ≠ More Valuable</a:t>
+            </a:r>
+            <a:endParaRPr lang="en-US" dirty="0"/>
+          </a:p>
+        </p:txBody>
+      </p:sp>
+      <p:sp>
+        <p:nvSpPr>
+          <p:cNvPr id="3" name="Content Placeholder 2">
+            <a:extLst>
+              <a:ext uri="{FF2B5EF4-FFF2-40B4-BE49-F238E27FC236}">
+                <a16:creationId xmlns:a16="http://schemas.microsoft.com/office/drawing/2014/main" id="{7FFAA4CE-A3EC-AB3B-0675-93654EC1B928}"/>
+              </a:ext>
+            </a:extLst>
+          </p:cNvPr>
+          <p:cNvSpPr>
+            <a:spLocks noGrp="1"/>
+          </p:cNvSpPr>
+          <p:nvPr>
+            <p:ph idx="1"/>
+          </p:nvPr>
+        </p:nvSpPr>
+        <p:spPr/>
+        <p:txBody>
+          <a:bodyPr>
+            <a:normAutofit/>
+          </a:bodyPr>
+          <a:lstStyle/>
+          <a:p>
+            <a:r>
+              <a:rPr lang="en-GB" dirty="0"/>
+              <a:t>Much of the daily work in sport analytics involves:</a:t>
+            </a:r>
+          </a:p>
+          <a:p>
+            <a:pPr lvl="1"/>
+            <a:r>
+              <a:rPr lang="en-GB" dirty="0"/>
+              <a:t>Collecting, cleaning, and organizing data </a:t>
+            </a:r>
+          </a:p>
+          <a:p>
+            <a:pPr lvl="1"/>
+            <a:r>
+              <a:rPr lang="en-GB" dirty="0"/>
+              <a:t>Defining metrics consistently </a:t>
+            </a:r>
+          </a:p>
+          <a:p>
+            <a:pPr lvl="1"/>
+            <a:r>
+              <a:rPr lang="en-GB" dirty="0"/>
+              <a:t>Identifying meaningful changes and patterns </a:t>
+            </a:r>
+          </a:p>
+          <a:p>
+            <a:pPr lvl="1"/>
+            <a:r>
+              <a:rPr lang="en-GB" dirty="0"/>
+              <a:t>Communicating findings to decision-makers </a:t>
+            </a:r>
+          </a:p>
+          <a:p>
+            <a:pPr lvl="1"/>
+            <a:endParaRPr lang="en-GB" dirty="0"/>
+          </a:p>
+          <a:p>
+            <a:pPr marL="0" indent="0">
+              <a:buNone/>
+            </a:pPr>
+            <a:r>
+              <a:rPr lang="en-GB" dirty="0"/>
+              <a:t>Predictive models can be valuable, but only when they address a real decision and are supported by reliable foundational work.</a:t>
+            </a:r>
+          </a:p>
+        </p:txBody>
+      </p:sp>
+    </p:spTree>
+    <p:extLst>
+      <p:ext uri="{BB962C8B-B14F-4D97-AF65-F5344CB8AC3E}">
+        <p14:creationId xmlns:p14="http://schemas.microsoft.com/office/powerpoint/2010/main" val="2329336833"/>
+      </p:ext>
+    </p:extLst>
+  </p:cSld>
+  <p:clrMapOvr>
+    <a:masterClrMapping/>
+  </p:clrMapOvr>
+  <p:timing>
+    <p:tnLst>
+      <p:par>
+        <p:cTn id="1" dur="indefinite" restart="never" nodeType="tmRoot">
+          <p:childTnLst>
+            <p:seq concurrent="1" nextAc="seek">
+              <p:cTn id="2" dur="indefinite" nodeType="mainSeq">
+                <p:childTnLst>
+                  <p:par>
+                    <p:cTn id="3" fill="hold">
+                      <p:stCondLst>
+                        <p:cond delay="indefinite"/>
+                      </p:stCondLst>
+                      <p:childTnLst>
+                        <p:par>
+                          <p:cTn id="4" fill="hold">
+                            <p:stCondLst>
+                              <p:cond delay="0"/>
+                            </p:stCondLst>
+                            <p:childTnLst>
+                              <p:par>
+                                <p:cTn id="5" presetID="1" presetClass="entr" presetSubtype="0" fill="hold" grpId="0" nodeType="clickEffect">
+                                  <p:stCondLst>
+                                    <p:cond delay="0"/>
+                                  </p:stCondLst>
+                                  <p:childTnLst>
+                                    <p:set>
+                                      <p:cBhvr>
+                                        <p:cTn id="6" dur="1" fill="hold">
+                                          <p:stCondLst>
+                                            <p:cond delay="0"/>
+                                          </p:stCondLst>
+                                        </p:cTn>
+                                        <p:tgtEl>
+                                          <p:spTgt spid="3">
+                                            <p:txEl>
+                                              <p:pRg st="0" end="0"/>
+                                            </p:txEl>
+                                          </p:spTgt>
+                                        </p:tgtEl>
+                                        <p:attrNameLst>
+                                          <p:attrName>style.visibility</p:attrName>
+                                        </p:attrNameLst>
+                                      </p:cBhvr>
+                                      <p:to>
+                                        <p:strVal val="visible"/>
+                                      </p:to>
+                                    </p:set>
+                                  </p:childTnLst>
+                                </p:cTn>
+                              </p:par>
+                              <p:par>
+                                <p:cTn id="7" presetID="1" presetClass="entr" presetSubtype="0" fill="hold" grpId="0" nodeType="withEffect">
+                                  <p:stCondLst>
+                                    <p:cond delay="0"/>
+                                  </p:stCondLst>
+                                  <p:childTnLst>
+                                    <p:set>
+                                      <p:cBhvr>
+                                        <p:cTn id="8" dur="1" fill="hold">
+                                          <p:stCondLst>
+                                            <p:cond delay="0"/>
+                                          </p:stCondLst>
+                                        </p:cTn>
+                                        <p:tgtEl>
+                                          <p:spTgt spid="3">
+                                            <p:txEl>
+                                              <p:pRg st="1" end="1"/>
+                                            </p:txEl>
+                                          </p:spTgt>
+                                        </p:tgtEl>
+                                        <p:attrNameLst>
+                                          <p:attrName>style.visibility</p:attrName>
+                                        </p:attrNameLst>
+                                      </p:cBhvr>
+                                      <p:to>
+                                        <p:strVal val="visible"/>
+                                      </p:to>
+                                    </p:set>
+                                  </p:childTnLst>
+                                </p:cTn>
+                              </p:par>
+                              <p:par>
+                                <p:cTn id="9" presetID="1" presetClass="entr" presetSubtype="0" fill="hold" grpId="0" nodeType="withEffect">
+                                  <p:stCondLst>
+                                    <p:cond delay="0"/>
+                                  </p:stCondLst>
+                                  <p:childTnLst>
+                                    <p:set>
+                                      <p:cBhvr>
+                                        <p:cTn id="10" dur="1" fill="hold">
+                                          <p:stCondLst>
+                                            <p:cond delay="0"/>
+                                          </p:stCondLst>
+                                        </p:cTn>
+                                        <p:tgtEl>
+                                          <p:spTgt spid="3">
+                                            <p:txEl>
+                                              <p:pRg st="2" end="2"/>
+                                            </p:txEl>
+                                          </p:spTgt>
+                                        </p:tgtEl>
+                                        <p:attrNameLst>
+                                          <p:attrName>style.visibility</p:attrName>
+                                        </p:attrNameLst>
+                                      </p:cBhvr>
+                                      <p:to>
+                                        <p:strVal val="visible"/>
+                                      </p:to>
+                                    </p:set>
+                                  </p:childTnLst>
+                                </p:cTn>
+                              </p:par>
+                              <p:par>
+                                <p:cTn id="11" presetID="1" presetClass="entr" presetSubtype="0" fill="hold" grpId="0" nodeType="withEffect">
+                                  <p:stCondLst>
+                                    <p:cond delay="0"/>
+                                  </p:stCondLst>
+                                  <p:childTnLst>
+                                    <p:set>
+                                      <p:cBhvr>
+                                        <p:cTn id="12" dur="1" fill="hold">
+                                          <p:stCondLst>
+                                            <p:cond delay="0"/>
+                                          </p:stCondLst>
+                                        </p:cTn>
+                                        <p:tgtEl>
+                                          <p:spTgt spid="3">
+                                            <p:txEl>
+                                              <p:pRg st="3" end="3"/>
+                                            </p:txEl>
+                                          </p:spTgt>
+                                        </p:tgtEl>
+                                        <p:attrNameLst>
+                                          <p:attrName>style.visibility</p:attrName>
+                                        </p:attrNameLst>
+                                      </p:cBhvr>
+                                      <p:to>
+                                        <p:strVal val="visible"/>
+                                      </p:to>
+                                    </p:set>
+                                  </p:childTnLst>
+                                </p:cTn>
+                              </p:par>
+                              <p:par>
+                                <p:cTn id="13" presetID="1" presetClass="entr" presetSubtype="0" fill="hold" grpId="0" nodeType="withEffect">
+                                  <p:stCondLst>
+                                    <p:cond delay="0"/>
+                                  </p:stCondLst>
+                                  <p:childTnLst>
+                                    <p:set>
+                                      <p:cBhvr>
+                                        <p:cTn id="14" dur="1" fill="hold">
+                                          <p:stCondLst>
+                                            <p:cond delay="0"/>
+                                          </p:stCondLst>
+                                        </p:cTn>
+                                        <p:tgtEl>
+                                          <p:spTgt spid="3">
+                                            <p:txEl>
+                                              <p:pRg st="4" end="4"/>
+                                            </p:txEl>
+                                          </p:spTgt>
+                                        </p:tgtEl>
+                                        <p:attrNameLst>
+                                          <p:attrName>style.visibility</p:attrName>
+                                        </p:attrNameLst>
+                                      </p:cBhvr>
+                                      <p:to>
+                                        <p:strVal val="visible"/>
+                                      </p:to>
+                                    </p:set>
+                                  </p:childTnLst>
+                                </p:cTn>
+                              </p:par>
+                            </p:childTnLst>
+                          </p:cTn>
+                        </p:par>
+                      </p:childTnLst>
+                    </p:cTn>
+                  </p:par>
+                  <p:par>
+                    <p:cTn id="15" fill="hold">
+                      <p:stCondLst>
+                        <p:cond delay="indefinite"/>
+                      </p:stCondLst>
+                      <p:childTnLst>
+                        <p:par>
+                          <p:cTn id="16" fill="hold">
+                            <p:stCondLst>
+                              <p:cond delay="0"/>
+                            </p:stCondLst>
+                            <p:childTnLst>
+                              <p:par>
+                                <p:cTn id="17" presetID="1" presetClass="entr" presetSubtype="0" fill="hold" grpId="0" nodeType="clickEffect">
+                                  <p:stCondLst>
+                                    <p:cond delay="0"/>
+                                  </p:stCondLst>
+                                  <p:childTnLst>
+                                    <p:set>
+                                      <p:cBhvr>
+                                        <p:cTn id="18" dur="1" fill="hold">
+                                          <p:stCondLst>
+                                            <p:cond delay="0"/>
+                                          </p:stCondLst>
+                                        </p:cTn>
+                                        <p:tgtEl>
+                                          <p:spTgt spid="3">
+                                            <p:txEl>
+                                              <p:pRg st="6" end="6"/>
+                                            </p:txEl>
+                                          </p:spTgt>
+                                        </p:tgtEl>
+                                        <p:attrNameLst>
+                                          <p:attrName>style.visibility</p:attrName>
+                                        </p:attrNameLst>
+                                      </p:cBhvr>
+                                      <p:to>
+                                        <p:strVal val="visible"/>
+                                      </p:to>
+                                    </p:set>
+                                  </p:childTnLst>
+                                </p:cTn>
+                              </p:par>
+                            </p:childTnLst>
+                          </p:cTn>
+                        </p:par>
+                      </p:childTnLst>
+                    </p:cTn>
+                  </p:par>
+                </p:childTnLst>
+              </p:cTn>
+              <p:prevCondLst>
+                <p:cond evt="onPrev" delay="0">
+                  <p:tgtEl>
+                    <p:sldTgt/>
+                  </p:tgtEl>
+                </p:cond>
+              </p:prevCondLst>
+              <p:nextCondLst>
+                <p:cond evt="onNext" delay="0">
+                  <p:tgtEl>
+                    <p:sldTgt/>
+                  </p:tgtEl>
+                </p:cond>
+              </p:nextCondLst>
+            </p:seq>
+          </p:childTnLst>
+        </p:cTn>
+      </p:par>
+    </p:tnLst>
+    <p:bldLst>
+      <p:bldP spid="3" grpId="0" build="p"/>
+    </p:bldLst>
+  </p:timing>
+</p:sld>
+</file>
+
+<file path=ppt/slides/slide25.xml><?xml version="1.0" encoding="utf-8"?>
 <p:sld xmlns:a="http://schemas.openxmlformats.org/drawingml/2006/main" xmlns:r="http://schemas.openxmlformats.org/officeDocument/2006/relationships" xmlns:p="http://schemas.openxmlformats.org/presentationml/2006/main">
   <p:cSld>
     <p:spTree>
@@ -13844,28 +17304,17 @@
           <a:bodyPr/>
           <a:lstStyle/>
           <a:p>
-            <a:r>
-              <a:rPr lang="en-US" dirty="0"/>
-              <a:t>The three domains describe where sport analytics is applied.</a:t>
-            </a:r>
-          </a:p>
-          <a:p>
-            <a:r>
-              <a:rPr lang="en-US" dirty="0"/>
+            <a:pPr lvl="0"/>
+            <a:r>
+              <a:rPr lang="en-GB" dirty="0"/>
+              <a:t>The three domains describe where sport analytics is applied. </a:t>
+            </a:r>
+          </a:p>
+          <a:p>
+            <a:pPr lvl="0"/>
+            <a:r>
+              <a:rPr lang="en-GB" dirty="0"/>
               <a:t>Descriptive, diagnostic, predictive, and prescriptive questions describe what the analysis is intended to accomplish.</a:t>
-            </a:r>
-          </a:p>
-          <a:p>
-            <a:pPr lvl="1"/>
-            <a:r>
-              <a:rPr lang="en-US" dirty="0"/>
-              <a:t>These purposes are connected, but not every analysis requires all four.</a:t>
-            </a:r>
-          </a:p>
-          <a:p>
-            <a:r>
-              <a:rPr lang="en-US" dirty="0"/>
-              <a:t>The most valuable analysis is the one that provides credible evidence for a meaningful decision.</a:t>
             </a:r>
           </a:p>
           <a:p>
@@ -13879,7 +17328,7 @@
     </p:spTree>
     <p:extLst>
       <p:ext uri="{BB962C8B-B14F-4D97-AF65-F5344CB8AC3E}">
-        <p14:creationId xmlns:p14="http://schemas.microsoft.com/office/powerpoint/2010/main" val="2732086937"/>
+        <p14:creationId xmlns:p14="http://schemas.microsoft.com/office/powerpoint/2010/main" val="2206692154"/>
       </p:ext>
     </p:extLst>
   </p:cSld>
@@ -13890,6 +17339,128 @@
 </file>
 
 <file path=ppt/slides/slide3.xml><?xml version="1.0" encoding="utf-8"?>
+<p:sld xmlns:a="http://schemas.openxmlformats.org/drawingml/2006/main" xmlns:r="http://schemas.openxmlformats.org/officeDocument/2006/relationships" xmlns:p="http://schemas.openxmlformats.org/presentationml/2006/main">
+  <p:cSld>
+    <p:spTree>
+      <p:nvGrpSpPr>
+        <p:cNvPr id="1" name=""/>
+        <p:cNvGrpSpPr/>
+        <p:nvPr/>
+      </p:nvGrpSpPr>
+      <p:grpSpPr>
+        <a:xfrm>
+          <a:off x="0" y="0"/>
+          <a:ext cx="0" cy="0"/>
+          <a:chOff x="0" y="0"/>
+          <a:chExt cx="0" cy="0"/>
+        </a:xfrm>
+      </p:grpSpPr>
+      <p:sp>
+        <p:nvSpPr>
+          <p:cNvPr id="2" name="Title 1">
+            <a:extLst>
+              <a:ext uri="{FF2B5EF4-FFF2-40B4-BE49-F238E27FC236}">
+                <a16:creationId xmlns:a16="http://schemas.microsoft.com/office/drawing/2014/main" id="{B9892A2B-5817-51A8-D2A2-29D0DEAEF021}"/>
+              </a:ext>
+            </a:extLst>
+          </p:cNvPr>
+          <p:cNvSpPr>
+            <a:spLocks noGrp="1"/>
+          </p:cNvSpPr>
+          <p:nvPr>
+            <p:ph type="title"/>
+          </p:nvPr>
+        </p:nvSpPr>
+        <p:spPr/>
+        <p:txBody>
+          <a:bodyPr>
+            <a:normAutofit/>
+          </a:bodyPr>
+          <a:lstStyle/>
+          <a:p>
+            <a:r>
+              <a:rPr lang="en-GB" dirty="0"/>
+              <a:t>Overview</a:t>
+            </a:r>
+            <a:endParaRPr lang="en-US" dirty="0"/>
+          </a:p>
+        </p:txBody>
+      </p:sp>
+      <p:sp>
+        <p:nvSpPr>
+          <p:cNvPr id="3" name="Content Placeholder 2">
+            <a:extLst>
+              <a:ext uri="{FF2B5EF4-FFF2-40B4-BE49-F238E27FC236}">
+                <a16:creationId xmlns:a16="http://schemas.microsoft.com/office/drawing/2014/main" id="{01A1AA7A-7F93-5D7D-958E-1D9C62FF0B50}"/>
+              </a:ext>
+            </a:extLst>
+          </p:cNvPr>
+          <p:cNvSpPr>
+            <a:spLocks noGrp="1"/>
+          </p:cNvSpPr>
+          <p:nvPr>
+            <p:ph idx="1"/>
+          </p:nvPr>
+        </p:nvSpPr>
+        <p:spPr/>
+        <p:txBody>
+          <a:bodyPr>
+            <a:normAutofit/>
+          </a:bodyPr>
+          <a:lstStyle/>
+          <a:p>
+            <a:pPr lvl="0"/>
+            <a:r>
+              <a:rPr lang="en-GB" dirty="0"/>
+              <a:t>Understand where sport performance analytics is applied and how each domain supports real-world decisions.</a:t>
+            </a:r>
+          </a:p>
+        </p:txBody>
+      </p:sp>
+      <p:graphicFrame>
+        <p:nvGraphicFramePr>
+          <p:cNvPr id="4" name="Content Placeholder 2">
+            <a:extLst>
+              <a:ext uri="{FF2B5EF4-FFF2-40B4-BE49-F238E27FC236}">
+                <a16:creationId xmlns:a16="http://schemas.microsoft.com/office/drawing/2014/main" id="{81DA72B8-9C87-E1AF-B98A-35BB87112E7F}"/>
+              </a:ext>
+            </a:extLst>
+          </p:cNvPr>
+          <p:cNvGraphicFramePr>
+            <a:graphicFrameLocks/>
+          </p:cNvGraphicFramePr>
+          <p:nvPr>
+            <p:extLst>
+              <p:ext uri="{D42A27DB-BD31-4B8C-83A1-F6EECF244321}">
+                <p14:modId xmlns:p14="http://schemas.microsoft.com/office/powerpoint/2010/main" val="1750847204"/>
+              </p:ext>
+            </p:extLst>
+          </p:nvPr>
+        </p:nvGraphicFramePr>
+        <p:xfrm>
+          <a:off x="838200" y="2921675"/>
+          <a:ext cx="10927829" cy="3255288"/>
+        </p:xfrm>
+        <a:graphic>
+          <a:graphicData uri="http://schemas.openxmlformats.org/drawingml/2006/diagram">
+            <dgm:relIds xmlns:dgm="http://schemas.openxmlformats.org/drawingml/2006/diagram" xmlns:r="http://schemas.openxmlformats.org/officeDocument/2006/relationships" r:dm="rId2" r:lo="rId3" r:qs="rId4" r:cs="rId5"/>
+          </a:graphicData>
+        </a:graphic>
+      </p:graphicFrame>
+    </p:spTree>
+    <p:extLst>
+      <p:ext uri="{BB962C8B-B14F-4D97-AF65-F5344CB8AC3E}">
+        <p14:creationId xmlns:p14="http://schemas.microsoft.com/office/powerpoint/2010/main" val="755555282"/>
+      </p:ext>
+    </p:extLst>
+  </p:cSld>
+  <p:clrMapOvr>
+    <a:masterClrMapping/>
+  </p:clrMapOvr>
+</p:sld>
+</file>
+
+<file path=ppt/slides/slide4.xml><?xml version="1.0" encoding="utf-8"?>
 <p:sld xmlns:a="http://schemas.openxmlformats.org/drawingml/2006/main" xmlns:r="http://schemas.openxmlformats.org/officeDocument/2006/relationships" xmlns:p="http://schemas.openxmlformats.org/presentationml/2006/main">
   <p:cSld>
     <p:spTree>
@@ -13925,13 +17496,13 @@
         <p:spPr/>
         <p:txBody>
           <a:bodyPr>
-            <a:normAutofit/>
+            <a:normAutofit fontScale="90000"/>
           </a:bodyPr>
           <a:lstStyle/>
           <a:p>
             <a:r>
               <a:rPr lang="en-GB" dirty="0"/>
-              <a:t>The Three Domains</a:t>
+              <a:t>Domains and the Different Decision Environments</a:t>
             </a:r>
             <a:endParaRPr lang="en-US" dirty="0"/>
           </a:p>
@@ -14021,8 +17592,8 @@
         </p:nvSpPr>
         <p:spPr>
           <a:xfrm>
-            <a:off x="2673927" y="5707007"/>
-            <a:ext cx="6844145" cy="369332"/>
+            <a:off x="1600200" y="5707007"/>
+            <a:ext cx="8991600" cy="369332"/>
           </a:xfrm>
           <a:prstGeom prst="rect">
             <a:avLst/>
@@ -14035,58 +17606,25 @@
           </a:bodyPr>
           <a:lstStyle/>
           <a:p>
-            <a:pPr marL="0" indent="0" algn="l">
-              <a:buNone/>
-            </a:pPr>
-            <a:r>
-              <a:rPr lang="en-GB" sz="1800" b="0" i="0" dirty="0">
-                <a:solidFill>
-                  <a:schemeClr val="tx1"/>
-                </a:solidFill>
-                <a:effectLst/>
-                <a:latin typeface="+mn-lt"/>
-              </a:rPr>
-              <a:t>The domains describe </a:t>
-            </a:r>
-            <a:r>
-              <a:rPr lang="en-GB" sz="1800" b="1" i="0" dirty="0">
-                <a:solidFill>
-                  <a:schemeClr val="tx1"/>
-                </a:solidFill>
-                <a:effectLst/>
-                <a:latin typeface="+mn-lt"/>
-              </a:rPr>
+            <a:r>
+              <a:rPr lang="en-GB" dirty="0"/>
+              <a:t>The domains describe </a:t>
+            </a:r>
+            <a:r>
+              <a:rPr lang="en-GB" b="1" dirty="0"/>
               <a:t>where</a:t>
             </a:r>
             <a:r>
-              <a:rPr lang="en-GB" sz="1800" b="0" i="0" dirty="0">
-                <a:solidFill>
-                  <a:schemeClr val="tx1"/>
-                </a:solidFill>
-                <a:effectLst/>
-                <a:latin typeface="+mn-lt"/>
-              </a:rPr>
-              <a:t> and </a:t>
-            </a:r>
-            <a:r>
-              <a:rPr lang="en-GB" sz="1800" b="1" i="0" dirty="0">
-                <a:solidFill>
-                  <a:schemeClr val="tx1"/>
-                </a:solidFill>
-                <a:effectLst/>
-                <a:latin typeface="+mn-lt"/>
-              </a:rPr>
-              <a:t>why</a:t>
-            </a:r>
-            <a:r>
-              <a:rPr lang="en-GB" sz="1800" b="0" i="0" dirty="0">
-                <a:solidFill>
-                  <a:schemeClr val="tx1"/>
-                </a:solidFill>
-                <a:effectLst/>
-                <a:latin typeface="+mn-lt"/>
-              </a:rPr>
-              <a:t> analytics is being used.</a:t>
+              <a:rPr lang="en-GB" dirty="0"/>
+              <a:t> analytics is applied and </a:t>
+            </a:r>
+            <a:r>
+              <a:rPr lang="en-GB" b="1" dirty="0"/>
+              <a:t>which decisions </a:t>
+            </a:r>
+            <a:r>
+              <a:rPr lang="en-GB" dirty="0"/>
+              <a:t>it supports.</a:t>
             </a:r>
             <a:endParaRPr lang="en-GB" sz="2250" b="0" i="0" dirty="0">
               <a:solidFill>
@@ -14108,185 +17646,279 @@
   <p:clrMapOvr>
     <a:masterClrMapping/>
   </p:clrMapOvr>
-</p:sld>
-</file>
-
-<file path=ppt/slides/slide4.xml><?xml version="1.0" encoding="utf-8"?>
-<p:sld xmlns:a="http://schemas.openxmlformats.org/drawingml/2006/main" xmlns:r="http://schemas.openxmlformats.org/officeDocument/2006/relationships" xmlns:p="http://schemas.openxmlformats.org/presentationml/2006/main">
-  <p:cSld>
-    <p:spTree>
-      <p:nvGrpSpPr>
-        <p:cNvPr id="1" name=""/>
-        <p:cNvGrpSpPr/>
-        <p:nvPr/>
-      </p:nvGrpSpPr>
-      <p:grpSpPr>
-        <a:xfrm>
-          <a:off x="0" y="0"/>
-          <a:ext cx="0" cy="0"/>
-          <a:chOff x="0" y="0"/>
-          <a:chExt cx="0" cy="0"/>
-        </a:xfrm>
-      </p:grpSpPr>
-      <p:sp>
-        <p:nvSpPr>
-          <p:cNvPr id="2" name="Title 1">
-            <a:extLst>
-              <a:ext uri="{FF2B5EF4-FFF2-40B4-BE49-F238E27FC236}">
-                <a16:creationId xmlns:a16="http://schemas.microsoft.com/office/drawing/2014/main" id="{E6104B99-C0BE-C514-46EC-CAE531CB329A}"/>
-              </a:ext>
-            </a:extLst>
-          </p:cNvPr>
-          <p:cNvSpPr>
-            <a:spLocks noGrp="1"/>
-          </p:cNvSpPr>
-          <p:nvPr>
-            <p:ph type="title"/>
-          </p:nvPr>
-        </p:nvSpPr>
-        <p:spPr/>
-        <p:txBody>
-          <a:bodyPr>
-            <a:normAutofit/>
-          </a:bodyPr>
-          <a:lstStyle/>
-          <a:p>
-            <a:r>
-              <a:rPr lang="en-GB" dirty="0"/>
-              <a:t>A Domain Begins With a Decision</a:t>
-            </a:r>
-            <a:endParaRPr lang="en-US" dirty="0"/>
-          </a:p>
-        </p:txBody>
-      </p:sp>
-      <p:sp>
-        <p:nvSpPr>
-          <p:cNvPr id="3" name="Content Placeholder 2">
-            <a:extLst>
-              <a:ext uri="{FF2B5EF4-FFF2-40B4-BE49-F238E27FC236}">
-                <a16:creationId xmlns:a16="http://schemas.microsoft.com/office/drawing/2014/main" id="{35EC063E-392D-93CE-404B-5B2C5A5F6B12}"/>
-              </a:ext>
-            </a:extLst>
-          </p:cNvPr>
-          <p:cNvSpPr>
-            <a:spLocks noGrp="1"/>
-          </p:cNvSpPr>
-          <p:nvPr>
-            <p:ph idx="1"/>
-          </p:nvPr>
-        </p:nvSpPr>
-        <p:spPr/>
-        <p:txBody>
-          <a:bodyPr/>
-          <a:lstStyle/>
-          <a:p>
-            <a:r>
-              <a:rPr lang="en-GB" dirty="0"/>
-              <a:t>For any sport analytics problem, ask:</a:t>
-            </a:r>
-          </a:p>
-          <a:p>
-            <a:pPr lvl="1"/>
-            <a:r>
-              <a:rPr lang="en-GB" b="1" dirty="0"/>
-              <a:t>Who</a:t>
-            </a:r>
-            <a:r>
-              <a:rPr lang="en-GB" dirty="0"/>
-              <a:t> will use the analysis?</a:t>
-            </a:r>
-          </a:p>
-          <a:p>
-            <a:pPr lvl="1"/>
-            <a:r>
-              <a:rPr lang="en-GB" dirty="0"/>
-              <a:t>What</a:t>
-            </a:r>
-            <a:r>
-              <a:rPr lang="en-GB" b="1" dirty="0"/>
-              <a:t> decision</a:t>
-            </a:r>
-            <a:r>
-              <a:rPr lang="en-GB" dirty="0"/>
-              <a:t> are they trying to make?</a:t>
-            </a:r>
-          </a:p>
-          <a:p>
-            <a:pPr lvl="1"/>
-            <a:r>
-              <a:rPr lang="en-GB" dirty="0"/>
-              <a:t>What</a:t>
-            </a:r>
-            <a:r>
-              <a:rPr lang="en-GB" b="1" dirty="0"/>
-              <a:t> information</a:t>
-            </a:r>
-            <a:r>
-              <a:rPr lang="en-GB" dirty="0"/>
-              <a:t> could improve that </a:t>
-            </a:r>
-            <a:r>
-              <a:rPr lang="en-GB" b="1" dirty="0"/>
-              <a:t>decision</a:t>
-            </a:r>
-            <a:r>
-              <a:rPr lang="en-GB" dirty="0"/>
-              <a:t>?</a:t>
-            </a:r>
-          </a:p>
-          <a:p>
-            <a:pPr lvl="1"/>
-            <a:r>
-              <a:rPr lang="en-GB" dirty="0"/>
-              <a:t>What</a:t>
-            </a:r>
-            <a:r>
-              <a:rPr lang="en-GB" b="1" dirty="0"/>
-              <a:t> data</a:t>
-            </a:r>
-            <a:r>
-              <a:rPr lang="en-GB" dirty="0"/>
-              <a:t> might provide that </a:t>
-            </a:r>
-            <a:r>
-              <a:rPr lang="en-GB" b="1" dirty="0"/>
-              <a:t>information</a:t>
-            </a:r>
-            <a:r>
-              <a:rPr lang="en-GB" dirty="0"/>
-              <a:t>?</a:t>
-            </a:r>
-          </a:p>
-          <a:p>
-            <a:pPr lvl="1"/>
-            <a:r>
-              <a:rPr lang="en-GB" dirty="0"/>
-              <a:t>What are the</a:t>
-            </a:r>
-            <a:r>
-              <a:rPr lang="en-GB" b="1" dirty="0"/>
-              <a:t> consequences</a:t>
-            </a:r>
-            <a:r>
-              <a:rPr lang="en-GB" dirty="0"/>
-              <a:t> of being wrong?</a:t>
-            </a:r>
-          </a:p>
-          <a:p>
-            <a:endParaRPr lang="en-US" dirty="0"/>
-          </a:p>
-        </p:txBody>
-      </p:sp>
-    </p:spTree>
-    <p:extLst>
-      <p:ext uri="{BB962C8B-B14F-4D97-AF65-F5344CB8AC3E}">
-        <p14:creationId xmlns:p14="http://schemas.microsoft.com/office/powerpoint/2010/main" val="2477808522"/>
-      </p:ext>
-    </p:extLst>
-  </p:cSld>
-  <p:clrMapOvr>
-    <a:masterClrMapping/>
-  </p:clrMapOvr>
+  <p:timing>
+    <p:tnLst>
+      <p:par>
+        <p:cTn id="1" dur="indefinite" restart="never" nodeType="tmRoot">
+          <p:childTnLst>
+            <p:seq concurrent="1" nextAc="seek">
+              <p:cTn id="2" dur="indefinite" nodeType="mainSeq">
+                <p:childTnLst>
+                  <p:par>
+                    <p:cTn id="3" fill="hold">
+                      <p:stCondLst>
+                        <p:cond delay="indefinite"/>
+                      </p:stCondLst>
+                      <p:childTnLst>
+                        <p:par>
+                          <p:cTn id="4" fill="hold">
+                            <p:stCondLst>
+                              <p:cond delay="0"/>
+                            </p:stCondLst>
+                            <p:childTnLst>
+                              <p:par>
+                                <p:cTn id="5" presetID="1" presetClass="entr" presetSubtype="0" fill="hold" grpId="0" nodeType="clickEffect">
+                                  <p:stCondLst>
+                                    <p:cond delay="0"/>
+                                  </p:stCondLst>
+                                  <p:childTnLst>
+                                    <p:set>
+                                      <p:cBhvr>
+                                        <p:cTn id="6" dur="1" fill="hold">
+                                          <p:stCondLst>
+                                            <p:cond delay="0"/>
+                                          </p:stCondLst>
+                                        </p:cTn>
+                                        <p:tgtEl>
+                                          <p:spTgt spid="3">
+                                            <p:txEl>
+                                              <p:pRg st="0" end="0"/>
+                                            </p:txEl>
+                                          </p:spTgt>
+                                        </p:tgtEl>
+                                        <p:attrNameLst>
+                                          <p:attrName>style.visibility</p:attrName>
+                                        </p:attrNameLst>
+                                      </p:cBhvr>
+                                      <p:to>
+                                        <p:strVal val="visible"/>
+                                      </p:to>
+                                    </p:set>
+                                  </p:childTnLst>
+                                </p:cTn>
+                              </p:par>
+                              <p:par>
+                                <p:cTn id="7" presetID="1" presetClass="entr" presetSubtype="0" fill="hold" grpId="0" nodeType="withEffect">
+                                  <p:stCondLst>
+                                    <p:cond delay="0"/>
+                                  </p:stCondLst>
+                                  <p:childTnLst>
+                                    <p:set>
+                                      <p:cBhvr>
+                                        <p:cTn id="8" dur="1" fill="hold">
+                                          <p:stCondLst>
+                                            <p:cond delay="0"/>
+                                          </p:stCondLst>
+                                        </p:cTn>
+                                        <p:tgtEl>
+                                          <p:spTgt spid="3">
+                                            <p:txEl>
+                                              <p:pRg st="1" end="1"/>
+                                            </p:txEl>
+                                          </p:spTgt>
+                                        </p:tgtEl>
+                                        <p:attrNameLst>
+                                          <p:attrName>style.visibility</p:attrName>
+                                        </p:attrNameLst>
+                                      </p:cBhvr>
+                                      <p:to>
+                                        <p:strVal val="visible"/>
+                                      </p:to>
+                                    </p:set>
+                                  </p:childTnLst>
+                                </p:cTn>
+                              </p:par>
+                            </p:childTnLst>
+                          </p:cTn>
+                        </p:par>
+                      </p:childTnLst>
+                    </p:cTn>
+                  </p:par>
+                  <p:par>
+                    <p:cTn id="9" fill="hold">
+                      <p:stCondLst>
+                        <p:cond delay="indefinite"/>
+                      </p:stCondLst>
+                      <p:childTnLst>
+                        <p:par>
+                          <p:cTn id="10" fill="hold">
+                            <p:stCondLst>
+                              <p:cond delay="0"/>
+                            </p:stCondLst>
+                            <p:childTnLst>
+                              <p:par>
+                                <p:cTn id="11" presetID="1" presetClass="entr" presetSubtype="0" fill="hold" grpId="0" nodeType="clickEffect">
+                                  <p:stCondLst>
+                                    <p:cond delay="0"/>
+                                  </p:stCondLst>
+                                  <p:childTnLst>
+                                    <p:set>
+                                      <p:cBhvr>
+                                        <p:cTn id="12" dur="1" fill="hold">
+                                          <p:stCondLst>
+                                            <p:cond delay="0"/>
+                                          </p:stCondLst>
+                                        </p:cTn>
+                                        <p:tgtEl>
+                                          <p:spTgt spid="3">
+                                            <p:txEl>
+                                              <p:pRg st="2" end="2"/>
+                                            </p:txEl>
+                                          </p:spTgt>
+                                        </p:tgtEl>
+                                        <p:attrNameLst>
+                                          <p:attrName>style.visibility</p:attrName>
+                                        </p:attrNameLst>
+                                      </p:cBhvr>
+                                      <p:to>
+                                        <p:strVal val="visible"/>
+                                      </p:to>
+                                    </p:set>
+                                  </p:childTnLst>
+                                </p:cTn>
+                              </p:par>
+                              <p:par>
+                                <p:cTn id="13" presetID="1" presetClass="entr" presetSubtype="0" fill="hold" grpId="0" nodeType="withEffect">
+                                  <p:stCondLst>
+                                    <p:cond delay="0"/>
+                                  </p:stCondLst>
+                                  <p:childTnLst>
+                                    <p:set>
+                                      <p:cBhvr>
+                                        <p:cTn id="14" dur="1" fill="hold">
+                                          <p:stCondLst>
+                                            <p:cond delay="0"/>
+                                          </p:stCondLst>
+                                        </p:cTn>
+                                        <p:tgtEl>
+                                          <p:spTgt spid="3">
+                                            <p:txEl>
+                                              <p:pRg st="3" end="3"/>
+                                            </p:txEl>
+                                          </p:spTgt>
+                                        </p:tgtEl>
+                                        <p:attrNameLst>
+                                          <p:attrName>style.visibility</p:attrName>
+                                        </p:attrNameLst>
+                                      </p:cBhvr>
+                                      <p:to>
+                                        <p:strVal val="visible"/>
+                                      </p:to>
+                                    </p:set>
+                                  </p:childTnLst>
+                                </p:cTn>
+                              </p:par>
+                            </p:childTnLst>
+                          </p:cTn>
+                        </p:par>
+                      </p:childTnLst>
+                    </p:cTn>
+                  </p:par>
+                  <p:par>
+                    <p:cTn id="15" fill="hold">
+                      <p:stCondLst>
+                        <p:cond delay="indefinite"/>
+                      </p:stCondLst>
+                      <p:childTnLst>
+                        <p:par>
+                          <p:cTn id="16" fill="hold">
+                            <p:stCondLst>
+                              <p:cond delay="0"/>
+                            </p:stCondLst>
+                            <p:childTnLst>
+                              <p:par>
+                                <p:cTn id="17" presetID="1" presetClass="entr" presetSubtype="0" fill="hold" grpId="0" nodeType="clickEffect">
+                                  <p:stCondLst>
+                                    <p:cond delay="0"/>
+                                  </p:stCondLst>
+                                  <p:childTnLst>
+                                    <p:set>
+                                      <p:cBhvr>
+                                        <p:cTn id="18" dur="1" fill="hold">
+                                          <p:stCondLst>
+                                            <p:cond delay="0"/>
+                                          </p:stCondLst>
+                                        </p:cTn>
+                                        <p:tgtEl>
+                                          <p:spTgt spid="3">
+                                            <p:txEl>
+                                              <p:pRg st="4" end="4"/>
+                                            </p:txEl>
+                                          </p:spTgt>
+                                        </p:tgtEl>
+                                        <p:attrNameLst>
+                                          <p:attrName>style.visibility</p:attrName>
+                                        </p:attrNameLst>
+                                      </p:cBhvr>
+                                      <p:to>
+                                        <p:strVal val="visible"/>
+                                      </p:to>
+                                    </p:set>
+                                  </p:childTnLst>
+                                </p:cTn>
+                              </p:par>
+                              <p:par>
+                                <p:cTn id="19" presetID="1" presetClass="entr" presetSubtype="0" fill="hold" grpId="0" nodeType="withEffect">
+                                  <p:stCondLst>
+                                    <p:cond delay="0"/>
+                                  </p:stCondLst>
+                                  <p:childTnLst>
+                                    <p:set>
+                                      <p:cBhvr>
+                                        <p:cTn id="20" dur="1" fill="hold">
+                                          <p:stCondLst>
+                                            <p:cond delay="0"/>
+                                          </p:stCondLst>
+                                        </p:cTn>
+                                        <p:tgtEl>
+                                          <p:spTgt spid="3">
+                                            <p:txEl>
+                                              <p:pRg st="5" end="5"/>
+                                            </p:txEl>
+                                          </p:spTgt>
+                                        </p:tgtEl>
+                                        <p:attrNameLst>
+                                          <p:attrName>style.visibility</p:attrName>
+                                        </p:attrNameLst>
+                                      </p:cBhvr>
+                                      <p:to>
+                                        <p:strVal val="visible"/>
+                                      </p:to>
+                                    </p:set>
+                                  </p:childTnLst>
+                                </p:cTn>
+                              </p:par>
+                            </p:childTnLst>
+                          </p:cTn>
+                        </p:par>
+                      </p:childTnLst>
+                    </p:cTn>
+                  </p:par>
+                </p:childTnLst>
+              </p:cTn>
+              <p:prevCondLst>
+                <p:cond evt="onPrev" delay="0">
+                  <p:tgtEl>
+                    <p:sldTgt/>
+                  </p:tgtEl>
+                </p:cond>
+              </p:prevCondLst>
+              <p:nextCondLst>
+                <p:cond evt="onNext" delay="0">
+                  <p:tgtEl>
+                    <p:sldTgt/>
+                  </p:tgtEl>
+                </p:cond>
+              </p:nextCondLst>
+            </p:seq>
+          </p:childTnLst>
+        </p:cTn>
+      </p:par>
+    </p:tnLst>
+    <p:bldLst>
+      <p:bldP spid="3" grpId="0" build="p"/>
+    </p:bldLst>
+  </p:timing>
 </p:sld>
 </file>
 
@@ -14387,7 +18019,7 @@
         </p:nvSpPr>
         <p:spPr>
           <a:xfrm>
-            <a:off x="838200" y="2618509"/>
+            <a:off x="6525491" y="2673927"/>
             <a:ext cx="4828309" cy="3186546"/>
           </a:xfrm>
           <a:prstGeom prst="roundRect">
@@ -14424,7 +18056,7 @@
               <a:buChar char="•"/>
             </a:pPr>
             <a:r>
-              <a:rPr lang="en-GB" sz="2400" dirty="0"/>
+              <a:rPr lang="en-GB" sz="2000" dirty="0"/>
               <a:t>Performance history</a:t>
             </a:r>
           </a:p>
@@ -14434,8 +18066,8 @@
               <a:buChar char="•"/>
             </a:pPr>
             <a:r>
-              <a:rPr lang="en-GB" sz="2400" dirty="0"/>
-              <a:t>Physical and technical profile</a:t>
+              <a:rPr lang="en-GB" sz="2000" dirty="0"/>
+              <a:t>Training history</a:t>
             </a:r>
           </a:p>
           <a:p>
@@ -14444,8 +18076,8 @@
               <a:buChar char="•"/>
             </a:pPr>
             <a:r>
-              <a:rPr lang="en-GB" sz="2400" dirty="0"/>
-              <a:t>Competition context</a:t>
+              <a:rPr lang="en-GB" sz="2000" dirty="0"/>
+              <a:t>Physical and technical profile</a:t>
             </a:r>
           </a:p>
           <a:p>
@@ -14454,13 +18086,20 @@
               <a:buChar char="•"/>
             </a:pPr>
             <a:r>
-              <a:rPr lang="en-GB" sz="2400" dirty="0"/>
-              <a:t>Age and development trajectory</a:t>
-            </a:r>
-          </a:p>
-          <a:p>
-            <a:pPr algn="ctr"/>
-            <a:endParaRPr lang="en-US" sz="2400" dirty="0"/>
+              <a:rPr lang="en-GB" sz="2000" dirty="0"/>
+              <a:t>Competition context</a:t>
+            </a:r>
+          </a:p>
+          <a:p>
+            <a:pPr marL="342900" indent="-342900">
+              <a:buFont typeface="Arial" panose="020B0604020202020204" pitchFamily="34" charset="0"/>
+              <a:buChar char="•"/>
+            </a:pPr>
+            <a:r>
+              <a:rPr lang="en-GB" sz="2000" dirty="0"/>
+              <a:t>Age</a:t>
+            </a:r>
+            <a:endParaRPr lang="en-US" sz="2000" dirty="0"/>
           </a:p>
         </p:txBody>
       </p:sp>
@@ -14478,7 +18117,7 @@
         </p:nvSpPr>
         <p:spPr>
           <a:xfrm>
-            <a:off x="6525491" y="2618509"/>
+            <a:off x="838200" y="2743200"/>
             <a:ext cx="4828309" cy="3186546"/>
           </a:xfrm>
           <a:prstGeom prst="roundRect">
@@ -14514,7 +18153,7 @@
               <a:buChar char="•"/>
             </a:pPr>
             <a:r>
-              <a:rPr lang="en-GB" sz="2400" dirty="0"/>
+              <a:rPr lang="en-GB" sz="2000" dirty="0"/>
               <a:t>Recruit or draft an athlete</a:t>
             </a:r>
           </a:p>
@@ -14524,8 +18163,8 @@
               <a:buChar char="•"/>
             </a:pPr>
             <a:r>
-              <a:rPr lang="en-GB" sz="2400" dirty="0"/>
-              <a:t>Compare potential targets</a:t>
+              <a:rPr lang="en-GB" sz="2000" dirty="0"/>
+              <a:t>Compare potential prospects</a:t>
             </a:r>
           </a:p>
           <a:p>
@@ -14534,7 +18173,7 @@
               <a:buChar char="•"/>
             </a:pPr>
             <a:r>
-              <a:rPr lang="en-GB" sz="2400" dirty="0"/>
+              <a:rPr lang="en-GB" sz="2000" dirty="0"/>
               <a:t>Identify development priorities</a:t>
             </a:r>
           </a:p>
@@ -14544,8 +18183,8 @@
               <a:buChar char="•"/>
             </a:pPr>
             <a:r>
-              <a:rPr lang="en-GB" sz="2400" dirty="0"/>
-              <a:t>Build or balance a roster</a:t>
+              <a:rPr lang="en-GB" sz="2000" dirty="0"/>
+              <a:t>Build a balanced roster</a:t>
             </a:r>
           </a:p>
           <a:p>
@@ -14564,6 +18203,130 @@
   <p:clrMapOvr>
     <a:masterClrMapping/>
   </p:clrMapOvr>
+  <p:timing>
+    <p:tnLst>
+      <p:par>
+        <p:cTn id="1" dur="indefinite" restart="never" nodeType="tmRoot">
+          <p:childTnLst>
+            <p:seq concurrent="1" nextAc="seek">
+              <p:cTn id="2" dur="indefinite" nodeType="mainSeq">
+                <p:childTnLst>
+                  <p:par>
+                    <p:cTn id="3" fill="hold">
+                      <p:stCondLst>
+                        <p:cond delay="indefinite"/>
+                      </p:stCondLst>
+                      <p:childTnLst>
+                        <p:par>
+                          <p:cTn id="4" fill="hold">
+                            <p:stCondLst>
+                              <p:cond delay="0"/>
+                            </p:stCondLst>
+                            <p:childTnLst>
+                              <p:par>
+                                <p:cTn id="5" presetID="1" presetClass="entr" presetSubtype="0" fill="hold" grpId="0" nodeType="clickEffect">
+                                  <p:stCondLst>
+                                    <p:cond delay="0"/>
+                                  </p:stCondLst>
+                                  <p:childTnLst>
+                                    <p:set>
+                                      <p:cBhvr>
+                                        <p:cTn id="6" dur="1" fill="hold">
+                                          <p:stCondLst>
+                                            <p:cond delay="0"/>
+                                          </p:stCondLst>
+                                        </p:cTn>
+                                        <p:tgtEl>
+                                          <p:spTgt spid="5"/>
+                                        </p:tgtEl>
+                                        <p:attrNameLst>
+                                          <p:attrName>style.visibility</p:attrName>
+                                        </p:attrNameLst>
+                                      </p:cBhvr>
+                                      <p:to>
+                                        <p:strVal val="visible"/>
+                                      </p:to>
+                                    </p:set>
+                                  </p:childTnLst>
+                                </p:cTn>
+                              </p:par>
+                            </p:childTnLst>
+                          </p:cTn>
+                        </p:par>
+                      </p:childTnLst>
+                    </p:cTn>
+                  </p:par>
+                  <p:par>
+                    <p:cTn id="7" fill="hold">
+                      <p:stCondLst>
+                        <p:cond delay="indefinite"/>
+                      </p:stCondLst>
+                      <p:childTnLst>
+                        <p:par>
+                          <p:cTn id="8" fill="hold">
+                            <p:stCondLst>
+                              <p:cond delay="0"/>
+                            </p:stCondLst>
+                            <p:childTnLst>
+                              <p:par>
+                                <p:cTn id="9" presetID="1" presetClass="entr" presetSubtype="0" fill="hold" grpId="0" nodeType="clickEffect">
+                                  <p:stCondLst>
+                                    <p:cond delay="0"/>
+                                  </p:stCondLst>
+                                  <p:childTnLst>
+                                    <p:set>
+                                      <p:cBhvr>
+                                        <p:cTn id="10" dur="1" fill="hold">
+                                          <p:stCondLst>
+                                            <p:cond delay="0"/>
+                                          </p:stCondLst>
+                                        </p:cTn>
+                                        <p:tgtEl>
+                                          <p:spTgt spid="4"/>
+                                        </p:tgtEl>
+                                        <p:attrNameLst>
+                                          <p:attrName>style.visibility</p:attrName>
+                                        </p:attrNameLst>
+                                      </p:cBhvr>
+                                      <p:to>
+                                        <p:strVal val="visible"/>
+                                      </p:to>
+                                    </p:set>
+                                  </p:childTnLst>
+                                </p:cTn>
+                              </p:par>
+                            </p:childTnLst>
+                          </p:cTn>
+                        </p:par>
+                      </p:childTnLst>
+                    </p:cTn>
+                  </p:par>
+                </p:childTnLst>
+              </p:cTn>
+              <p:prevCondLst>
+                <p:cond evt="onPrev" delay="0">
+                  <p:tgtEl>
+                    <p:sldTgt/>
+                  </p:tgtEl>
+                </p:cond>
+              </p:prevCondLst>
+              <p:nextCondLst>
+                <p:cond evt="onNext" delay="0">
+                  <p:tgtEl>
+                    <p:sldTgt/>
+                  </p:tgtEl>
+                </p:cond>
+              </p:nextCondLst>
+            </p:seq>
+          </p:childTnLst>
+        </p:cTn>
+      </p:par>
+    </p:tnLst>
+    <p:bldLst>
+      <p:bldP spid="4" grpId="0" animBg="1"/>
+      <p:bldP spid="5" grpId="0" animBg="1"/>
+    </p:bldLst>
+  </p:timing>
 </p:sld>
 </file>
 
@@ -14654,38 +18417,39 @@
             <a:pPr lvl="1"/>
             <a:r>
               <a:rPr lang="en-GB" dirty="0"/>
-              <a:t>Teammates?</a:t>
+              <a:t>Teammates? </a:t>
             </a:r>
           </a:p>
           <a:p>
             <a:pPr lvl="1"/>
             <a:r>
               <a:rPr lang="en-GB" dirty="0"/>
-              <a:t>Athletes at the same position?</a:t>
+              <a:t>Players at the same position? </a:t>
             </a:r>
           </a:p>
           <a:p>
             <a:pPr lvl="1"/>
             <a:r>
               <a:rPr lang="en-GB" dirty="0"/>
-              <a:t>The current league?</a:t>
+              <a:t>Players of the same age? </a:t>
             </a:r>
           </a:p>
           <a:p>
             <a:pPr lvl="1"/>
             <a:r>
               <a:rPr lang="en-GB" dirty="0"/>
-              <a:t>Athletes of the same age?</a:t>
+              <a:t>Players in the current league? </a:t>
             </a:r>
           </a:p>
           <a:p>
             <a:pPr lvl="1"/>
             <a:r>
               <a:rPr lang="en-GB" dirty="0"/>
-              <a:t>The level the athlete is being recruited into?</a:t>
-            </a:r>
-          </a:p>
-          <a:p>
+              <a:t>Players at the level being considered?</a:t>
+            </a:r>
+          </a:p>
+          <a:p>
+            <a:pPr lvl="1"/>
             <a:endParaRPr lang="en-US" dirty="0"/>
           </a:p>
         </p:txBody>
@@ -14721,14 +18485,18 @@
             <a:r>
               <a:rPr lang="en-GB" sz="1800" b="0" i="0" dirty="0">
                 <a:solidFill>
-                  <a:schemeClr val="tx1"/>
+                  <a:srgbClr val="FF0000"/>
                 </a:solidFill>
                 <a:effectLst/>
                 <a:latin typeface="+mn-lt"/>
               </a:rPr>
               <a:t>A number becomes evaluative only when it has a meaningful comparison.</a:t>
             </a:r>
-            <a:endParaRPr lang="en-US" dirty="0"/>
+            <a:endParaRPr lang="en-US" dirty="0">
+              <a:solidFill>
+                <a:srgbClr val="FF0000"/>
+              </a:solidFill>
+            </a:endParaRPr>
           </a:p>
         </p:txBody>
       </p:sp>
@@ -14742,6 +18510,307 @@
   <p:clrMapOvr>
     <a:masterClrMapping/>
   </p:clrMapOvr>
+  <p:timing>
+    <p:tnLst>
+      <p:par>
+        <p:cTn id="1" dur="indefinite" restart="never" nodeType="tmRoot">
+          <p:childTnLst>
+            <p:seq concurrent="1" nextAc="seek">
+              <p:cTn id="2" dur="indefinite" nodeType="mainSeq">
+                <p:childTnLst>
+                  <p:par>
+                    <p:cTn id="3" fill="hold">
+                      <p:stCondLst>
+                        <p:cond delay="indefinite"/>
+                      </p:stCondLst>
+                      <p:childTnLst>
+                        <p:par>
+                          <p:cTn id="4" fill="hold">
+                            <p:stCondLst>
+                              <p:cond delay="0"/>
+                            </p:stCondLst>
+                            <p:childTnLst>
+                              <p:par>
+                                <p:cTn id="5" presetID="1" presetClass="entr" presetSubtype="0" fill="hold" grpId="0" nodeType="clickEffect">
+                                  <p:stCondLst>
+                                    <p:cond delay="0"/>
+                                  </p:stCondLst>
+                                  <p:childTnLst>
+                                    <p:set>
+                                      <p:cBhvr>
+                                        <p:cTn id="6" dur="1" fill="hold">
+                                          <p:stCondLst>
+                                            <p:cond delay="0"/>
+                                          </p:stCondLst>
+                                        </p:cTn>
+                                        <p:tgtEl>
+                                          <p:spTgt spid="3">
+                                            <p:txEl>
+                                              <p:pRg st="1" end="1"/>
+                                            </p:txEl>
+                                          </p:spTgt>
+                                        </p:tgtEl>
+                                        <p:attrNameLst>
+                                          <p:attrName>style.visibility</p:attrName>
+                                        </p:attrNameLst>
+                                      </p:cBhvr>
+                                      <p:to>
+                                        <p:strVal val="visible"/>
+                                      </p:to>
+                                    </p:set>
+                                  </p:childTnLst>
+                                </p:cTn>
+                              </p:par>
+                            </p:childTnLst>
+                          </p:cTn>
+                        </p:par>
+                      </p:childTnLst>
+                    </p:cTn>
+                  </p:par>
+                  <p:par>
+                    <p:cTn id="7" fill="hold">
+                      <p:stCondLst>
+                        <p:cond delay="indefinite"/>
+                      </p:stCondLst>
+                      <p:childTnLst>
+                        <p:par>
+                          <p:cTn id="8" fill="hold">
+                            <p:stCondLst>
+                              <p:cond delay="0"/>
+                            </p:stCondLst>
+                            <p:childTnLst>
+                              <p:par>
+                                <p:cTn id="9" presetID="1" presetClass="entr" presetSubtype="0" fill="hold" grpId="0" nodeType="clickEffect">
+                                  <p:stCondLst>
+                                    <p:cond delay="0"/>
+                                  </p:stCondLst>
+                                  <p:childTnLst>
+                                    <p:set>
+                                      <p:cBhvr>
+                                        <p:cTn id="10" dur="1" fill="hold">
+                                          <p:stCondLst>
+                                            <p:cond delay="0"/>
+                                          </p:stCondLst>
+                                        </p:cTn>
+                                        <p:tgtEl>
+                                          <p:spTgt spid="3">
+                                            <p:txEl>
+                                              <p:pRg st="2" end="2"/>
+                                            </p:txEl>
+                                          </p:spTgt>
+                                        </p:tgtEl>
+                                        <p:attrNameLst>
+                                          <p:attrName>style.visibility</p:attrName>
+                                        </p:attrNameLst>
+                                      </p:cBhvr>
+                                      <p:to>
+                                        <p:strVal val="visible"/>
+                                      </p:to>
+                                    </p:set>
+                                  </p:childTnLst>
+                                </p:cTn>
+                              </p:par>
+                              <p:par>
+                                <p:cTn id="11" presetID="1" presetClass="entr" presetSubtype="0" fill="hold" grpId="0" nodeType="withEffect">
+                                  <p:stCondLst>
+                                    <p:cond delay="0"/>
+                                  </p:stCondLst>
+                                  <p:childTnLst>
+                                    <p:set>
+                                      <p:cBhvr>
+                                        <p:cTn id="12" dur="1" fill="hold">
+                                          <p:stCondLst>
+                                            <p:cond delay="0"/>
+                                          </p:stCondLst>
+                                        </p:cTn>
+                                        <p:tgtEl>
+                                          <p:spTgt spid="3">
+                                            <p:txEl>
+                                              <p:pRg st="3" end="3"/>
+                                            </p:txEl>
+                                          </p:spTgt>
+                                        </p:tgtEl>
+                                        <p:attrNameLst>
+                                          <p:attrName>style.visibility</p:attrName>
+                                        </p:attrNameLst>
+                                      </p:cBhvr>
+                                      <p:to>
+                                        <p:strVal val="visible"/>
+                                      </p:to>
+                                    </p:set>
+                                  </p:childTnLst>
+                                </p:cTn>
+                              </p:par>
+                              <p:par>
+                                <p:cTn id="13" presetID="1" presetClass="entr" presetSubtype="0" fill="hold" grpId="0" nodeType="withEffect">
+                                  <p:stCondLst>
+                                    <p:cond delay="0"/>
+                                  </p:stCondLst>
+                                  <p:childTnLst>
+                                    <p:set>
+                                      <p:cBhvr>
+                                        <p:cTn id="14" dur="1" fill="hold">
+                                          <p:stCondLst>
+                                            <p:cond delay="0"/>
+                                          </p:stCondLst>
+                                        </p:cTn>
+                                        <p:tgtEl>
+                                          <p:spTgt spid="3">
+                                            <p:txEl>
+                                              <p:pRg st="4" end="4"/>
+                                            </p:txEl>
+                                          </p:spTgt>
+                                        </p:tgtEl>
+                                        <p:attrNameLst>
+                                          <p:attrName>style.visibility</p:attrName>
+                                        </p:attrNameLst>
+                                      </p:cBhvr>
+                                      <p:to>
+                                        <p:strVal val="visible"/>
+                                      </p:to>
+                                    </p:set>
+                                  </p:childTnLst>
+                                </p:cTn>
+                              </p:par>
+                              <p:par>
+                                <p:cTn id="15" presetID="1" presetClass="entr" presetSubtype="0" fill="hold" grpId="0" nodeType="withEffect">
+                                  <p:stCondLst>
+                                    <p:cond delay="0"/>
+                                  </p:stCondLst>
+                                  <p:childTnLst>
+                                    <p:set>
+                                      <p:cBhvr>
+                                        <p:cTn id="16" dur="1" fill="hold">
+                                          <p:stCondLst>
+                                            <p:cond delay="0"/>
+                                          </p:stCondLst>
+                                        </p:cTn>
+                                        <p:tgtEl>
+                                          <p:spTgt spid="3">
+                                            <p:txEl>
+                                              <p:pRg st="5" end="5"/>
+                                            </p:txEl>
+                                          </p:spTgt>
+                                        </p:tgtEl>
+                                        <p:attrNameLst>
+                                          <p:attrName>style.visibility</p:attrName>
+                                        </p:attrNameLst>
+                                      </p:cBhvr>
+                                      <p:to>
+                                        <p:strVal val="visible"/>
+                                      </p:to>
+                                    </p:set>
+                                  </p:childTnLst>
+                                </p:cTn>
+                              </p:par>
+                              <p:par>
+                                <p:cTn id="17" presetID="1" presetClass="entr" presetSubtype="0" fill="hold" grpId="0" nodeType="withEffect">
+                                  <p:stCondLst>
+                                    <p:cond delay="0"/>
+                                  </p:stCondLst>
+                                  <p:childTnLst>
+                                    <p:set>
+                                      <p:cBhvr>
+                                        <p:cTn id="18" dur="1" fill="hold">
+                                          <p:stCondLst>
+                                            <p:cond delay="0"/>
+                                          </p:stCondLst>
+                                        </p:cTn>
+                                        <p:tgtEl>
+                                          <p:spTgt spid="3">
+                                            <p:txEl>
+                                              <p:pRg st="6" end="6"/>
+                                            </p:txEl>
+                                          </p:spTgt>
+                                        </p:tgtEl>
+                                        <p:attrNameLst>
+                                          <p:attrName>style.visibility</p:attrName>
+                                        </p:attrNameLst>
+                                      </p:cBhvr>
+                                      <p:to>
+                                        <p:strVal val="visible"/>
+                                      </p:to>
+                                    </p:set>
+                                  </p:childTnLst>
+                                </p:cTn>
+                              </p:par>
+                            </p:childTnLst>
+                          </p:cTn>
+                        </p:par>
+                      </p:childTnLst>
+                    </p:cTn>
+                  </p:par>
+                  <p:par>
+                    <p:cTn id="19" fill="hold">
+                      <p:stCondLst>
+                        <p:cond delay="indefinite"/>
+                      </p:stCondLst>
+                      <p:childTnLst>
+                        <p:par>
+                          <p:cTn id="20" fill="hold">
+                            <p:stCondLst>
+                              <p:cond delay="0"/>
+                            </p:stCondLst>
+                            <p:childTnLst>
+                              <p:par>
+                                <p:cTn id="21" presetID="1" presetClass="entr" presetSubtype="0" fill="hold" grpId="0" nodeType="clickEffect">
+                                  <p:stCondLst>
+                                    <p:cond delay="0"/>
+                                  </p:stCondLst>
+                                  <p:childTnLst>
+                                    <p:set>
+                                      <p:cBhvr>
+                                        <p:cTn id="22" dur="1" fill="hold">
+                                          <p:stCondLst>
+                                            <p:cond delay="0"/>
+                                          </p:stCondLst>
+                                        </p:cTn>
+                                        <p:tgtEl>
+                                          <p:spTgt spid="5"/>
+                                        </p:tgtEl>
+                                        <p:attrNameLst>
+                                          <p:attrName>style.visibility</p:attrName>
+                                        </p:attrNameLst>
+                                      </p:cBhvr>
+                                      <p:to>
+                                        <p:strVal val="visible"/>
+                                      </p:to>
+                                    </p:set>
+                                  </p:childTnLst>
+                                </p:cTn>
+                              </p:par>
+                            </p:childTnLst>
+                          </p:cTn>
+                        </p:par>
+                      </p:childTnLst>
+                    </p:cTn>
+                  </p:par>
+                </p:childTnLst>
+              </p:cTn>
+              <p:prevCondLst>
+                <p:cond evt="onPrev" delay="0">
+                  <p:tgtEl>
+                    <p:sldTgt/>
+                  </p:tgtEl>
+                </p:cond>
+              </p:prevCondLst>
+              <p:nextCondLst>
+                <p:cond evt="onNext" delay="0">
+                  <p:tgtEl>
+                    <p:sldTgt/>
+                  </p:tgtEl>
+                </p:cond>
+              </p:nextCondLst>
+            </p:seq>
+          </p:childTnLst>
+        </p:cTn>
+      </p:par>
+    </p:tnLst>
+    <p:bldLst>
+      <p:bldP spid="3" grpId="0" uiExpand="1" build="p"/>
+      <p:bldP spid="5" grpId="0"/>
+    </p:bldLst>
+  </p:timing>
 </p:sld>
 </file>
 
@@ -14781,13 +18850,13 @@
         <p:spPr/>
         <p:txBody>
           <a:bodyPr>
-            <a:normAutofit fontScale="90000"/>
+            <a:normAutofit/>
           </a:bodyPr>
           <a:lstStyle/>
           <a:p>
             <a:r>
               <a:rPr lang="en-GB" dirty="0"/>
-              <a:t>Scouting Combines Evidence From Different Sources</a:t>
+              <a:t>Evidence From Different Sources</a:t>
             </a:r>
             <a:endParaRPr lang="en-US" dirty="0"/>
           </a:p>
@@ -14814,70 +18883,59 @@
           <a:bodyPr/>
           <a:lstStyle/>
           <a:p>
+            <a:pPr marL="0" lvl="0" indent="0">
+              <a:buNone/>
+            </a:pPr>
+            <a:r>
+              <a:rPr lang="en-GB" dirty="0"/>
+              <a:t>In scouting:</a:t>
+            </a:r>
+          </a:p>
+          <a:p>
             <a:pPr lvl="0"/>
             <a:r>
+              <a:rPr lang="en-GB" b="1" dirty="0"/>
+              <a:t>Statistical performance:</a:t>
+            </a:r>
+            <a:r>
               <a:rPr lang="en-GB" dirty="0"/>
-              <a:t>Statistical performance: what an athlete has produced.</a:t>
+              <a:t> what the athlete has produced </a:t>
             </a:r>
           </a:p>
           <a:p>
             <a:pPr lvl="0"/>
             <a:r>
+              <a:rPr lang="en-GB" b="1" dirty="0"/>
+              <a:t>Video and observation:</a:t>
+            </a:r>
+            <a:r>
               <a:rPr lang="en-GB" dirty="0"/>
-              <a:t>Video and observation: context about how that performance occurred.</a:t>
+              <a:t> how that performance occurred </a:t>
             </a:r>
           </a:p>
           <a:p>
             <a:pPr lvl="0"/>
             <a:r>
+              <a:rPr lang="en-GB" b="1" dirty="0"/>
+              <a:t>Physical testing:</a:t>
+            </a:r>
+            <a:r>
               <a:rPr lang="en-GB" dirty="0"/>
-              <a:t>Physical testing: specific physical capabilities.</a:t>
+              <a:t> the athlete’s specific capabilities </a:t>
             </a:r>
           </a:p>
           <a:p>
             <a:pPr lvl="0"/>
             <a:r>
+              <a:rPr lang="en-GB" b="1" dirty="0"/>
+              <a:t>Interviews and background:</a:t>
+            </a:r>
+            <a:r>
               <a:rPr lang="en-GB" dirty="0"/>
-              <a:t>Interviews and background: role, experience, and environment.</a:t>
-            </a:r>
-          </a:p>
-          <a:p>
-            <a:endParaRPr lang="en-US" dirty="0"/>
-          </a:p>
-        </p:txBody>
-      </p:sp>
-      <p:sp>
-        <p:nvSpPr>
-          <p:cNvPr id="4" name="TextBox 3">
-            <a:extLst>
-              <a:ext uri="{FF2B5EF4-FFF2-40B4-BE49-F238E27FC236}">
-                <a16:creationId xmlns:a16="http://schemas.microsoft.com/office/drawing/2014/main" id="{B2B901C3-E3FF-43F3-077E-FDA8B95413BC}"/>
-              </a:ext>
-            </a:extLst>
-          </p:cNvPr>
-          <p:cNvSpPr txBox="1"/>
-          <p:nvPr/>
-        </p:nvSpPr>
-        <p:spPr>
-          <a:xfrm>
-            <a:off x="1655970" y="5231396"/>
-            <a:ext cx="8775351" cy="369332"/>
-          </a:xfrm>
-          <a:prstGeom prst="rect">
-            <a:avLst/>
-          </a:prstGeom>
-          <a:noFill/>
-        </p:spPr>
-        <p:txBody>
-          <a:bodyPr wrap="none" rtlCol="0">
-            <a:spAutoFit/>
-          </a:bodyPr>
-          <a:lstStyle/>
-          <a:p>
-            <a:r>
-              <a:rPr lang="en-GB" dirty="0"/>
-              <a:t>The challenge is combining evidence without assuming every source is equally reliable.</a:t>
-            </a:r>
+              <a:t> the athlete’s role, experience, and environment</a:t>
+            </a:r>
+          </a:p>
+          <a:p>
             <a:endParaRPr lang="en-US" dirty="0"/>
           </a:p>
         </p:txBody>
@@ -14892,6 +18950,235 @@
   <p:clrMapOvr>
     <a:masterClrMapping/>
   </p:clrMapOvr>
+  <p:timing>
+    <p:tnLst>
+      <p:par>
+        <p:cTn id="1" dur="indefinite" restart="never" nodeType="tmRoot">
+          <p:childTnLst>
+            <p:seq concurrent="1" nextAc="seek">
+              <p:cTn id="2" dur="indefinite" nodeType="mainSeq">
+                <p:childTnLst>
+                  <p:par>
+                    <p:cTn id="3" fill="hold">
+                      <p:stCondLst>
+                        <p:cond delay="indefinite"/>
+                      </p:stCondLst>
+                      <p:childTnLst>
+                        <p:par>
+                          <p:cTn id="4" fill="hold">
+                            <p:stCondLst>
+                              <p:cond delay="0"/>
+                            </p:stCondLst>
+                            <p:childTnLst>
+                              <p:par>
+                                <p:cTn id="5" presetID="1" presetClass="entr" presetSubtype="0" fill="hold" grpId="0" nodeType="clickEffect">
+                                  <p:stCondLst>
+                                    <p:cond delay="0"/>
+                                  </p:stCondLst>
+                                  <p:childTnLst>
+                                    <p:set>
+                                      <p:cBhvr>
+                                        <p:cTn id="6" dur="1" fill="hold">
+                                          <p:stCondLst>
+                                            <p:cond delay="0"/>
+                                          </p:stCondLst>
+                                        </p:cTn>
+                                        <p:tgtEl>
+                                          <p:spTgt spid="3">
+                                            <p:txEl>
+                                              <p:pRg st="1" end="1"/>
+                                            </p:txEl>
+                                          </p:spTgt>
+                                        </p:tgtEl>
+                                        <p:attrNameLst>
+                                          <p:attrName>style.visibility</p:attrName>
+                                        </p:attrNameLst>
+                                      </p:cBhvr>
+                                      <p:to>
+                                        <p:strVal val="visible"/>
+                                      </p:to>
+                                    </p:set>
+                                  </p:childTnLst>
+                                </p:cTn>
+                              </p:par>
+                            </p:childTnLst>
+                          </p:cTn>
+                        </p:par>
+                      </p:childTnLst>
+                    </p:cTn>
+                  </p:par>
+                  <p:par>
+                    <p:cTn id="7" fill="hold">
+                      <p:stCondLst>
+                        <p:cond delay="indefinite"/>
+                      </p:stCondLst>
+                      <p:childTnLst>
+                        <p:par>
+                          <p:cTn id="8" fill="hold">
+                            <p:stCondLst>
+                              <p:cond delay="0"/>
+                            </p:stCondLst>
+                            <p:childTnLst>
+                              <p:par>
+                                <p:cTn id="9" presetID="1" presetClass="entr" presetSubtype="0" fill="hold" grpId="0" nodeType="clickEffect">
+                                  <p:stCondLst>
+                                    <p:cond delay="0"/>
+                                  </p:stCondLst>
+                                  <p:childTnLst>
+                                    <p:set>
+                                      <p:cBhvr>
+                                        <p:cTn id="10" dur="1" fill="hold">
+                                          <p:stCondLst>
+                                            <p:cond delay="0"/>
+                                          </p:stCondLst>
+                                        </p:cTn>
+                                        <p:tgtEl>
+                                          <p:spTgt spid="3">
+                                            <p:txEl>
+                                              <p:pRg st="2" end="2"/>
+                                            </p:txEl>
+                                          </p:spTgt>
+                                        </p:tgtEl>
+                                        <p:attrNameLst>
+                                          <p:attrName>style.visibility</p:attrName>
+                                        </p:attrNameLst>
+                                      </p:cBhvr>
+                                      <p:to>
+                                        <p:strVal val="visible"/>
+                                      </p:to>
+                                    </p:set>
+                                  </p:childTnLst>
+                                </p:cTn>
+                              </p:par>
+                            </p:childTnLst>
+                          </p:cTn>
+                        </p:par>
+                      </p:childTnLst>
+                    </p:cTn>
+                  </p:par>
+                  <p:par>
+                    <p:cTn id="11" fill="hold">
+                      <p:stCondLst>
+                        <p:cond delay="indefinite"/>
+                      </p:stCondLst>
+                      <p:childTnLst>
+                        <p:par>
+                          <p:cTn id="12" fill="hold">
+                            <p:stCondLst>
+                              <p:cond delay="0"/>
+                            </p:stCondLst>
+                            <p:childTnLst>
+                              <p:par>
+                                <p:cTn id="13" presetID="1" presetClass="entr" presetSubtype="0" fill="hold" grpId="0" nodeType="clickEffect">
+                                  <p:stCondLst>
+                                    <p:cond delay="0"/>
+                                  </p:stCondLst>
+                                  <p:childTnLst>
+                                    <p:set>
+                                      <p:cBhvr>
+                                        <p:cTn id="14" dur="1" fill="hold">
+                                          <p:stCondLst>
+                                            <p:cond delay="0"/>
+                                          </p:stCondLst>
+                                        </p:cTn>
+                                        <p:tgtEl>
+                                          <p:spTgt spid="3">
+                                            <p:txEl>
+                                              <p:pRg st="3" end="3"/>
+                                            </p:txEl>
+                                          </p:spTgt>
+                                        </p:tgtEl>
+                                        <p:attrNameLst>
+                                          <p:attrName>style.visibility</p:attrName>
+                                        </p:attrNameLst>
+                                      </p:cBhvr>
+                                      <p:to>
+                                        <p:strVal val="visible"/>
+                                      </p:to>
+                                    </p:set>
+                                  </p:childTnLst>
+                                </p:cTn>
+                              </p:par>
+                            </p:childTnLst>
+                          </p:cTn>
+                        </p:par>
+                      </p:childTnLst>
+                    </p:cTn>
+                  </p:par>
+                  <p:par>
+                    <p:cTn id="15" fill="hold">
+                      <p:stCondLst>
+                        <p:cond delay="indefinite"/>
+                      </p:stCondLst>
+                      <p:childTnLst>
+                        <p:par>
+                          <p:cTn id="16" fill="hold">
+                            <p:stCondLst>
+                              <p:cond delay="0"/>
+                            </p:stCondLst>
+                            <p:childTnLst>
+                              <p:par>
+                                <p:cTn id="17" presetID="1" presetClass="entr" presetSubtype="0" fill="hold" grpId="0" nodeType="clickEffect">
+                                  <p:stCondLst>
+                                    <p:cond delay="0"/>
+                                  </p:stCondLst>
+                                  <p:childTnLst>
+                                    <p:set>
+                                      <p:cBhvr>
+                                        <p:cTn id="18" dur="1" fill="hold">
+                                          <p:stCondLst>
+                                            <p:cond delay="0"/>
+                                          </p:stCondLst>
+                                        </p:cTn>
+                                        <p:tgtEl>
+                                          <p:spTgt spid="3">
+                                            <p:txEl>
+                                              <p:pRg st="4" end="4"/>
+                                            </p:txEl>
+                                          </p:spTgt>
+                                        </p:tgtEl>
+                                        <p:attrNameLst>
+                                          <p:attrName>style.visibility</p:attrName>
+                                        </p:attrNameLst>
+                                      </p:cBhvr>
+                                      <p:to>
+                                        <p:strVal val="visible"/>
+                                      </p:to>
+                                    </p:set>
+                                  </p:childTnLst>
+                                </p:cTn>
+                              </p:par>
+                            </p:childTnLst>
+                          </p:cTn>
+                        </p:par>
+                      </p:childTnLst>
+                    </p:cTn>
+                  </p:par>
+                </p:childTnLst>
+              </p:cTn>
+              <p:prevCondLst>
+                <p:cond evt="onPrev" delay="0">
+                  <p:tgtEl>
+                    <p:sldTgt/>
+                  </p:tgtEl>
+                </p:cond>
+              </p:prevCondLst>
+              <p:nextCondLst>
+                <p:cond evt="onNext" delay="0">
+                  <p:tgtEl>
+                    <p:sldTgt/>
+                  </p:tgtEl>
+                </p:cond>
+              </p:nextCondLst>
+            </p:seq>
+          </p:childTnLst>
+        </p:cTn>
+      </p:par>
+    </p:tnLst>
+    <p:bldLst>
+      <p:bldP spid="3" grpId="0" uiExpand="1" build="p"/>
+    </p:bldLst>
+  </p:timing>
 </p:sld>
 </file>
 
@@ -14914,72 +19201,10 @@
       </p:grpSpPr>
       <p:sp>
         <p:nvSpPr>
-          <p:cNvPr id="2" name="Title 1">
+          <p:cNvPr id="5" name="Rounded Rectangle 4">
             <a:extLst>
               <a:ext uri="{FF2B5EF4-FFF2-40B4-BE49-F238E27FC236}">
-                <a16:creationId xmlns:a16="http://schemas.microsoft.com/office/drawing/2014/main" id="{1688469D-40F7-7830-05F1-2D005D4F89DE}"/>
-              </a:ext>
-            </a:extLst>
-          </p:cNvPr>
-          <p:cNvSpPr>
-            <a:spLocks noGrp="1"/>
-          </p:cNvSpPr>
-          <p:nvPr>
-            <p:ph type="title"/>
-          </p:nvPr>
-        </p:nvSpPr>
-        <p:spPr/>
-        <p:txBody>
-          <a:bodyPr>
-            <a:normAutofit/>
-          </a:bodyPr>
-          <a:lstStyle/>
-          <a:p>
-            <a:r>
-              <a:rPr lang="en-GB" dirty="0"/>
-              <a:t>Domain 2: Athlete Tracking and Monitoring</a:t>
-            </a:r>
-            <a:endParaRPr lang="en-US" dirty="0"/>
-          </a:p>
-        </p:txBody>
-      </p:sp>
-      <p:sp>
-        <p:nvSpPr>
-          <p:cNvPr id="3" name="Content Placeholder 2">
-            <a:extLst>
-              <a:ext uri="{FF2B5EF4-FFF2-40B4-BE49-F238E27FC236}">
-                <a16:creationId xmlns:a16="http://schemas.microsoft.com/office/drawing/2014/main" id="{6A687C13-1F8F-6A9D-FF31-C0F3288FE451}"/>
-              </a:ext>
-            </a:extLst>
-          </p:cNvPr>
-          <p:cNvSpPr>
-            <a:spLocks noGrp="1"/>
-          </p:cNvSpPr>
-          <p:nvPr>
-            <p:ph idx="1"/>
-          </p:nvPr>
-        </p:nvSpPr>
-        <p:spPr/>
-        <p:txBody>
-          <a:bodyPr>
-            <a:normAutofit/>
-          </a:bodyPr>
-          <a:lstStyle/>
-          <a:p>
-            <a:pPr lvl="0"/>
-            <a:r>
-              <a:rPr lang="en-GB" dirty="0"/>
-              <a:t>Understand what athletes do and how they respond across training and competition.</a:t>
-            </a:r>
-          </a:p>
-        </p:txBody>
-      </p:sp>
-      <p:sp>
-        <p:nvSpPr>
-          <p:cNvPr id="4" name="Rounded Rectangle 3">
-            <a:extLst>
-              <a:ext uri="{FF2B5EF4-FFF2-40B4-BE49-F238E27FC236}">
-                <a16:creationId xmlns:a16="http://schemas.microsoft.com/office/drawing/2014/main" id="{CC26C4C5-D99B-CDA1-7F9C-769BF13A41A9}"/>
+                <a16:creationId xmlns:a16="http://schemas.microsoft.com/office/drawing/2014/main" id="{BC6C524E-B2B4-7A6C-16BF-529B5D15D21E}"/>
               </a:ext>
             </a:extLst>
           </p:cNvPr>
@@ -15015,9 +19240,8 @@
           <a:p>
             <a:r>
               <a:rPr lang="en-GB" sz="2400" b="1" dirty="0"/>
-              <a:t>Common information</a:t>
-            </a:r>
-            <a:endParaRPr lang="en-GB" sz="2400" dirty="0"/>
+              <a:t>Common decisions</a:t>
+            </a:r>
           </a:p>
           <a:p>
             <a:pPr marL="342900" indent="-342900">
@@ -15025,8 +19249,8 @@
               <a:buChar char="•"/>
             </a:pPr>
             <a:r>
-              <a:rPr lang="en-GB" sz="2400" dirty="0"/>
-              <a:t>External load</a:t>
+              <a:rPr lang="en-GB" sz="2000" dirty="0"/>
+              <a:t>Adjust training</a:t>
             </a:r>
           </a:p>
           <a:p>
@@ -15035,8 +19259,8 @@
               <a:buChar char="•"/>
             </a:pPr>
             <a:r>
-              <a:rPr lang="en-GB" sz="2400" dirty="0"/>
-              <a:t>Internal load</a:t>
+              <a:rPr lang="en-GB" sz="2000" dirty="0"/>
+              <a:t>Plan recovery</a:t>
             </a:r>
           </a:p>
           <a:p>
@@ -15045,8 +19269,8 @@
               <a:buChar char="•"/>
             </a:pPr>
             <a:r>
-              <a:rPr lang="en-GB" sz="2400" dirty="0"/>
-              <a:t>Wellness and readiness</a:t>
+              <a:rPr lang="en-GB" sz="2000" dirty="0"/>
+              <a:t>Prepare for competition demands</a:t>
             </a:r>
           </a:p>
           <a:p>
@@ -15055,19 +19279,80 @@
               <a:buChar char="•"/>
             </a:pPr>
             <a:r>
-              <a:rPr lang="en-GB" sz="2400" dirty="0"/>
-              <a:t>Performance-test results</a:t>
-            </a:r>
-            <a:endParaRPr lang="en-US" sz="2400" dirty="0"/>
+              <a:rPr lang="en-GB" sz="2000" dirty="0"/>
+              <a:t>Evaluate return-to-play progression</a:t>
+            </a:r>
           </a:p>
         </p:txBody>
       </p:sp>
       <p:sp>
         <p:nvSpPr>
-          <p:cNvPr id="5" name="Rounded Rectangle 4">
+          <p:cNvPr id="2" name="Title 1">
             <a:extLst>
               <a:ext uri="{FF2B5EF4-FFF2-40B4-BE49-F238E27FC236}">
-                <a16:creationId xmlns:a16="http://schemas.microsoft.com/office/drawing/2014/main" id="{BC6C524E-B2B4-7A6C-16BF-529B5D15D21E}"/>
+                <a16:creationId xmlns:a16="http://schemas.microsoft.com/office/drawing/2014/main" id="{1688469D-40F7-7830-05F1-2D005D4F89DE}"/>
+              </a:ext>
+            </a:extLst>
+          </p:cNvPr>
+          <p:cNvSpPr>
+            <a:spLocks noGrp="1"/>
+          </p:cNvSpPr>
+          <p:nvPr>
+            <p:ph type="title"/>
+          </p:nvPr>
+        </p:nvSpPr>
+        <p:spPr/>
+        <p:txBody>
+          <a:bodyPr>
+            <a:normAutofit/>
+          </a:bodyPr>
+          <a:lstStyle/>
+          <a:p>
+            <a:r>
+              <a:rPr lang="en-GB" dirty="0"/>
+              <a:t>Domain 2: Athlete Tracking and Monitoring</a:t>
+            </a:r>
+            <a:endParaRPr lang="en-US" dirty="0"/>
+          </a:p>
+        </p:txBody>
+      </p:sp>
+      <p:sp>
+        <p:nvSpPr>
+          <p:cNvPr id="3" name="Content Placeholder 2">
+            <a:extLst>
+              <a:ext uri="{FF2B5EF4-FFF2-40B4-BE49-F238E27FC236}">
+                <a16:creationId xmlns:a16="http://schemas.microsoft.com/office/drawing/2014/main" id="{6A687C13-1F8F-6A9D-FF31-C0F3288FE451}"/>
+              </a:ext>
+            </a:extLst>
+          </p:cNvPr>
+          <p:cNvSpPr>
+            <a:spLocks noGrp="1"/>
+          </p:cNvSpPr>
+          <p:nvPr>
+            <p:ph idx="1"/>
+          </p:nvPr>
+        </p:nvSpPr>
+        <p:spPr/>
+        <p:txBody>
+          <a:bodyPr>
+            <a:normAutofit/>
+          </a:bodyPr>
+          <a:lstStyle/>
+          <a:p>
+            <a:pPr lvl="0"/>
+            <a:r>
+              <a:rPr lang="en-GB" dirty="0"/>
+              <a:t>Understand what athletes do and how they respond across training and competition.</a:t>
+            </a:r>
+          </a:p>
+        </p:txBody>
+      </p:sp>
+      <p:sp>
+        <p:nvSpPr>
+          <p:cNvPr id="4" name="Rounded Rectangle 3">
+            <a:extLst>
+              <a:ext uri="{FF2B5EF4-FFF2-40B4-BE49-F238E27FC236}">
+                <a16:creationId xmlns:a16="http://schemas.microsoft.com/office/drawing/2014/main" id="{CC26C4C5-D99B-CDA1-7F9C-769BF13A41A9}"/>
               </a:ext>
             </a:extLst>
           </p:cNvPr>
@@ -15103,8 +19388,9 @@
           <a:p>
             <a:r>
               <a:rPr lang="en-GB" sz="2400" b="1" dirty="0"/>
-              <a:t>Common decision</a:t>
-            </a:r>
+              <a:t>Common information</a:t>
+            </a:r>
+            <a:endParaRPr lang="en-GB" sz="2400" dirty="0"/>
           </a:p>
           <a:p>
             <a:pPr marL="342900" indent="-342900">
@@ -15112,8 +19398,8 @@
               <a:buChar char="•"/>
             </a:pPr>
             <a:r>
-              <a:rPr lang="en-GB" sz="2400" dirty="0"/>
-              <a:t>Adjust today's training</a:t>
+              <a:rPr lang="en-GB" sz="2000" dirty="0"/>
+              <a:t>External load</a:t>
             </a:r>
           </a:p>
           <a:p>
@@ -15122,8 +19408,8 @@
               <a:buChar char="•"/>
             </a:pPr>
             <a:r>
-              <a:rPr lang="en-GB" sz="2400" dirty="0"/>
-              <a:t>Plan recovery</a:t>
+              <a:rPr lang="en-GB" sz="2000" dirty="0"/>
+              <a:t>Internal load</a:t>
             </a:r>
           </a:p>
           <a:p>
@@ -15132,8 +19418,8 @@
               <a:buChar char="•"/>
             </a:pPr>
             <a:r>
-              <a:rPr lang="en-GB" sz="2400" dirty="0"/>
-              <a:t>Prepare for competition demands</a:t>
+              <a:rPr lang="en-GB" sz="2000" dirty="0"/>
+              <a:t>Wellness and readiness</a:t>
             </a:r>
           </a:p>
           <a:p>
@@ -15142,9 +19428,10 @@
               <a:buChar char="•"/>
             </a:pPr>
             <a:r>
-              <a:rPr lang="en-GB" sz="2400" dirty="0"/>
-              <a:t>Evaluate return-to-play progression</a:t>
-            </a:r>
+              <a:rPr lang="en-GB" sz="2000" dirty="0"/>
+              <a:t>Performance-test results</a:t>
+            </a:r>
+            <a:endParaRPr lang="en-US" sz="2000" dirty="0"/>
           </a:p>
         </p:txBody>
       </p:sp>
@@ -15158,6 +19445,130 @@
   <p:clrMapOvr>
     <a:masterClrMapping/>
   </p:clrMapOvr>
+  <p:timing>
+    <p:tnLst>
+      <p:par>
+        <p:cTn id="1" dur="indefinite" restart="never" nodeType="tmRoot">
+          <p:childTnLst>
+            <p:seq concurrent="1" nextAc="seek">
+              <p:cTn id="2" dur="indefinite" nodeType="mainSeq">
+                <p:childTnLst>
+                  <p:par>
+                    <p:cTn id="3" fill="hold">
+                      <p:stCondLst>
+                        <p:cond delay="indefinite"/>
+                      </p:stCondLst>
+                      <p:childTnLst>
+                        <p:par>
+                          <p:cTn id="4" fill="hold">
+                            <p:stCondLst>
+                              <p:cond delay="0"/>
+                            </p:stCondLst>
+                            <p:childTnLst>
+                              <p:par>
+                                <p:cTn id="5" presetID="1" presetClass="entr" presetSubtype="0" fill="hold" grpId="0" nodeType="clickEffect">
+                                  <p:stCondLst>
+                                    <p:cond delay="0"/>
+                                  </p:stCondLst>
+                                  <p:childTnLst>
+                                    <p:set>
+                                      <p:cBhvr>
+                                        <p:cTn id="6" dur="1" fill="hold">
+                                          <p:stCondLst>
+                                            <p:cond delay="0"/>
+                                          </p:stCondLst>
+                                        </p:cTn>
+                                        <p:tgtEl>
+                                          <p:spTgt spid="5"/>
+                                        </p:tgtEl>
+                                        <p:attrNameLst>
+                                          <p:attrName>style.visibility</p:attrName>
+                                        </p:attrNameLst>
+                                      </p:cBhvr>
+                                      <p:to>
+                                        <p:strVal val="visible"/>
+                                      </p:to>
+                                    </p:set>
+                                  </p:childTnLst>
+                                </p:cTn>
+                              </p:par>
+                            </p:childTnLst>
+                          </p:cTn>
+                        </p:par>
+                      </p:childTnLst>
+                    </p:cTn>
+                  </p:par>
+                  <p:par>
+                    <p:cTn id="7" fill="hold">
+                      <p:stCondLst>
+                        <p:cond delay="indefinite"/>
+                      </p:stCondLst>
+                      <p:childTnLst>
+                        <p:par>
+                          <p:cTn id="8" fill="hold">
+                            <p:stCondLst>
+                              <p:cond delay="0"/>
+                            </p:stCondLst>
+                            <p:childTnLst>
+                              <p:par>
+                                <p:cTn id="9" presetID="1" presetClass="entr" presetSubtype="0" fill="hold" grpId="0" nodeType="clickEffect">
+                                  <p:stCondLst>
+                                    <p:cond delay="0"/>
+                                  </p:stCondLst>
+                                  <p:childTnLst>
+                                    <p:set>
+                                      <p:cBhvr>
+                                        <p:cTn id="10" dur="1" fill="hold">
+                                          <p:stCondLst>
+                                            <p:cond delay="0"/>
+                                          </p:stCondLst>
+                                        </p:cTn>
+                                        <p:tgtEl>
+                                          <p:spTgt spid="4"/>
+                                        </p:tgtEl>
+                                        <p:attrNameLst>
+                                          <p:attrName>style.visibility</p:attrName>
+                                        </p:attrNameLst>
+                                      </p:cBhvr>
+                                      <p:to>
+                                        <p:strVal val="visible"/>
+                                      </p:to>
+                                    </p:set>
+                                  </p:childTnLst>
+                                </p:cTn>
+                              </p:par>
+                            </p:childTnLst>
+                          </p:cTn>
+                        </p:par>
+                      </p:childTnLst>
+                    </p:cTn>
+                  </p:par>
+                </p:childTnLst>
+              </p:cTn>
+              <p:prevCondLst>
+                <p:cond evt="onPrev" delay="0">
+                  <p:tgtEl>
+                    <p:sldTgt/>
+                  </p:tgtEl>
+                </p:cond>
+              </p:prevCondLst>
+              <p:nextCondLst>
+                <p:cond evt="onNext" delay="0">
+                  <p:tgtEl>
+                    <p:sldTgt/>
+                  </p:tgtEl>
+                </p:cond>
+              </p:nextCondLst>
+            </p:seq>
+          </p:childTnLst>
+        </p:cTn>
+      </p:par>
+    </p:tnLst>
+    <p:bldLst>
+      <p:bldP spid="5" grpId="0" animBg="1"/>
+      <p:bldP spid="4" grpId="0" animBg="1"/>
+    </p:bldLst>
+  </p:timing>
 </p:sld>
 </file>
 
@@ -15200,7 +19611,12 @@
             <p:ph type="title"/>
           </p:nvPr>
         </p:nvSpPr>
-        <p:spPr/>
+        <p:spPr>
+          <a:xfrm>
+            <a:off x="838200" y="365126"/>
+            <a:ext cx="10515600" cy="1311274"/>
+          </a:xfrm>
+        </p:spPr>
         <p:txBody>
           <a:bodyPr>
             <a:normAutofit/>
@@ -15209,7 +19625,7 @@
           <a:p>
             <a:r>
               <a:rPr lang="en-GB" dirty="0"/>
-              <a:t>Components of Athlete Tracking</a:t>
+              <a:t>Tracking Connects the Training Plan, Completed Work, and Athlete Response</a:t>
             </a:r>
             <a:endParaRPr lang="en-US" dirty="0"/>
           </a:p>
@@ -15231,7 +19647,12 @@
             <p:ph idx="1"/>
           </p:nvPr>
         </p:nvSpPr>
-        <p:spPr/>
+        <p:spPr>
+          <a:xfrm>
+            <a:off x="838200" y="1828800"/>
+            <a:ext cx="10515600" cy="4348163"/>
+          </a:xfrm>
+        </p:spPr>
         <p:txBody>
           <a:bodyPr>
             <a:normAutofit/>
@@ -15252,6 +19673,10 @@
             </a:r>
           </a:p>
           <a:p>
+            <a:pPr lvl="1"/>
+            <a:endParaRPr lang="en-GB" dirty="0"/>
+          </a:p>
+          <a:p>
             <a:pPr lvl="0"/>
             <a:r>
               <a:rPr lang="en-GB" dirty="0"/>
@@ -15264,6 +19689,10 @@
               <a:rPr lang="en-GB" dirty="0"/>
               <a:t>Duration, distance, accelerations, impacts, repetitions</a:t>
             </a:r>
+          </a:p>
+          <a:p>
+            <a:pPr lvl="1"/>
+            <a:endParaRPr lang="en-GB" dirty="0"/>
           </a:p>
           <a:p>
             <a:pPr lvl="0"/>
@@ -15295,7 +19724,7 @@
         </p:nvSpPr>
         <p:spPr>
           <a:xfrm>
-            <a:off x="1572491" y="5185229"/>
+            <a:off x="1572491" y="5960031"/>
             <a:ext cx="9047018" cy="369332"/>
           </a:xfrm>
           <a:prstGeom prst="rect">
@@ -15332,6 +19761,325 @@
   <p:clrMapOvr>
     <a:masterClrMapping/>
   </p:clrMapOvr>
+  <p:timing>
+    <p:tnLst>
+      <p:par>
+        <p:cTn id="1" dur="indefinite" restart="never" nodeType="tmRoot">
+          <p:childTnLst>
+            <p:seq concurrent="1" nextAc="seek">
+              <p:cTn id="2" dur="indefinite" nodeType="mainSeq">
+                <p:childTnLst>
+                  <p:par>
+                    <p:cTn id="3" fill="hold">
+                      <p:stCondLst>
+                        <p:cond delay="indefinite"/>
+                      </p:stCondLst>
+                      <p:childTnLst>
+                        <p:par>
+                          <p:cTn id="4" fill="hold">
+                            <p:stCondLst>
+                              <p:cond delay="0"/>
+                            </p:stCondLst>
+                            <p:childTnLst>
+                              <p:par>
+                                <p:cTn id="5" presetID="1" presetClass="entr" presetSubtype="0" fill="hold" grpId="0" nodeType="clickEffect">
+                                  <p:stCondLst>
+                                    <p:cond delay="0"/>
+                                  </p:stCondLst>
+                                  <p:childTnLst>
+                                    <p:set>
+                                      <p:cBhvr>
+                                        <p:cTn id="6" dur="1" fill="hold">
+                                          <p:stCondLst>
+                                            <p:cond delay="0"/>
+                                          </p:stCondLst>
+                                        </p:cTn>
+                                        <p:tgtEl>
+                                          <p:spTgt spid="3">
+                                            <p:txEl>
+                                              <p:pRg st="0" end="0"/>
+                                            </p:txEl>
+                                          </p:spTgt>
+                                        </p:tgtEl>
+                                        <p:attrNameLst>
+                                          <p:attrName>style.visibility</p:attrName>
+                                        </p:attrNameLst>
+                                      </p:cBhvr>
+                                      <p:to>
+                                        <p:strVal val="visible"/>
+                                      </p:to>
+                                    </p:set>
+                                  </p:childTnLst>
+                                </p:cTn>
+                              </p:par>
+                              <p:par>
+                                <p:cTn id="7" presetID="1" presetClass="entr" presetSubtype="0" fill="hold" grpId="0" nodeType="withEffect">
+                                  <p:stCondLst>
+                                    <p:cond delay="0"/>
+                                  </p:stCondLst>
+                                  <p:childTnLst>
+                                    <p:set>
+                                      <p:cBhvr>
+                                        <p:cTn id="8" dur="1" fill="hold">
+                                          <p:stCondLst>
+                                            <p:cond delay="0"/>
+                                          </p:stCondLst>
+                                        </p:cTn>
+                                        <p:tgtEl>
+                                          <p:spTgt spid="3">
+                                            <p:txEl>
+                                              <p:pRg st="1" end="1"/>
+                                            </p:txEl>
+                                          </p:spTgt>
+                                        </p:tgtEl>
+                                        <p:attrNameLst>
+                                          <p:attrName>style.visibility</p:attrName>
+                                        </p:attrNameLst>
+                                      </p:cBhvr>
+                                      <p:to>
+                                        <p:strVal val="visible"/>
+                                      </p:to>
+                                    </p:set>
+                                  </p:childTnLst>
+                                </p:cTn>
+                              </p:par>
+                            </p:childTnLst>
+                          </p:cTn>
+                        </p:par>
+                      </p:childTnLst>
+                    </p:cTn>
+                  </p:par>
+                  <p:par>
+                    <p:cTn id="9" fill="hold">
+                      <p:stCondLst>
+                        <p:cond delay="indefinite"/>
+                      </p:stCondLst>
+                      <p:childTnLst>
+                        <p:par>
+                          <p:cTn id="10" fill="hold">
+                            <p:stCondLst>
+                              <p:cond delay="0"/>
+                            </p:stCondLst>
+                            <p:childTnLst>
+                              <p:par>
+                                <p:cTn id="11" presetID="1" presetClass="entr" presetSubtype="0" fill="hold" grpId="0" nodeType="clickEffect">
+                                  <p:stCondLst>
+                                    <p:cond delay="0"/>
+                                  </p:stCondLst>
+                                  <p:childTnLst>
+                                    <p:set>
+                                      <p:cBhvr>
+                                        <p:cTn id="12" dur="1" fill="hold">
+                                          <p:stCondLst>
+                                            <p:cond delay="0"/>
+                                          </p:stCondLst>
+                                        </p:cTn>
+                                        <p:tgtEl>
+                                          <p:spTgt spid="3">
+                                            <p:txEl>
+                                              <p:pRg st="3" end="3"/>
+                                            </p:txEl>
+                                          </p:spTgt>
+                                        </p:tgtEl>
+                                        <p:attrNameLst>
+                                          <p:attrName>style.visibility</p:attrName>
+                                        </p:attrNameLst>
+                                      </p:cBhvr>
+                                      <p:to>
+                                        <p:strVal val="visible"/>
+                                      </p:to>
+                                    </p:set>
+                                  </p:childTnLst>
+                                </p:cTn>
+                              </p:par>
+                              <p:par>
+                                <p:cTn id="13" presetID="1" presetClass="entr" presetSubtype="0" fill="hold" grpId="0" nodeType="withEffect">
+                                  <p:stCondLst>
+                                    <p:cond delay="0"/>
+                                  </p:stCondLst>
+                                  <p:childTnLst>
+                                    <p:set>
+                                      <p:cBhvr>
+                                        <p:cTn id="14" dur="1" fill="hold">
+                                          <p:stCondLst>
+                                            <p:cond delay="0"/>
+                                          </p:stCondLst>
+                                        </p:cTn>
+                                        <p:tgtEl>
+                                          <p:spTgt spid="3">
+                                            <p:txEl>
+                                              <p:pRg st="4" end="4"/>
+                                            </p:txEl>
+                                          </p:spTgt>
+                                        </p:tgtEl>
+                                        <p:attrNameLst>
+                                          <p:attrName>style.visibility</p:attrName>
+                                        </p:attrNameLst>
+                                      </p:cBhvr>
+                                      <p:to>
+                                        <p:strVal val="visible"/>
+                                      </p:to>
+                                    </p:set>
+                                  </p:childTnLst>
+                                </p:cTn>
+                              </p:par>
+                            </p:childTnLst>
+                          </p:cTn>
+                        </p:par>
+                      </p:childTnLst>
+                    </p:cTn>
+                  </p:par>
+                  <p:par>
+                    <p:cTn id="15" fill="hold">
+                      <p:stCondLst>
+                        <p:cond delay="indefinite"/>
+                      </p:stCondLst>
+                      <p:childTnLst>
+                        <p:par>
+                          <p:cTn id="16" fill="hold">
+                            <p:stCondLst>
+                              <p:cond delay="0"/>
+                            </p:stCondLst>
+                            <p:childTnLst>
+                              <p:par>
+                                <p:cTn id="17" presetID="1" presetClass="entr" presetSubtype="0" fill="hold" grpId="0" nodeType="clickEffect">
+                                  <p:stCondLst>
+                                    <p:cond delay="0"/>
+                                  </p:stCondLst>
+                                  <p:childTnLst>
+                                    <p:set>
+                                      <p:cBhvr>
+                                        <p:cTn id="18" dur="1" fill="hold">
+                                          <p:stCondLst>
+                                            <p:cond delay="0"/>
+                                          </p:stCondLst>
+                                        </p:cTn>
+                                        <p:tgtEl>
+                                          <p:spTgt spid="3">
+                                            <p:txEl>
+                                              <p:pRg st="6" end="6"/>
+                                            </p:txEl>
+                                          </p:spTgt>
+                                        </p:tgtEl>
+                                        <p:attrNameLst>
+                                          <p:attrName>style.visibility</p:attrName>
+                                        </p:attrNameLst>
+                                      </p:cBhvr>
+                                      <p:to>
+                                        <p:strVal val="visible"/>
+                                      </p:to>
+                                    </p:set>
+                                  </p:childTnLst>
+                                </p:cTn>
+                              </p:par>
+                              <p:par>
+                                <p:cTn id="19" presetID="1" presetClass="entr" presetSubtype="0" fill="hold" grpId="0" nodeType="withEffect">
+                                  <p:stCondLst>
+                                    <p:cond delay="0"/>
+                                  </p:stCondLst>
+                                  <p:childTnLst>
+                                    <p:set>
+                                      <p:cBhvr>
+                                        <p:cTn id="20" dur="1" fill="hold">
+                                          <p:stCondLst>
+                                            <p:cond delay="0"/>
+                                          </p:stCondLst>
+                                        </p:cTn>
+                                        <p:tgtEl>
+                                          <p:spTgt spid="3">
+                                            <p:txEl>
+                                              <p:pRg st="7" end="7"/>
+                                            </p:txEl>
+                                          </p:spTgt>
+                                        </p:tgtEl>
+                                        <p:attrNameLst>
+                                          <p:attrName>style.visibility</p:attrName>
+                                        </p:attrNameLst>
+                                      </p:cBhvr>
+                                      <p:to>
+                                        <p:strVal val="visible"/>
+                                      </p:to>
+                                    </p:set>
+                                  </p:childTnLst>
+                                </p:cTn>
+                              </p:par>
+                            </p:childTnLst>
+                          </p:cTn>
+                        </p:par>
+                      </p:childTnLst>
+                    </p:cTn>
+                  </p:par>
+                  <p:par>
+                    <p:cTn id="21" fill="hold">
+                      <p:stCondLst>
+                        <p:cond delay="indefinite"/>
+                      </p:stCondLst>
+                      <p:childTnLst>
+                        <p:par>
+                          <p:cTn id="22" fill="hold">
+                            <p:stCondLst>
+                              <p:cond delay="0"/>
+                            </p:stCondLst>
+                            <p:childTnLst>
+                              <p:par>
+                                <p:cTn id="23" presetID="1" presetClass="entr" presetSubtype="0" fill="hold" grpId="0" nodeType="clickEffect">
+                                  <p:stCondLst>
+                                    <p:cond delay="0"/>
+                                  </p:stCondLst>
+                                  <p:childTnLst>
+                                    <p:set>
+                                      <p:cBhvr>
+                                        <p:cTn id="24" dur="1" fill="hold">
+                                          <p:stCondLst>
+                                            <p:cond delay="0"/>
+                                          </p:stCondLst>
+                                        </p:cTn>
+                                        <p:tgtEl>
+                                          <p:spTgt spid="4"/>
+                                        </p:tgtEl>
+                                        <p:attrNameLst>
+                                          <p:attrName>style.visibility</p:attrName>
+                                        </p:attrNameLst>
+                                      </p:cBhvr>
+                                      <p:to>
+                                        <p:strVal val="visible"/>
+                                      </p:to>
+                                    </p:set>
+                                  </p:childTnLst>
+                                </p:cTn>
+                              </p:par>
+                            </p:childTnLst>
+                          </p:cTn>
+                        </p:par>
+                      </p:childTnLst>
+                    </p:cTn>
+                  </p:par>
+                </p:childTnLst>
+              </p:cTn>
+              <p:prevCondLst>
+                <p:cond evt="onPrev" delay="0">
+                  <p:tgtEl>
+                    <p:sldTgt/>
+                  </p:tgtEl>
+                </p:cond>
+              </p:prevCondLst>
+              <p:nextCondLst>
+                <p:cond evt="onNext" delay="0">
+                  <p:tgtEl>
+                    <p:sldTgt/>
+                  </p:tgtEl>
+                </p:cond>
+              </p:nextCondLst>
+            </p:seq>
+          </p:childTnLst>
+        </p:cTn>
+      </p:par>
+    </p:tnLst>
+    <p:bldLst>
+      <p:bldP spid="3" grpId="0" build="p"/>
+      <p:bldP spid="4" grpId="0"/>
+    </p:bldLst>
+  </p:timing>
 </p:sld>
 </file>
 
